--- a/live-fx/business/LiveFX_Pitch.pptx
+++ b/live-fx/business/LiveFX_Pitch.pptx
@@ -123,7 +123,7 @@
   <p:extLst>
     <p:ext uri="{521415D9-36F7-43E2-AB2F-B90AF26B5E84}">
       <p14:sectionLst xmlns:p14="http://schemas.microsoft.com/office/powerpoint/2010/main">
-        <p14:section name="Heute: LiveFX 2.0" id="{8ffd8f69-e8b6-99de-6714-8a43f1c69431}">
+        <p14:section name="Heute: LiveFX 2.0" id="{115b8b9e-bf86-2021-5767-a3c9bdfc864b}">
           <p14:sldIdLst>
             <p14:sldId id="256"/>
             <p14:sldId id="257"/>
@@ -138,7 +138,7 @@
             <p14:sldId id="266"/>
           </p14:sldIdLst>
         </p14:section>
-        <p14:section name="Vision 2027–2029" id="{c3cec9d8-d335-2fd6-baaf-142a4a0aa5e4}">
+        <p14:section name="Vision 2027–2029" id="{00220776-bcbe-4b51-2862-a09e2039e5bc}">
           <p14:sldIdLst>
             <p14:sldId id="267"/>
             <p14:sldId id="268"/>
@@ -146,7 +146,7 @@
             <p14:sldId id="270"/>
           </p14:sldIdLst>
         </p14:section>
-        <p14:section name="Team und Ask" id="{500c9499-6bd4-e492-6478-cf2d6c76bbcd}">
+        <p14:section name="Team und Ask" id="{c70f0e0e-fd10-f567-8485-fd3b814d12b8}">
           <p14:sldIdLst>
             <p14:sldId id="271"/>
             <p14:sldId id="272"/>
@@ -1556,7 +1556,7 @@
           <a:p>
             <a:r>
               <a:rPr lang="en-US" dirty="0"/>
-              <a:t>Die Gründerin ist Nutzerin, Content-Lieferantin und Produktverantwortliche in einer Person – das ist der Grund, warum das Produkt in Dialekten, Hochkant und Türkçe funktioniert. Und als Kinderbuchautorin bringt sie den ersten Verlags- und Bildungsfall selbst mit. Mit dem Seed kommen zwei Hires; für WortBild holen wir fachliche Prüfung über einen Edtech-Beirat.</a:t>
+              <a:t>Der Gründer ist Nutzer, Content-Lieferant und Produktverantwortlicher in einer Person – das ist der Grund, warum das Produkt in Dialekten, Hochkant und Türkçe funktioniert. Und als Kinderbuchautor bringt er den ersten Verlags- und Bildungsfall selbst mit. Gönül Demet verantwortet Investor Relations und ist Ansprechpartnerin für die Pre-Seed-Runde. Mit dem Pre-Seed (500.000 €) kommen zwei Hires; für WortBild holen wir fachliche Prüfung über einen Edtech-Beirat.</a:t>
             </a:r>
             <a:endParaRPr lang="en-US" dirty="0"/>
           </a:p>
@@ -1644,7 +1644,7 @@
           <a:p>
             <a:r>
               <a:rPr lang="en-US" dirty="0"/>
-              <a:t>Konkret enden: Was wir brauchen, ist ein Ansprechpartner im Live-Team und ein 8-Wochen-Pilot mit 20 Creatorn. Wir liefern Overlay, Pakete, Support und die Messung (Watchtime, Gifts, Clips aus Lives). Neu: Für WortBild und Erzählfilm suchen wir einen zweiten Pilot mit Bildungsträgern, Sprachlern-Plattformen oder Verlagen – der erste Verlagsfall ist die eigene Kinderbuchreihe. Das Deck gibt es auch auf Türkisch und Englisch.</a:t>
+              <a:t>Konkret enden: Was wir brauchen, ist ein Ansprechpartner im Live-Team und ein 8-Wochen-Pilot mit 20 Creatorn. Wir liefern Overlay, Pakete, Support und die Messung (Watchtime, Gifts, Clips aus Lives). Neu: Für WortBild und Erzählfilm suchen wir einen zweiten Pilot mit Bildungsträgern, Sprachlern-Plattformen oder Verlagen – der erste Verlagsfall ist die eigene Kinderbuchreihe. Zur Runde: 500.000 € Pre-Seed für LiveFX und alle Projekte, 24 Monate. Mittelverwendung als Vorschlag: Team 250 T€, Vision-Linien 100 T€ (zuerst WortBild/Sprachenlernen und Story-Engine), Go-to-Market 75 T€, Recht/Marke/Datenschutz 50 T€, Reserve 25 T€. Ohne jeden Umsatz reicht das rund 22 Monate; das konservative Szenario ist über drei Jahre gedeckt (Businessplan 11.6). Ansprechpartnerin für Investoren: Gönül Demet. Das Deck gibt es auch auf Türkisch und Englisch.</a:t>
             </a:r>
             <a:endParaRPr lang="en-US" dirty="0"/>
           </a:p>
@@ -2172,7 +2172,7 @@
           <a:p>
             <a:r>
               <a:rPr lang="en-US" dirty="0"/>
-              <a:t>Ehrlich sagen: TAM ist Sekundärquelle mit großer Spanne; SAM und SOM sind unsere Schätzung, keine Studie. Der Punkt ist nicht die genaue Zahl, sondern: Schon ein kleiner Anteil zahlender Live-Creator trägt ein Team – und der eigentliche Hebel ist die Plattform-Integration, nicht das Abo. Unten neu: Die Vision öffnet angrenzende Märkte – KI-Video 3,67 Mrd. USD [Quelle 23], Sprachlern-Apps 1,54 Mrd. USD [Quelle 33], Videoschnitt 2,68 Mrd. USD [Quelle 51], Hörbuch DE 374 Mio. € [Quelle 19]. Die rechnen wir nicht in den SOM ein.</a:t>
+              <a:t>Ehrlich sagen: TAM ist Sekundärquelle mit großer Spanne; SAM und SOM sind unsere Schätzung, keine Studie. Der Punkt ist nicht die genaue Zahl, sondern: Schon ein kleiner Anteil zahlender Live-Creator trägt ein Team – und der eigentliche Hebel ist die Plattform-Integration, nicht das Abo. Unten neu: Die Vision öffnet angrenzende Märkte – KI-Video 3,67 Mrd. USD [Quelle 23], Sprachlern-Apps 1,54 Mrd. USD [Quelle 33], Videoschnitt 2,68 Mrd. USD [Quelle 51], Hörbuch DE 374 Mio. € [Quelle 19]. Die rechnen wir nicht in den SOM ein. Der SOM entspricht dem Businessplan (Kapitel 6): 5.000–15.000 zahlende Nutzer im Jahr 3; das Basis-Szenario rechnet mit Ø 7.500 Pro-Nutzern.</a:t>
             </a:r>
             <a:endParaRPr lang="en-US" dirty="0"/>
           </a:p>
@@ -3131,7 +3131,7 @@
                 <a:ea typeface="Arial" pitchFamily="34" charset="-122"/>
                 <a:cs typeface="Arial" pitchFamily="34" charset="-120"/>
               </a:rPr>
-              <a:t>[Name]</a:t>
+              <a:t>Tuncay Sancak</a:t>
             </a:r>
             <a:pPr indent="0" marL="0">
               <a:buNone/>
@@ -3145,7 +3145,7 @@
                 <a:ea typeface="Arial" pitchFamily="34" charset="-122"/>
                 <a:cs typeface="Arial" pitchFamily="34" charset="-120"/>
               </a:rPr>
-              <a:t>  ·  Gründerin, Autorin &amp; Live-Streamerin</a:t>
+              <a:t>  ·  Gründer &amp; Erfinder, Geschäftsführer</a:t>
             </a:r>
             <a:endParaRPr lang="en-US" sz="1300" dirty="0"/>
           </a:p>
@@ -3162,7 +3162,7 @@
                 <a:ea typeface="Arial" pitchFamily="34" charset="-122"/>
                 <a:cs typeface="Arial" pitchFamily="34" charset="-120"/>
               </a:rPr>
-              <a:t>[Datum]  ·  [E-Mail]</a:t>
+              <a:t>Investor Relations: Gönül Demet  ·  [E-Mail]  ·  Oktober 2026  ·  Vertraulich</a:t>
             </a:r>
             <a:endParaRPr lang="en-US" sz="1300" dirty="0"/>
           </a:p>
@@ -3288,8 +3288,8 @@
         </p:nvSpPr>
         <p:spPr>
           <a:xfrm>
-            <a:off x="9357055" y="6473952"/>
-            <a:ext cx="2286000" cy="228600"/>
+            <a:off x="7071055" y="6473952"/>
+            <a:ext cx="4572000" cy="228600"/>
           </a:xfrm>
           <a:prstGeom prst="rect">
             <a:avLst/>
@@ -3313,7 +3313,7 @@
                 <a:ea typeface="Arial" pitchFamily="34" charset="-122"/>
                 <a:cs typeface="Arial" pitchFamily="34" charset="-120"/>
               </a:rPr>
-              <a:t>LiveFX  ·  10</a:t>
+              <a:t>Vertraulich · Oktober 2026  ·  LiveFX  ·  10</a:t>
             </a:r>
             <a:endParaRPr lang="en-US" sz="900" dirty="0"/>
           </a:p>
@@ -4472,8 +4472,8 @@
         </p:nvSpPr>
         <p:spPr>
           <a:xfrm>
-            <a:off x="9357055" y="6473952"/>
-            <a:ext cx="2286000" cy="228600"/>
+            <a:off x="7071055" y="6473952"/>
+            <a:ext cx="4572000" cy="228600"/>
           </a:xfrm>
           <a:prstGeom prst="rect">
             <a:avLst/>
@@ -4497,7 +4497,7 @@
                 <a:ea typeface="Arial" pitchFamily="34" charset="-122"/>
                 <a:cs typeface="Arial" pitchFamily="34" charset="-120"/>
               </a:rPr>
-              <a:t>LiveFX  ·  11</a:t>
+              <a:t>Vertraulich · Oktober 2026  ·  LiveFX  ·  11</a:t>
             </a:r>
             <a:endParaRPr lang="en-US" sz="900" dirty="0"/>
           </a:p>
@@ -5453,8 +5453,8 @@
         </p:nvSpPr>
         <p:spPr>
           <a:xfrm>
-            <a:off x="9357055" y="6473952"/>
-            <a:ext cx="2286000" cy="228600"/>
+            <a:off x="7071055" y="6473952"/>
+            <a:ext cx="4572000" cy="228600"/>
           </a:xfrm>
           <a:prstGeom prst="rect">
             <a:avLst/>
@@ -5478,7 +5478,7 @@
                 <a:ea typeface="Arial" pitchFamily="34" charset="-122"/>
                 <a:cs typeface="Arial" pitchFamily="34" charset="-120"/>
               </a:rPr>
-              <a:t>LiveFX  ·  12</a:t>
+              <a:t>Vertraulich · Oktober 2026  ·  LiveFX  ·  12</a:t>
             </a:r>
             <a:endParaRPr lang="en-US" sz="900" dirty="0"/>
           </a:p>
@@ -6846,7 +6846,7 @@
                 <a:ea typeface="Arial" pitchFamily="34" charset="-122"/>
                 <a:cs typeface="Arial" pitchFamily="34" charset="-120"/>
               </a:rPr>
-              <a:t>Aus Stimme wird in unter einer Sekunde Meme, Sound oder Szene – in den eigenen Streams der Gründerin im Einsatz.</a:t>
+              <a:t>Aus Stimme wird in unter einer Sekunde Meme, Sound oder Szene – in den eigenen Streams des Gründers im Einsatz.</a:t>
             </a:r>
             <a:endParaRPr lang="en-US" sz="1200" dirty="0"/>
           </a:p>
@@ -7188,8 +7188,8 @@
         </p:nvSpPr>
         <p:spPr>
           <a:xfrm>
-            <a:off x="9357055" y="6473952"/>
-            <a:ext cx="2286000" cy="228600"/>
+            <a:off x="7071055" y="6473952"/>
+            <a:ext cx="4572000" cy="228600"/>
           </a:xfrm>
           <a:prstGeom prst="rect">
             <a:avLst/>
@@ -7213,7 +7213,7 @@
                 <a:ea typeface="Arial" pitchFamily="34" charset="-122"/>
                 <a:cs typeface="Arial" pitchFamily="34" charset="-120"/>
               </a:rPr>
-              <a:t>LiveFX  ·  13</a:t>
+              <a:t>Vertraulich · Oktober 2026  ·  LiveFX  ·  13</a:t>
             </a:r>
             <a:endParaRPr lang="en-US" sz="900" dirty="0"/>
           </a:p>
@@ -10527,8 +10527,8 @@
         </p:nvSpPr>
         <p:spPr>
           <a:xfrm>
-            <a:off x="9357055" y="6473952"/>
-            <a:ext cx="2286000" cy="228600"/>
+            <a:off x="7071055" y="6473952"/>
+            <a:ext cx="4572000" cy="228600"/>
           </a:xfrm>
           <a:prstGeom prst="rect">
             <a:avLst/>
@@ -10552,7 +10552,7 @@
                 <a:ea typeface="Arial" pitchFamily="34" charset="-122"/>
                 <a:cs typeface="Arial" pitchFamily="34" charset="-120"/>
               </a:rPr>
-              <a:t>LiveFX  ·  14</a:t>
+              <a:t>Vertraulich · Oktober 2026  ·  LiveFX  ·  14</a:t>
             </a:r>
             <a:endParaRPr lang="en-US" sz="900" dirty="0"/>
           </a:p>
@@ -11995,8 +11995,8 @@
         </p:nvSpPr>
         <p:spPr>
           <a:xfrm>
-            <a:off x="9357055" y="6473952"/>
-            <a:ext cx="2286000" cy="228600"/>
+            <a:off x="7071055" y="6473952"/>
+            <a:ext cx="4572000" cy="228600"/>
           </a:xfrm>
           <a:prstGeom prst="rect">
             <a:avLst/>
@@ -12020,7 +12020,7 @@
                 <a:ea typeface="Arial" pitchFamily="34" charset="-122"/>
                 <a:cs typeface="Arial" pitchFamily="34" charset="-120"/>
               </a:rPr>
-              <a:t>LiveFX  ·  15</a:t>
+              <a:t>Vertraulich · Oktober 2026  ·  LiveFX  ·  15</a:t>
             </a:r>
             <a:endParaRPr lang="en-US" sz="900" dirty="0"/>
           </a:p>
@@ -14734,7 +14734,7 @@
                 <a:ea typeface="Arial" pitchFamily="34" charset="-122"/>
                 <a:cs typeface="Arial" pitchFamily="34" charset="-120"/>
               </a:rPr>
-              <a:t>NUTZERIN, AUTORIN, GRÜNDERIN</a:t>
+              <a:t>GRÜNDER, ERFINDER, NUTZER</a:t>
             </a:r>
             <a:endParaRPr lang="en-US" sz="1000" dirty="0"/>
           </a:p>
@@ -14789,8 +14789,8 @@
         </p:nvSpPr>
         <p:spPr>
           <a:xfrm>
-            <a:off x="9357055" y="6473952"/>
-            <a:ext cx="2286000" cy="228600"/>
+            <a:off x="7071055" y="6473952"/>
+            <a:ext cx="4572000" cy="228600"/>
           </a:xfrm>
           <a:prstGeom prst="rect">
             <a:avLst/>
@@ -14814,7 +14814,7 @@
                 <a:ea typeface="Arial" pitchFamily="34" charset="-122"/>
                 <a:cs typeface="Arial" pitchFamily="34" charset="-120"/>
               </a:rPr>
-              <a:t>LiveFX  ·  16</a:t>
+              <a:t>Vertraulich · Oktober 2026  ·  LiveFX  ·  16</a:t>
             </a:r>
             <a:endParaRPr lang="en-US" sz="900" dirty="0"/>
           </a:p>
@@ -14829,11 +14829,11 @@
         <p:spPr>
           <a:xfrm>
             <a:off x="548640" y="1371600"/>
-            <a:ext cx="5120640" cy="4526280"/>
+            <a:ext cx="5120640" cy="3246120"/>
           </a:xfrm>
           <a:prstGeom prst="roundRect">
             <a:avLst>
-              <a:gd name="adj" fmla="val 2424"/>
+              <a:gd name="adj" fmla="val 3380"/>
             </a:avLst>
           </a:prstGeom>
           <a:solidFill>
@@ -14899,7 +14899,7 @@
               <a:buNone/>
             </a:pPr>
             <a:r>
-              <a:rPr lang="en-US" sz="1200" b="1" dirty="0">
+              <a:rPr lang="en-US" sz="2000" b="1" dirty="0">
                 <a:solidFill>
                   <a:srgbClr val="FFFFFF"/>
                 </a:solidFill>
@@ -14907,9 +14907,9 @@
                 <a:ea typeface="Arial" pitchFamily="34" charset="-122"/>
                 <a:cs typeface="Arial" pitchFamily="34" charset="-120"/>
               </a:rPr>
-              <a:t>[Foto]</a:t>
-            </a:r>
-            <a:endParaRPr lang="en-US" sz="1200" dirty="0"/>
+              <a:t>TS</a:t>
+            </a:r>
+            <a:endParaRPr lang="en-US" sz="2000" dirty="0"/>
           </a:p>
         </p:txBody>
       </p:sp>
@@ -14948,7 +14948,7 @@
                 <a:ea typeface="Arial" pitchFamily="34" charset="-122"/>
                 <a:cs typeface="Arial" pitchFamily="34" charset="-120"/>
               </a:rPr>
-              <a:t>[Name]</a:t>
+              <a:t>Tuncay Sancak</a:t>
             </a:r>
             <a:endParaRPr lang="en-US" sz="2200" dirty="0"/>
           </a:p>
@@ -14989,7 +14989,7 @@
                 <a:ea typeface="Arial" pitchFamily="34" charset="-122"/>
                 <a:cs typeface="Arial" pitchFamily="34" charset="-120"/>
               </a:rPr>
-              <a:t>Gründerin · deutsch-türkische Autorin &amp; Live-Streamerin</a:t>
+              <a:t>Gründer &amp; Erfinder · Geschäftsführer · deutsch-türkischer Autor &amp; Live-Streamer</a:t>
             </a:r>
             <a:endParaRPr lang="en-US" sz="1200" dirty="0"/>
           </a:p>
@@ -15003,8 +15003,8 @@
         </p:nvSpPr>
         <p:spPr>
           <a:xfrm>
-            <a:off x="914400" y="3200400"/>
-            <a:ext cx="4480560" cy="2560320"/>
+            <a:off x="914400" y="3108960"/>
+            <a:ext cx="4480560" cy="1417320"/>
           </a:xfrm>
           <a:prstGeom prst="rect">
             <a:avLst/>
@@ -15020,7 +15020,7 @@
           <a:p>
             <a:pPr marL="203200" indent="-203200">
               <a:spcAft>
-                <a:spcPts val="600"/>
+                <a:spcPts val="400"/>
               </a:spcAft>
               <a:buSzPct val="100000"/>
               <a:buChar char="•"/>
@@ -15041,7 +15041,7 @@
           <a:p>
             <a:pPr marL="203200" indent="-203200">
               <a:spcAft>
-                <a:spcPts val="600"/>
+                <a:spcPts val="400"/>
               </a:spcAft>
               <a:buSzPct val="100000"/>
               <a:buChar char="•"/>
@@ -15062,7 +15062,7 @@
           <a:p>
             <a:pPr marL="203200" indent="-203200">
               <a:spcAft>
-                <a:spcPts val="600"/>
+                <a:spcPts val="400"/>
               </a:spcAft>
               <a:buSzPct val="100000"/>
               <a:buChar char="•"/>
@@ -15083,7 +15083,7 @@
           <a:p>
             <a:pPr marL="203200" indent="-203200">
               <a:spcAft>
-                <a:spcPts val="600"/>
+                <a:spcPts val="400"/>
               </a:spcAft>
               <a:buSzPct val="100000"/>
               <a:buChar char="•"/>
@@ -15106,6 +15106,222 @@
       <p:sp>
         <p:nvSpPr>
           <p:cNvPr id="12" name="Shape 9"/>
+          <p:cNvSpPr/>
+          <p:nvPr/>
+        </p:nvSpPr>
+        <p:spPr>
+          <a:xfrm>
+            <a:off x="548640" y="4754880"/>
+            <a:ext cx="5120640" cy="1143000"/>
+          </a:xfrm>
+          <a:prstGeom prst="roundRect">
+            <a:avLst>
+              <a:gd name="adj" fmla="val 9600"/>
+            </a:avLst>
+          </a:prstGeom>
+          <a:solidFill>
+            <a:srgbClr val="1F2330"/>
+          </a:solidFill>
+          <a:ln w="12700">
+            <a:solidFill>
+              <a:srgbClr val="1F2330"/>
+            </a:solidFill>
+            <a:prstDash val="solid"/>
+          </a:ln>
+        </p:spPr>
+      </p:sp>
+      <p:sp>
+        <p:nvSpPr>
+          <p:cNvPr id="13" name="Shape 10"/>
+          <p:cNvSpPr/>
+          <p:nvPr/>
+        </p:nvSpPr>
+        <p:spPr>
+          <a:xfrm>
+            <a:off x="914400" y="4956048"/>
+            <a:ext cx="731520" cy="731520"/>
+          </a:xfrm>
+          <a:prstGeom prst="ellipse">
+            <a:avLst/>
+          </a:prstGeom>
+          <a:solidFill>
+            <a:srgbClr val="181B23"/>
+          </a:solidFill>
+          <a:ln w="19050">
+            <a:solidFill>
+              <a:srgbClr val="FFD166"/>
+            </a:solidFill>
+            <a:prstDash val="solid"/>
+          </a:ln>
+        </p:spPr>
+      </p:sp>
+      <p:sp>
+        <p:nvSpPr>
+          <p:cNvPr id="14" name="Text 11"/>
+          <p:cNvSpPr txBox="1"/>
+          <p:nvPr/>
+        </p:nvSpPr>
+        <p:spPr>
+          <a:xfrm>
+            <a:off x="914400" y="4956048"/>
+            <a:ext cx="731520" cy="731520"/>
+          </a:xfrm>
+          <a:prstGeom prst="rect">
+            <a:avLst/>
+          </a:prstGeom>
+          <a:noFill/>
+          <a:ln/>
+        </p:spPr>
+        <p:txBody>
+          <a:bodyPr wrap="square" lIns="0" tIns="0" rIns="0" bIns="0" rtlCol="0" anchor="ctr">
+            <a:normAutofit/>
+          </a:bodyPr>
+          <a:lstStyle/>
+          <a:p>
+            <a:pPr algn="ctr" indent="0" marL="0">
+              <a:buNone/>
+            </a:pPr>
+            <a:r>
+              <a:rPr lang="en-US" sz="1500" b="1" dirty="0">
+                <a:solidFill>
+                  <a:srgbClr val="FFD166"/>
+                </a:solidFill>
+                <a:latin typeface="Arial" pitchFamily="34" charset="0"/>
+                <a:ea typeface="Arial" pitchFamily="34" charset="-122"/>
+                <a:cs typeface="Arial" pitchFamily="34" charset="-120"/>
+              </a:rPr>
+              <a:t>GD</a:t>
+            </a:r>
+            <a:endParaRPr lang="en-US" sz="1500" dirty="0"/>
+          </a:p>
+        </p:txBody>
+      </p:sp>
+      <p:sp>
+        <p:nvSpPr>
+          <p:cNvPr id="15" name="Text 12"/>
+          <p:cNvSpPr txBox="1"/>
+          <p:nvPr/>
+        </p:nvSpPr>
+        <p:spPr>
+          <a:xfrm>
+            <a:off x="1874520" y="4882896"/>
+            <a:ext cx="3611880" cy="347472"/>
+          </a:xfrm>
+          <a:prstGeom prst="rect">
+            <a:avLst/>
+          </a:prstGeom>
+          <a:noFill/>
+          <a:ln/>
+        </p:spPr>
+        <p:txBody>
+          <a:bodyPr wrap="square" lIns="0" tIns="0" rIns="0" bIns="0" rtlCol="0" anchor="t">
+            <a:normAutofit/>
+          </a:bodyPr>
+          <a:lstStyle/>
+          <a:p>
+            <a:pPr indent="0" marL="0">
+              <a:buNone/>
+            </a:pPr>
+            <a:r>
+              <a:rPr lang="en-US" sz="1700" b="1" dirty="0">
+                <a:solidFill>
+                  <a:srgbClr val="FFFFFF"/>
+                </a:solidFill>
+                <a:latin typeface="Arial" pitchFamily="34" charset="0"/>
+                <a:ea typeface="Arial" pitchFamily="34" charset="-122"/>
+                <a:cs typeface="Arial" pitchFamily="34" charset="-120"/>
+              </a:rPr>
+              <a:t>Gönül Demet</a:t>
+            </a:r>
+            <a:endParaRPr lang="en-US" sz="1700" dirty="0"/>
+          </a:p>
+        </p:txBody>
+      </p:sp>
+      <p:sp>
+        <p:nvSpPr>
+          <p:cNvPr id="16" name="Text 13"/>
+          <p:cNvSpPr txBox="1"/>
+          <p:nvPr/>
+        </p:nvSpPr>
+        <p:spPr>
+          <a:xfrm>
+            <a:off x="1874520" y="5230368"/>
+            <a:ext cx="3611880" cy="256032"/>
+          </a:xfrm>
+          <a:prstGeom prst="rect">
+            <a:avLst/>
+          </a:prstGeom>
+          <a:noFill/>
+          <a:ln/>
+        </p:spPr>
+        <p:txBody>
+          <a:bodyPr wrap="square" lIns="0" tIns="0" rIns="0" bIns="0" rtlCol="0" anchor="t">
+            <a:normAutofit/>
+          </a:bodyPr>
+          <a:lstStyle/>
+          <a:p>
+            <a:pPr indent="0" marL="0">
+              <a:buNone/>
+            </a:pPr>
+            <a:r>
+              <a:rPr lang="en-US" sz="1150" b="1" dirty="0">
+                <a:solidFill>
+                  <a:srgbClr val="FFD166"/>
+                </a:solidFill>
+                <a:latin typeface="Arial" pitchFamily="34" charset="0"/>
+                <a:ea typeface="Arial" pitchFamily="34" charset="-122"/>
+                <a:cs typeface="Arial" pitchFamily="34" charset="-120"/>
+              </a:rPr>
+              <a:t>Investor Relations</a:t>
+            </a:r>
+            <a:endParaRPr lang="en-US" sz="1150" dirty="0"/>
+          </a:p>
+        </p:txBody>
+      </p:sp>
+      <p:sp>
+        <p:nvSpPr>
+          <p:cNvPr id="17" name="Text 14"/>
+          <p:cNvSpPr txBox="1"/>
+          <p:nvPr/>
+        </p:nvSpPr>
+        <p:spPr>
+          <a:xfrm>
+            <a:off x="1874520" y="5504688"/>
+            <a:ext cx="3611880" cy="329184"/>
+          </a:xfrm>
+          <a:prstGeom prst="rect">
+            <a:avLst/>
+          </a:prstGeom>
+          <a:noFill/>
+          <a:ln/>
+        </p:spPr>
+        <p:txBody>
+          <a:bodyPr wrap="square" lIns="0" tIns="0" rIns="0" bIns="0" rtlCol="0" anchor="t">
+            <a:normAutofit/>
+          </a:bodyPr>
+          <a:lstStyle/>
+          <a:p>
+            <a:pPr indent="0" marL="0">
+              <a:buNone/>
+            </a:pPr>
+            <a:r>
+              <a:rPr lang="en-US" sz="1100" dirty="0">
+                <a:solidFill>
+                  <a:srgbClr val="9AA3B5"/>
+                </a:solidFill>
+                <a:latin typeface="Arial" pitchFamily="34" charset="0"/>
+                <a:ea typeface="Arial" pitchFamily="34" charset="-122"/>
+                <a:cs typeface="Arial" pitchFamily="34" charset="-120"/>
+              </a:rPr>
+              <a:t>Ansprechpartnerin für Investoren und die Pre-Seed-Runde</a:t>
+            </a:r>
+            <a:endParaRPr lang="en-US" sz="1100" dirty="0"/>
+          </a:p>
+        </p:txBody>
+      </p:sp>
+      <p:sp>
+        <p:nvSpPr>
+          <p:cNvPr id="18" name="Shape 15"/>
           <p:cNvSpPr/>
           <p:nvPr/>
         </p:nvSpPr>
@@ -15132,7 +15348,7 @@
       </p:sp>
       <p:sp>
         <p:nvSpPr>
-          <p:cNvPr id="13" name="Shape 10"/>
+          <p:cNvPr id="19" name="Shape 16"/>
           <p:cNvSpPr/>
           <p:nvPr/>
         </p:nvSpPr>
@@ -15157,7 +15373,7 @@
       </p:sp>
       <p:sp>
         <p:nvSpPr>
-          <p:cNvPr id="14" name="Text 11"/>
+          <p:cNvPr id="20" name="Text 17"/>
           <p:cNvSpPr txBox="1"/>
           <p:nvPr/>
         </p:nvSpPr>
@@ -15196,7 +15412,7 @@
       </p:sp>
       <p:sp>
         <p:nvSpPr>
-          <p:cNvPr id="15" name="Text 12"/>
+          <p:cNvPr id="21" name="Text 18"/>
           <p:cNvSpPr txBox="1"/>
           <p:nvPr/>
         </p:nvSpPr>
@@ -15237,7 +15453,7 @@
       </p:sp>
       <p:sp>
         <p:nvSpPr>
-          <p:cNvPr id="16" name="Text 13"/>
+          <p:cNvPr id="22" name="Text 19"/>
           <p:cNvSpPr txBox="1"/>
           <p:nvPr/>
         </p:nvSpPr>
@@ -15278,7 +15494,7 @@
       </p:sp>
       <p:sp>
         <p:nvSpPr>
-          <p:cNvPr id="17" name="Shape 14"/>
+          <p:cNvPr id="23" name="Shape 20"/>
           <p:cNvSpPr/>
           <p:nvPr/>
         </p:nvSpPr>
@@ -15305,7 +15521,7 @@
       </p:sp>
       <p:sp>
         <p:nvSpPr>
-          <p:cNvPr id="18" name="Shape 15"/>
+          <p:cNvPr id="24" name="Shape 21"/>
           <p:cNvSpPr/>
           <p:nvPr/>
         </p:nvSpPr>
@@ -15330,7 +15546,7 @@
       </p:sp>
       <p:sp>
         <p:nvSpPr>
-          <p:cNvPr id="19" name="Text 16"/>
+          <p:cNvPr id="25" name="Text 22"/>
           <p:cNvSpPr txBox="1"/>
           <p:nvPr/>
         </p:nvSpPr>
@@ -15369,7 +15585,7 @@
       </p:sp>
       <p:sp>
         <p:nvSpPr>
-          <p:cNvPr id="20" name="Text 17"/>
+          <p:cNvPr id="26" name="Text 23"/>
           <p:cNvSpPr txBox="1"/>
           <p:nvPr/>
         </p:nvSpPr>
@@ -15410,7 +15626,7 @@
       </p:sp>
       <p:sp>
         <p:nvSpPr>
-          <p:cNvPr id="21" name="Text 18"/>
+          <p:cNvPr id="27" name="Text 24"/>
           <p:cNvSpPr txBox="1"/>
           <p:nvPr/>
         </p:nvSpPr>
@@ -15451,7 +15667,7 @@
       </p:sp>
       <p:sp>
         <p:nvSpPr>
-          <p:cNvPr id="22" name="Shape 19"/>
+          <p:cNvPr id="28" name="Shape 25"/>
           <p:cNvSpPr/>
           <p:nvPr/>
         </p:nvSpPr>
@@ -15478,7 +15694,7 @@
       </p:sp>
       <p:sp>
         <p:nvSpPr>
-          <p:cNvPr id="23" name="Shape 20"/>
+          <p:cNvPr id="29" name="Shape 26"/>
           <p:cNvSpPr/>
           <p:nvPr/>
         </p:nvSpPr>
@@ -15503,7 +15719,7 @@
       </p:sp>
       <p:sp>
         <p:nvSpPr>
-          <p:cNvPr id="24" name="Text 21"/>
+          <p:cNvPr id="30" name="Text 27"/>
           <p:cNvSpPr txBox="1"/>
           <p:nvPr/>
         </p:nvSpPr>
@@ -15542,7 +15758,7 @@
       </p:sp>
       <p:sp>
         <p:nvSpPr>
-          <p:cNvPr id="25" name="Text 22"/>
+          <p:cNvPr id="31" name="Text 28"/>
           <p:cNvSpPr txBox="1"/>
           <p:nvPr/>
         </p:nvSpPr>
@@ -15583,7 +15799,7 @@
       </p:sp>
       <p:sp>
         <p:nvSpPr>
-          <p:cNvPr id="26" name="Text 23"/>
+          <p:cNvPr id="32" name="Text 29"/>
           <p:cNvSpPr txBox="1"/>
           <p:nvPr/>
         </p:nvSpPr>
@@ -15616,7 +15832,7 @@
                 <a:ea typeface="Arial" pitchFamily="34" charset="-122"/>
                 <a:cs typeface="Arial" pitchFamily="34" charset="-120"/>
               </a:rPr>
-              <a:t>[Name] · [Name] · Edtech/Didaktik: [Name]</a:t>
+              <a:t>Gesucht: Creator-Management TR · Ex-Produktverantwortung „Live“ einer Plattform · Edtech/Didaktik</a:t>
             </a:r>
             <a:endParaRPr lang="en-US" sz="1200" dirty="0"/>
           </a:p>
@@ -15770,12 +15986,12 @@
         </p:nvSpPr>
         <p:spPr>
           <a:xfrm>
-            <a:off x="548640" y="1828800"/>
-            <a:ext cx="2670734" cy="3246120"/>
+            <a:off x="548640" y="1783080"/>
+            <a:ext cx="2670734" cy="2103120"/>
           </a:xfrm>
           <a:prstGeom prst="roundRect">
             <a:avLst>
-              <a:gd name="adj" fmla="val 4109"/>
+              <a:gd name="adj" fmla="val 5217"/>
             </a:avLst>
           </a:prstGeom>
           <a:solidFill>
@@ -15797,8 +16013,8 @@
         </p:nvSpPr>
         <p:spPr>
           <a:xfrm>
-            <a:off x="777240" y="1993392"/>
-            <a:ext cx="2213534" cy="685800"/>
+            <a:off x="777240" y="1929384"/>
+            <a:ext cx="2213534" cy="457200"/>
           </a:xfrm>
           <a:prstGeom prst="rect">
             <a:avLst/>
@@ -15816,7 +16032,7 @@
               <a:buNone/>
             </a:pPr>
             <a:r>
-              <a:rPr lang="en-US" sz="1800" b="1" dirty="0">
+              <a:rPr lang="en-US" sz="1600" b="1" dirty="0">
                 <a:solidFill>
                   <a:srgbClr val="FF2D75"/>
                 </a:solidFill>
@@ -15826,7 +16042,7 @@
               </a:rPr>
               <a:t>Pilot Plattform</a:t>
             </a:r>
-            <a:endParaRPr lang="en-US" sz="1800" dirty="0"/>
+            <a:endParaRPr lang="en-US" sz="1600" dirty="0"/>
           </a:p>
         </p:txBody>
       </p:sp>
@@ -15838,8 +16054,8 @@
         </p:nvSpPr>
         <p:spPr>
           <a:xfrm>
-            <a:off x="777240" y="2724912"/>
-            <a:ext cx="2213534" cy="2286000"/>
+            <a:off x="777240" y="2423160"/>
+            <a:ext cx="2213534" cy="1371600"/>
           </a:xfrm>
           <a:prstGeom prst="rect">
             <a:avLst/>
@@ -15857,7 +16073,7 @@
               <a:buNone/>
             </a:pPr>
             <a:r>
-              <a:rPr lang="en-US" sz="1300" dirty="0">
+              <a:rPr lang="en-US" sz="1250" dirty="0">
                 <a:solidFill>
                   <a:srgbClr val="FFFFFF"/>
                 </a:solidFill>
@@ -15867,7 +16083,7 @@
               </a:rPr>
               <a:t>LiveFX als Feature in TikTok LIVE Studio, Instagram Live Producer oder YouTube Live. Browser-Quelle läuft heute. 8 Wochen, 20 Creator, gemessene Watchtime, Gifts und Clips.</a:t>
             </a:r>
-            <a:endParaRPr lang="en-US" sz="1300" dirty="0"/>
+            <a:endParaRPr lang="en-US" sz="1250" dirty="0"/>
           </a:p>
         </p:txBody>
       </p:sp>
@@ -15879,121 +16095,12 @@
         </p:nvSpPr>
         <p:spPr>
           <a:xfrm>
-            <a:off x="3356534" y="1828800"/>
-            <a:ext cx="2670734" cy="3246120"/>
+            <a:off x="3356534" y="1783080"/>
+            <a:ext cx="2670734" cy="2103120"/>
           </a:xfrm>
           <a:prstGeom prst="roundRect">
             <a:avLst>
-              <a:gd name="adj" fmla="val 4109"/>
-            </a:avLst>
-          </a:prstGeom>
-          <a:solidFill>
-            <a:srgbClr val="181B23"/>
-          </a:solidFill>
-          <a:ln w="15875">
-            <a:solidFill>
-              <a:srgbClr val="FFD166"/>
-            </a:solidFill>
-            <a:prstDash val="solid"/>
-          </a:ln>
-        </p:spPr>
-      </p:sp>
-      <p:sp>
-        <p:nvSpPr>
-          <p:cNvPr id="9" name="Text 6"/>
-          <p:cNvSpPr txBox="1"/>
-          <p:nvPr/>
-        </p:nvSpPr>
-        <p:spPr>
-          <a:xfrm>
-            <a:off x="3585134" y="1993392"/>
-            <a:ext cx="2213534" cy="685800"/>
-          </a:xfrm>
-          <a:prstGeom prst="rect">
-            <a:avLst/>
-          </a:prstGeom>
-          <a:noFill/>
-          <a:ln/>
-        </p:spPr>
-        <p:txBody>
-          <a:bodyPr wrap="square" lIns="0" tIns="0" rIns="0" bIns="0" rtlCol="0" anchor="t">
-            <a:normAutofit/>
-          </a:bodyPr>
-          <a:lstStyle/>
-          <a:p>
-            <a:pPr indent="0" marL="0">
-              <a:buNone/>
-            </a:pPr>
-            <a:r>
-              <a:rPr lang="en-US" sz="1800" b="1" dirty="0">
-                <a:solidFill>
-                  <a:srgbClr val="FFD166"/>
-                </a:solidFill>
-                <a:latin typeface="Arial" pitchFamily="34" charset="0"/>
-                <a:ea typeface="Arial" pitchFamily="34" charset="-122"/>
-                <a:cs typeface="Arial" pitchFamily="34" charset="-120"/>
-              </a:rPr>
-              <a:t>Pilot Bildung &amp; Sprachen</a:t>
-            </a:r>
-            <a:endParaRPr lang="en-US" sz="1800" dirty="0"/>
-          </a:p>
-        </p:txBody>
-      </p:sp>
-      <p:sp>
-        <p:nvSpPr>
-          <p:cNvPr id="10" name="Text 7"/>
-          <p:cNvSpPr txBox="1"/>
-          <p:nvPr/>
-        </p:nvSpPr>
-        <p:spPr>
-          <a:xfrm>
-            <a:off x="3585134" y="2724912"/>
-            <a:ext cx="2213534" cy="2286000"/>
-          </a:xfrm>
-          <a:prstGeom prst="rect">
-            <a:avLst/>
-          </a:prstGeom>
-          <a:noFill/>
-          <a:ln/>
-        </p:spPr>
-        <p:txBody>
-          <a:bodyPr wrap="square" lIns="0" tIns="0" rIns="0" bIns="0" rtlCol="0" anchor="t">
-            <a:normAutofit/>
-          </a:bodyPr>
-          <a:lstStyle/>
-          <a:p>
-            <a:pPr indent="0" marL="0">
-              <a:buNone/>
-            </a:pPr>
-            <a:r>
-              <a:rPr lang="en-US" sz="1300" dirty="0">
-                <a:solidFill>
-                  <a:srgbClr val="FFFFFF"/>
-                </a:solidFill>
-                <a:latin typeface="Arial" pitchFamily="34" charset="0"/>
-                <a:ea typeface="Arial" pitchFamily="34" charset="-122"/>
-                <a:cs typeface="Arial" pitchFamily="34" charset="-120"/>
-              </a:rPr>
-              <a:t>Bildungsträger, Integrationskurse, Schulen, Sprachlern-Plattformen und Verlage: WortBild und Erzählfilm in [Zahl] Kursen/Klassen bzw. mit [Zahl] Titeln testen.</a:t>
-            </a:r>
-            <a:endParaRPr lang="en-US" sz="1300" dirty="0"/>
-          </a:p>
-        </p:txBody>
-      </p:sp>
-      <p:sp>
-        <p:nvSpPr>
-          <p:cNvPr id="11" name="Shape 8"/>
-          <p:cNvSpPr/>
-          <p:nvPr/>
-        </p:nvSpPr>
-        <p:spPr>
-          <a:xfrm>
-            <a:off x="6164428" y="1828800"/>
-            <a:ext cx="2670734" cy="3246120"/>
-          </a:xfrm>
-          <a:prstGeom prst="roundRect">
-            <a:avLst>
-              <a:gd name="adj" fmla="val 4109"/>
+              <a:gd name="adj" fmla="val 5217"/>
             </a:avLst>
           </a:prstGeom>
           <a:solidFill>
@@ -16009,14 +16116,14 @@
       </p:sp>
       <p:sp>
         <p:nvSpPr>
-          <p:cNvPr id="12" name="Text 9"/>
-          <p:cNvSpPr txBox="1"/>
-          <p:nvPr/>
-        </p:nvSpPr>
-        <p:spPr>
-          <a:xfrm>
-            <a:off x="6393028" y="1993392"/>
-            <a:ext cx="2213534" cy="685800"/>
+          <p:cNvPr id="9" name="Text 6"/>
+          <p:cNvSpPr txBox="1"/>
+          <p:nvPr/>
+        </p:nvSpPr>
+        <p:spPr>
+          <a:xfrm>
+            <a:off x="3585134" y="1929384"/>
+            <a:ext cx="2213534" cy="457200"/>
           </a:xfrm>
           <a:prstGeom prst="rect">
             <a:avLst/>
@@ -16034,30 +16141,30 @@
               <a:buNone/>
             </a:pPr>
             <a:r>
-              <a:rPr lang="en-US" sz="1800" b="1" dirty="0">
-                <a:solidFill>
-                  <a:srgbClr val="2DFFB5"/>
-                </a:solidFill>
-                <a:latin typeface="Arial" pitchFamily="34" charset="0"/>
-                <a:ea typeface="Arial" pitchFamily="34" charset="-122"/>
-                <a:cs typeface="Arial" pitchFamily="34" charset="-120"/>
-              </a:rPr>
-              <a:t>Partner</a:t>
-            </a:r>
-            <a:endParaRPr lang="en-US" sz="1800" dirty="0"/>
-          </a:p>
-        </p:txBody>
-      </p:sp>
-      <p:sp>
-        <p:nvSpPr>
-          <p:cNvPr id="13" name="Text 10"/>
-          <p:cNvSpPr txBox="1"/>
-          <p:nvPr/>
-        </p:nvSpPr>
-        <p:spPr>
-          <a:xfrm>
-            <a:off x="6393028" y="2724912"/>
-            <a:ext cx="2213534" cy="2286000"/>
+              <a:rPr lang="en-US" sz="1550" b="1" dirty="0">
+                <a:solidFill>
+                  <a:srgbClr val="FFD166"/>
+                </a:solidFill>
+                <a:latin typeface="Arial" pitchFamily="34" charset="0"/>
+                <a:ea typeface="Arial" pitchFamily="34" charset="-122"/>
+                <a:cs typeface="Arial" pitchFamily="34" charset="-120"/>
+              </a:rPr>
+              <a:t>Pilot Bildung &amp; Sprachen</a:t>
+            </a:r>
+            <a:endParaRPr lang="en-US" sz="1550" dirty="0"/>
+          </a:p>
+        </p:txBody>
+      </p:sp>
+      <p:sp>
+        <p:nvSpPr>
+          <p:cNvPr id="10" name="Text 7"/>
+          <p:cNvSpPr txBox="1"/>
+          <p:nvPr/>
+        </p:nvSpPr>
+        <p:spPr>
+          <a:xfrm>
+            <a:off x="3585134" y="2423160"/>
+            <a:ext cx="2213534" cy="1371600"/>
           </a:xfrm>
           <a:prstGeom prst="rect">
             <a:avLst/>
@@ -16075,7 +16182,7 @@
               <a:buNone/>
             </a:pPr>
             <a:r>
-              <a:rPr lang="en-US" sz="1300" dirty="0">
+              <a:rPr lang="en-US" sz="1250" dirty="0">
                 <a:solidFill>
                   <a:srgbClr val="FFFFFF"/>
                 </a:solidFill>
@@ -16083,26 +16190,26 @@
                 <a:ea typeface="Arial" pitchFamily="34" charset="-122"/>
                 <a:cs typeface="Arial" pitchFamily="34" charset="-120"/>
               </a:rPr>
-              <a:t>Streaming-Software (OBS-Plug-in, Streamlabs), Creator-Agenturen TR / DACH, Audio- und ASR-Anbieter, Editor-Anbieter (Studio-SDK).</a:t>
-            </a:r>
-            <a:endParaRPr lang="en-US" sz="1300" dirty="0"/>
-          </a:p>
-        </p:txBody>
-      </p:sp>
-      <p:sp>
-        <p:nvSpPr>
-          <p:cNvPr id="14" name="Shape 11"/>
+              <a:t>Bildungsträger, Integrationskurse, Schulen, Sprachlern-Plattformen und Verlage: WortBild und Erzählfilm in [Zahl] Kursen/Klassen bzw. mit [Zahl] Titeln testen.</a:t>
+            </a:r>
+            <a:endParaRPr lang="en-US" sz="1250" dirty="0"/>
+          </a:p>
+        </p:txBody>
+      </p:sp>
+      <p:sp>
+        <p:nvSpPr>
+          <p:cNvPr id="11" name="Shape 8"/>
           <p:cNvSpPr/>
           <p:nvPr/>
         </p:nvSpPr>
         <p:spPr>
           <a:xfrm>
-            <a:off x="8972321" y="1828800"/>
-            <a:ext cx="2670734" cy="3246120"/>
+            <a:off x="6164428" y="1783080"/>
+            <a:ext cx="2670734" cy="2103120"/>
           </a:xfrm>
           <a:prstGeom prst="roundRect">
             <a:avLst>
-              <a:gd name="adj" fmla="val 4109"/>
+              <a:gd name="adj" fmla="val 5217"/>
             </a:avLst>
           </a:prstGeom>
           <a:solidFill>
@@ -16118,14 +16225,123 @@
       </p:sp>
       <p:sp>
         <p:nvSpPr>
+          <p:cNvPr id="12" name="Text 9"/>
+          <p:cNvSpPr txBox="1"/>
+          <p:nvPr/>
+        </p:nvSpPr>
+        <p:spPr>
+          <a:xfrm>
+            <a:off x="6393028" y="1929384"/>
+            <a:ext cx="2213534" cy="457200"/>
+          </a:xfrm>
+          <a:prstGeom prst="rect">
+            <a:avLst/>
+          </a:prstGeom>
+          <a:noFill/>
+          <a:ln/>
+        </p:spPr>
+        <p:txBody>
+          <a:bodyPr wrap="square" lIns="0" tIns="0" rIns="0" bIns="0" rtlCol="0" anchor="t">
+            <a:normAutofit/>
+          </a:bodyPr>
+          <a:lstStyle/>
+          <a:p>
+            <a:pPr indent="0" marL="0">
+              <a:buNone/>
+            </a:pPr>
+            <a:r>
+              <a:rPr lang="en-US" sz="1600" b="1" dirty="0">
+                <a:solidFill>
+                  <a:srgbClr val="2DFFB5"/>
+                </a:solidFill>
+                <a:latin typeface="Arial" pitchFamily="34" charset="0"/>
+                <a:ea typeface="Arial" pitchFamily="34" charset="-122"/>
+                <a:cs typeface="Arial" pitchFamily="34" charset="-120"/>
+              </a:rPr>
+              <a:t>Partner</a:t>
+            </a:r>
+            <a:endParaRPr lang="en-US" sz="1600" dirty="0"/>
+          </a:p>
+        </p:txBody>
+      </p:sp>
+      <p:sp>
+        <p:nvSpPr>
+          <p:cNvPr id="13" name="Text 10"/>
+          <p:cNvSpPr txBox="1"/>
+          <p:nvPr/>
+        </p:nvSpPr>
+        <p:spPr>
+          <a:xfrm>
+            <a:off x="6393028" y="2423160"/>
+            <a:ext cx="2213534" cy="1371600"/>
+          </a:xfrm>
+          <a:prstGeom prst="rect">
+            <a:avLst/>
+          </a:prstGeom>
+          <a:noFill/>
+          <a:ln/>
+        </p:spPr>
+        <p:txBody>
+          <a:bodyPr wrap="square" lIns="0" tIns="0" rIns="0" bIns="0" rtlCol="0" anchor="t">
+            <a:normAutofit/>
+          </a:bodyPr>
+          <a:lstStyle/>
+          <a:p>
+            <a:pPr indent="0" marL="0">
+              <a:buNone/>
+            </a:pPr>
+            <a:r>
+              <a:rPr lang="en-US" sz="1250" dirty="0">
+                <a:solidFill>
+                  <a:srgbClr val="FFFFFF"/>
+                </a:solidFill>
+                <a:latin typeface="Arial" pitchFamily="34" charset="0"/>
+                <a:ea typeface="Arial" pitchFamily="34" charset="-122"/>
+                <a:cs typeface="Arial" pitchFamily="34" charset="-120"/>
+              </a:rPr>
+              <a:t>Streaming-Software (OBS-Plug-in, Streamlabs), Creator-Agenturen TR / DACH, Audio- und ASR-Anbieter, Editor-Anbieter (Studio-SDK).</a:t>
+            </a:r>
+            <a:endParaRPr lang="en-US" sz="1250" dirty="0"/>
+          </a:p>
+        </p:txBody>
+      </p:sp>
+      <p:sp>
+        <p:nvSpPr>
+          <p:cNvPr id="14" name="Shape 11"/>
+          <p:cNvSpPr/>
+          <p:nvPr/>
+        </p:nvSpPr>
+        <p:spPr>
+          <a:xfrm>
+            <a:off x="8972321" y="1783080"/>
+            <a:ext cx="2670734" cy="2103120"/>
+          </a:xfrm>
+          <a:prstGeom prst="roundRect">
+            <a:avLst>
+              <a:gd name="adj" fmla="val 5217"/>
+            </a:avLst>
+          </a:prstGeom>
+          <a:solidFill>
+            <a:srgbClr val="181B23"/>
+          </a:solidFill>
+          <a:ln w="15875">
+            <a:solidFill>
+              <a:srgbClr val="5AD1FF"/>
+            </a:solidFill>
+            <a:prstDash val="solid"/>
+          </a:ln>
+        </p:spPr>
+      </p:sp>
+      <p:sp>
+        <p:nvSpPr>
           <p:cNvPr id="15" name="Text 12"/>
           <p:cNvSpPr txBox="1"/>
           <p:nvPr/>
         </p:nvSpPr>
         <p:spPr>
           <a:xfrm>
-            <a:off x="9200921" y="1993392"/>
-            <a:ext cx="2213534" cy="685800"/>
+            <a:off x="9200921" y="1929384"/>
+            <a:ext cx="2213534" cy="457200"/>
           </a:xfrm>
           <a:prstGeom prst="rect">
             <a:avLst/>
@@ -16143,7 +16359,7 @@
               <a:buNone/>
             </a:pPr>
             <a:r>
-              <a:rPr lang="en-US" sz="1800" b="1" dirty="0">
+              <a:rPr lang="en-US" sz="1600" b="1" dirty="0">
                 <a:solidFill>
                   <a:srgbClr val="5AD1FF"/>
                 </a:solidFill>
@@ -16151,9 +16367,9 @@
                 <a:ea typeface="Arial" pitchFamily="34" charset="-122"/>
                 <a:cs typeface="Arial" pitchFamily="34" charset="-120"/>
               </a:rPr>
-              <a:t>Gespräch &amp; Seed</a:t>
-            </a:r>
-            <a:endParaRPr lang="en-US" sz="1800" dirty="0"/>
+              <a:t>Pre-Seed: 500.000 €</a:t>
+            </a:r>
+            <a:endParaRPr lang="en-US" sz="1600" dirty="0"/>
           </a:p>
         </p:txBody>
       </p:sp>
@@ -16165,8 +16381,8 @@
         </p:nvSpPr>
         <p:spPr>
           <a:xfrm>
-            <a:off x="9200921" y="2724912"/>
-            <a:ext cx="2213534" cy="2286000"/>
+            <a:off x="9200921" y="2423160"/>
+            <a:ext cx="2213534" cy="1371600"/>
           </a:xfrm>
           <a:prstGeom prst="rect">
             <a:avLst/>
@@ -16184,7 +16400,7 @@
               <a:buNone/>
             </a:pPr>
             <a:r>
-              <a:rPr lang="en-US" sz="1300" dirty="0">
+              <a:rPr lang="en-US" sz="1250" dirty="0">
                 <a:solidFill>
                   <a:srgbClr val="FFFFFF"/>
                 </a:solidFill>
@@ -16192,9 +16408,9 @@
                 <a:ea typeface="Arial" pitchFamily="34" charset="-122"/>
                 <a:cs typeface="Arial" pitchFamily="34" charset="-120"/>
               </a:rPr>
-              <a:t>Übernahme-Gespräch: Technologie + Team. Parallel: Seed [Zahl] € für 18 Monate – 2 Hires, Creator-Programm, Piloten.</a:t>
-            </a:r>
-            <a:endParaRPr lang="en-US" sz="1300" dirty="0"/>
+              <a:t>Für LiveFX 2.0 und die Vision-Linien A–D (zuerst WortBild und Story-Engine), 24 Monate. Parallel offen für Übernahme-Gespräche (Technologie + Team).</a:t>
+            </a:r>
+            <a:endParaRPr lang="en-US" sz="1250" dirty="0"/>
           </a:p>
         </p:txBody>
       </p:sp>
@@ -16206,12 +16422,12 @@
         </p:nvSpPr>
         <p:spPr>
           <a:xfrm>
-            <a:off x="548640" y="5303520"/>
-            <a:ext cx="11094415" cy="713232"/>
+            <a:off x="548640" y="4005072"/>
+            <a:ext cx="11094415" cy="1207008"/>
           </a:xfrm>
           <a:prstGeom prst="roundRect">
             <a:avLst>
-              <a:gd name="adj" fmla="val 15385"/>
+              <a:gd name="adj" fmla="val 9091"/>
             </a:avLst>
           </a:prstGeom>
           <a:solidFill>
@@ -16233,6 +16449,734 @@
         </p:nvSpPr>
         <p:spPr>
           <a:xfrm>
+            <a:off x="822960" y="4087368"/>
+            <a:ext cx="10545775" cy="256032"/>
+          </a:xfrm>
+          <a:prstGeom prst="rect">
+            <a:avLst/>
+          </a:prstGeom>
+          <a:noFill/>
+          <a:ln/>
+        </p:spPr>
+        <p:txBody>
+          <a:bodyPr wrap="square" lIns="0" tIns="0" rIns="0" bIns="0" rtlCol="0" anchor="t">
+            <a:normAutofit/>
+          </a:bodyPr>
+          <a:lstStyle/>
+          <a:p>
+            <a:pPr indent="0" marL="0">
+              <a:buNone/>
+            </a:pPr>
+            <a:r>
+              <a:rPr lang="en-US" sz="1200" b="1" dirty="0">
+                <a:solidFill>
+                  <a:srgbClr val="FFD166"/>
+                </a:solidFill>
+                <a:latin typeface="Arial" pitchFamily="34" charset="0"/>
+                <a:ea typeface="Arial" pitchFamily="34" charset="-122"/>
+                <a:cs typeface="Arial" pitchFamily="34" charset="-120"/>
+              </a:rPr>
+              <a:t>500.000 € Pre-Seed · 24 Monate · Mittelverwendung – Vorschlag – bitte bestätigen</a:t>
+            </a:r>
+            <a:endParaRPr lang="en-US" sz="1200" dirty="0"/>
+          </a:p>
+        </p:txBody>
+      </p:sp>
+      <p:sp>
+        <p:nvSpPr>
+          <p:cNvPr id="19" name="Shape 16"/>
+          <p:cNvSpPr/>
+          <p:nvPr/>
+        </p:nvSpPr>
+        <p:spPr>
+          <a:xfrm>
+            <a:off x="822960" y="4407408"/>
+            <a:ext cx="5245456" cy="219456"/>
+          </a:xfrm>
+          <a:prstGeom prst="rect">
+            <a:avLst/>
+          </a:prstGeom>
+          <a:solidFill>
+            <a:srgbClr val="FF2D75"/>
+          </a:solidFill>
+          <a:ln w="12700">
+            <a:solidFill>
+              <a:srgbClr val="FF2D75"/>
+            </a:solidFill>
+            <a:prstDash val="solid"/>
+          </a:ln>
+        </p:spPr>
+      </p:sp>
+      <p:sp>
+        <p:nvSpPr>
+          <p:cNvPr id="20" name="Shape 17"/>
+          <p:cNvSpPr/>
+          <p:nvPr/>
+        </p:nvSpPr>
+        <p:spPr>
+          <a:xfrm>
+            <a:off x="6095848" y="4407408"/>
+            <a:ext cx="2081723" cy="219456"/>
+          </a:xfrm>
+          <a:prstGeom prst="rect">
+            <a:avLst/>
+          </a:prstGeom>
+          <a:solidFill>
+            <a:srgbClr val="2DFFB5"/>
+          </a:solidFill>
+          <a:ln w="12700">
+            <a:solidFill>
+              <a:srgbClr val="2DFFB5"/>
+            </a:solidFill>
+            <a:prstDash val="solid"/>
+          </a:ln>
+        </p:spPr>
+      </p:sp>
+      <p:sp>
+        <p:nvSpPr>
+          <p:cNvPr id="21" name="Shape 18"/>
+          <p:cNvSpPr/>
+          <p:nvPr/>
+        </p:nvSpPr>
+        <p:spPr>
+          <a:xfrm>
+            <a:off x="8205003" y="4407408"/>
+            <a:ext cx="1554434" cy="219456"/>
+          </a:xfrm>
+          <a:prstGeom prst="rect">
+            <a:avLst/>
+          </a:prstGeom>
+          <a:solidFill>
+            <a:srgbClr val="FFD166"/>
+          </a:solidFill>
+          <a:ln w="12700">
+            <a:solidFill>
+              <a:srgbClr val="FFD166"/>
+            </a:solidFill>
+            <a:prstDash val="solid"/>
+          </a:ln>
+        </p:spPr>
+      </p:sp>
+      <p:sp>
+        <p:nvSpPr>
+          <p:cNvPr id="22" name="Shape 19"/>
+          <p:cNvSpPr/>
+          <p:nvPr/>
+        </p:nvSpPr>
+        <p:spPr>
+          <a:xfrm>
+            <a:off x="9786869" y="4407408"/>
+            <a:ext cx="1027146" cy="219456"/>
+          </a:xfrm>
+          <a:prstGeom prst="rect">
+            <a:avLst/>
+          </a:prstGeom>
+          <a:solidFill>
+            <a:srgbClr val="5AD1FF"/>
+          </a:solidFill>
+          <a:ln w="12700">
+            <a:solidFill>
+              <a:srgbClr val="5AD1FF"/>
+            </a:solidFill>
+            <a:prstDash val="solid"/>
+          </a:ln>
+        </p:spPr>
+      </p:sp>
+      <p:sp>
+        <p:nvSpPr>
+          <p:cNvPr id="23" name="Shape 20"/>
+          <p:cNvSpPr/>
+          <p:nvPr/>
+        </p:nvSpPr>
+        <p:spPr>
+          <a:xfrm>
+            <a:off x="10841446" y="4407408"/>
+            <a:ext cx="499857" cy="219456"/>
+          </a:xfrm>
+          <a:prstGeom prst="rect">
+            <a:avLst/>
+          </a:prstGeom>
+          <a:solidFill>
+            <a:srgbClr val="9AA3B5"/>
+          </a:solidFill>
+          <a:ln w="12700">
+            <a:solidFill>
+              <a:srgbClr val="9AA3B5"/>
+            </a:solidFill>
+            <a:prstDash val="solid"/>
+          </a:ln>
+        </p:spPr>
+      </p:sp>
+      <p:sp>
+        <p:nvSpPr>
+          <p:cNvPr id="24" name="Shape 21"/>
+          <p:cNvSpPr/>
+          <p:nvPr/>
+        </p:nvSpPr>
+        <p:spPr>
+          <a:xfrm>
+            <a:off x="822960" y="4773168"/>
+            <a:ext cx="109728" cy="109728"/>
+          </a:xfrm>
+          <a:prstGeom prst="ellipse">
+            <a:avLst/>
+          </a:prstGeom>
+          <a:solidFill>
+            <a:srgbClr val="FF2D75"/>
+          </a:solidFill>
+          <a:ln w="12700">
+            <a:solidFill>
+              <a:srgbClr val="FF2D75"/>
+            </a:solidFill>
+            <a:prstDash val="solid"/>
+          </a:ln>
+        </p:spPr>
+      </p:sp>
+      <p:sp>
+        <p:nvSpPr>
+          <p:cNvPr id="25" name="Text 22"/>
+          <p:cNvSpPr txBox="1"/>
+          <p:nvPr/>
+        </p:nvSpPr>
+        <p:spPr>
+          <a:xfrm>
+            <a:off x="1005840" y="4709160"/>
+            <a:ext cx="1834835" cy="237744"/>
+          </a:xfrm>
+          <a:prstGeom prst="rect">
+            <a:avLst/>
+          </a:prstGeom>
+          <a:noFill/>
+          <a:ln/>
+        </p:spPr>
+        <p:txBody>
+          <a:bodyPr wrap="square" lIns="0" tIns="0" rIns="0" bIns="0" rtlCol="0" anchor="t">
+            <a:normAutofit/>
+          </a:bodyPr>
+          <a:lstStyle/>
+          <a:p>
+            <a:pPr indent="0" marL="0">
+              <a:buNone/>
+            </a:pPr>
+            <a:r>
+              <a:rPr lang="en-US" sz="1000" b="1" dirty="0">
+                <a:solidFill>
+                  <a:srgbClr val="FFFFFF"/>
+                </a:solidFill>
+                <a:latin typeface="Arial" pitchFamily="34" charset="0"/>
+                <a:ea typeface="Arial" pitchFamily="34" charset="-122"/>
+                <a:cs typeface="Arial" pitchFamily="34" charset="-120"/>
+              </a:rPr>
+              <a:t>Produkt &amp; Engineering</a:t>
+            </a:r>
+            <a:endParaRPr lang="en-US" sz="1000" dirty="0"/>
+          </a:p>
+        </p:txBody>
+      </p:sp>
+      <p:sp>
+        <p:nvSpPr>
+          <p:cNvPr id="26" name="Text 23"/>
+          <p:cNvSpPr txBox="1"/>
+          <p:nvPr/>
+        </p:nvSpPr>
+        <p:spPr>
+          <a:xfrm>
+            <a:off x="1005840" y="4937760"/>
+            <a:ext cx="1834835" cy="219456"/>
+          </a:xfrm>
+          <a:prstGeom prst="rect">
+            <a:avLst/>
+          </a:prstGeom>
+          <a:noFill/>
+          <a:ln/>
+        </p:spPr>
+        <p:txBody>
+          <a:bodyPr wrap="square" lIns="0" tIns="0" rIns="0" bIns="0" rtlCol="0" anchor="t">
+            <a:normAutofit/>
+          </a:bodyPr>
+          <a:lstStyle/>
+          <a:p>
+            <a:pPr indent="0" marL="0">
+              <a:buNone/>
+            </a:pPr>
+            <a:r>
+              <a:rPr lang="en-US" sz="1000" dirty="0">
+                <a:solidFill>
+                  <a:srgbClr val="9AA3B5"/>
+                </a:solidFill>
+                <a:latin typeface="Arial" pitchFamily="34" charset="0"/>
+                <a:ea typeface="Arial" pitchFamily="34" charset="-122"/>
+                <a:cs typeface="Arial" pitchFamily="34" charset="-120"/>
+              </a:rPr>
+              <a:t>250 T€ · 50 %</a:t>
+            </a:r>
+            <a:endParaRPr lang="en-US" sz="1000" dirty="0"/>
+          </a:p>
+        </p:txBody>
+      </p:sp>
+      <p:sp>
+        <p:nvSpPr>
+          <p:cNvPr id="27" name="Shape 24"/>
+          <p:cNvSpPr/>
+          <p:nvPr/>
+        </p:nvSpPr>
+        <p:spPr>
+          <a:xfrm>
+            <a:off x="2932115" y="4773168"/>
+            <a:ext cx="109728" cy="109728"/>
+          </a:xfrm>
+          <a:prstGeom prst="ellipse">
+            <a:avLst/>
+          </a:prstGeom>
+          <a:solidFill>
+            <a:srgbClr val="2DFFB5"/>
+          </a:solidFill>
+          <a:ln w="12700">
+            <a:solidFill>
+              <a:srgbClr val="2DFFB5"/>
+            </a:solidFill>
+            <a:prstDash val="solid"/>
+          </a:ln>
+        </p:spPr>
+      </p:sp>
+      <p:sp>
+        <p:nvSpPr>
+          <p:cNvPr id="28" name="Text 25"/>
+          <p:cNvSpPr txBox="1"/>
+          <p:nvPr/>
+        </p:nvSpPr>
+        <p:spPr>
+          <a:xfrm>
+            <a:off x="3114995" y="4709160"/>
+            <a:ext cx="1834835" cy="237744"/>
+          </a:xfrm>
+          <a:prstGeom prst="rect">
+            <a:avLst/>
+          </a:prstGeom>
+          <a:noFill/>
+          <a:ln/>
+        </p:spPr>
+        <p:txBody>
+          <a:bodyPr wrap="square" lIns="0" tIns="0" rIns="0" bIns="0" rtlCol="0" anchor="t">
+            <a:normAutofit/>
+          </a:bodyPr>
+          <a:lstStyle/>
+          <a:p>
+            <a:pPr indent="0" marL="0">
+              <a:buNone/>
+            </a:pPr>
+            <a:r>
+              <a:rPr lang="en-US" sz="1000" b="1" dirty="0">
+                <a:solidFill>
+                  <a:srgbClr val="FFFFFF"/>
+                </a:solidFill>
+                <a:latin typeface="Arial" pitchFamily="34" charset="0"/>
+                <a:ea typeface="Arial" pitchFamily="34" charset="-122"/>
+                <a:cs typeface="Arial" pitchFamily="34" charset="-120"/>
+              </a:rPr>
+              <a:t>Vision-Linien A–D</a:t>
+            </a:r>
+            <a:endParaRPr lang="en-US" sz="1000" dirty="0"/>
+          </a:p>
+        </p:txBody>
+      </p:sp>
+      <p:sp>
+        <p:nvSpPr>
+          <p:cNvPr id="29" name="Text 26"/>
+          <p:cNvSpPr txBox="1"/>
+          <p:nvPr/>
+        </p:nvSpPr>
+        <p:spPr>
+          <a:xfrm>
+            <a:off x="3114995" y="4937760"/>
+            <a:ext cx="1834835" cy="219456"/>
+          </a:xfrm>
+          <a:prstGeom prst="rect">
+            <a:avLst/>
+          </a:prstGeom>
+          <a:noFill/>
+          <a:ln/>
+        </p:spPr>
+        <p:txBody>
+          <a:bodyPr wrap="square" lIns="0" tIns="0" rIns="0" bIns="0" rtlCol="0" anchor="t">
+            <a:normAutofit/>
+          </a:bodyPr>
+          <a:lstStyle/>
+          <a:p>
+            <a:pPr indent="0" marL="0">
+              <a:buNone/>
+            </a:pPr>
+            <a:r>
+              <a:rPr lang="en-US" sz="1000" dirty="0">
+                <a:solidFill>
+                  <a:srgbClr val="9AA3B5"/>
+                </a:solidFill>
+                <a:latin typeface="Arial" pitchFamily="34" charset="0"/>
+                <a:ea typeface="Arial" pitchFamily="34" charset="-122"/>
+                <a:cs typeface="Arial" pitchFamily="34" charset="-120"/>
+              </a:rPr>
+              <a:t>100 T€ · 20 %</a:t>
+            </a:r>
+            <a:endParaRPr lang="en-US" sz="1000" dirty="0"/>
+          </a:p>
+        </p:txBody>
+      </p:sp>
+      <p:sp>
+        <p:nvSpPr>
+          <p:cNvPr id="30" name="Shape 27"/>
+          <p:cNvSpPr/>
+          <p:nvPr/>
+        </p:nvSpPr>
+        <p:spPr>
+          <a:xfrm>
+            <a:off x="5041270" y="4773168"/>
+            <a:ext cx="109728" cy="109728"/>
+          </a:xfrm>
+          <a:prstGeom prst="ellipse">
+            <a:avLst/>
+          </a:prstGeom>
+          <a:solidFill>
+            <a:srgbClr val="FFD166"/>
+          </a:solidFill>
+          <a:ln w="12700">
+            <a:solidFill>
+              <a:srgbClr val="FFD166"/>
+            </a:solidFill>
+            <a:prstDash val="solid"/>
+          </a:ln>
+        </p:spPr>
+      </p:sp>
+      <p:sp>
+        <p:nvSpPr>
+          <p:cNvPr id="31" name="Text 28"/>
+          <p:cNvSpPr txBox="1"/>
+          <p:nvPr/>
+        </p:nvSpPr>
+        <p:spPr>
+          <a:xfrm>
+            <a:off x="5224150" y="4709160"/>
+            <a:ext cx="1834835" cy="237744"/>
+          </a:xfrm>
+          <a:prstGeom prst="rect">
+            <a:avLst/>
+          </a:prstGeom>
+          <a:noFill/>
+          <a:ln/>
+        </p:spPr>
+        <p:txBody>
+          <a:bodyPr wrap="square" lIns="0" tIns="0" rIns="0" bIns="0" rtlCol="0" anchor="t">
+            <a:normAutofit/>
+          </a:bodyPr>
+          <a:lstStyle/>
+          <a:p>
+            <a:pPr indent="0" marL="0">
+              <a:buNone/>
+            </a:pPr>
+            <a:r>
+              <a:rPr lang="en-US" sz="1000" b="1" dirty="0">
+                <a:solidFill>
+                  <a:srgbClr val="FFFFFF"/>
+                </a:solidFill>
+                <a:latin typeface="Arial" pitchFamily="34" charset="0"/>
+                <a:ea typeface="Arial" pitchFamily="34" charset="-122"/>
+                <a:cs typeface="Arial" pitchFamily="34" charset="-120"/>
+              </a:rPr>
+              <a:t>Go-to-Market &amp; Piloten</a:t>
+            </a:r>
+            <a:endParaRPr lang="en-US" sz="1000" dirty="0"/>
+          </a:p>
+        </p:txBody>
+      </p:sp>
+      <p:sp>
+        <p:nvSpPr>
+          <p:cNvPr id="32" name="Text 29"/>
+          <p:cNvSpPr txBox="1"/>
+          <p:nvPr/>
+        </p:nvSpPr>
+        <p:spPr>
+          <a:xfrm>
+            <a:off x="5224150" y="4937760"/>
+            <a:ext cx="1834835" cy="219456"/>
+          </a:xfrm>
+          <a:prstGeom prst="rect">
+            <a:avLst/>
+          </a:prstGeom>
+          <a:noFill/>
+          <a:ln/>
+        </p:spPr>
+        <p:txBody>
+          <a:bodyPr wrap="square" lIns="0" tIns="0" rIns="0" bIns="0" rtlCol="0" anchor="t">
+            <a:normAutofit/>
+          </a:bodyPr>
+          <a:lstStyle/>
+          <a:p>
+            <a:pPr indent="0" marL="0">
+              <a:buNone/>
+            </a:pPr>
+            <a:r>
+              <a:rPr lang="en-US" sz="1000" dirty="0">
+                <a:solidFill>
+                  <a:srgbClr val="9AA3B5"/>
+                </a:solidFill>
+                <a:latin typeface="Arial" pitchFamily="34" charset="0"/>
+                <a:ea typeface="Arial" pitchFamily="34" charset="-122"/>
+                <a:cs typeface="Arial" pitchFamily="34" charset="-120"/>
+              </a:rPr>
+              <a:t>75 T€ · 15 %</a:t>
+            </a:r>
+            <a:endParaRPr lang="en-US" sz="1000" dirty="0"/>
+          </a:p>
+        </p:txBody>
+      </p:sp>
+      <p:sp>
+        <p:nvSpPr>
+          <p:cNvPr id="33" name="Shape 30"/>
+          <p:cNvSpPr/>
+          <p:nvPr/>
+        </p:nvSpPr>
+        <p:spPr>
+          <a:xfrm>
+            <a:off x="7150425" y="4773168"/>
+            <a:ext cx="109728" cy="109728"/>
+          </a:xfrm>
+          <a:prstGeom prst="ellipse">
+            <a:avLst/>
+          </a:prstGeom>
+          <a:solidFill>
+            <a:srgbClr val="5AD1FF"/>
+          </a:solidFill>
+          <a:ln w="12700">
+            <a:solidFill>
+              <a:srgbClr val="5AD1FF"/>
+            </a:solidFill>
+            <a:prstDash val="solid"/>
+          </a:ln>
+        </p:spPr>
+      </p:sp>
+      <p:sp>
+        <p:nvSpPr>
+          <p:cNvPr id="34" name="Text 31"/>
+          <p:cNvSpPr txBox="1"/>
+          <p:nvPr/>
+        </p:nvSpPr>
+        <p:spPr>
+          <a:xfrm>
+            <a:off x="7333305" y="4709160"/>
+            <a:ext cx="1834835" cy="237744"/>
+          </a:xfrm>
+          <a:prstGeom prst="rect">
+            <a:avLst/>
+          </a:prstGeom>
+          <a:noFill/>
+          <a:ln/>
+        </p:spPr>
+        <p:txBody>
+          <a:bodyPr wrap="square" lIns="0" tIns="0" rIns="0" bIns="0" rtlCol="0" anchor="t">
+            <a:normAutofit/>
+          </a:bodyPr>
+          <a:lstStyle/>
+          <a:p>
+            <a:pPr indent="0" marL="0">
+              <a:buNone/>
+            </a:pPr>
+            <a:r>
+              <a:rPr lang="en-US" sz="1000" b="1" dirty="0">
+                <a:solidFill>
+                  <a:srgbClr val="FFFFFF"/>
+                </a:solidFill>
+                <a:latin typeface="Arial" pitchFamily="34" charset="0"/>
+                <a:ea typeface="Arial" pitchFamily="34" charset="-122"/>
+                <a:cs typeface="Arial" pitchFamily="34" charset="-120"/>
+              </a:rPr>
+              <a:t>Recht, Marke, Datenschutz</a:t>
+            </a:r>
+            <a:endParaRPr lang="en-US" sz="1000" dirty="0"/>
+          </a:p>
+        </p:txBody>
+      </p:sp>
+      <p:sp>
+        <p:nvSpPr>
+          <p:cNvPr id="35" name="Text 32"/>
+          <p:cNvSpPr txBox="1"/>
+          <p:nvPr/>
+        </p:nvSpPr>
+        <p:spPr>
+          <a:xfrm>
+            <a:off x="7333305" y="4937760"/>
+            <a:ext cx="1834835" cy="219456"/>
+          </a:xfrm>
+          <a:prstGeom prst="rect">
+            <a:avLst/>
+          </a:prstGeom>
+          <a:noFill/>
+          <a:ln/>
+        </p:spPr>
+        <p:txBody>
+          <a:bodyPr wrap="square" lIns="0" tIns="0" rIns="0" bIns="0" rtlCol="0" anchor="t">
+            <a:normAutofit/>
+          </a:bodyPr>
+          <a:lstStyle/>
+          <a:p>
+            <a:pPr indent="0" marL="0">
+              <a:buNone/>
+            </a:pPr>
+            <a:r>
+              <a:rPr lang="en-US" sz="1000" dirty="0">
+                <a:solidFill>
+                  <a:srgbClr val="9AA3B5"/>
+                </a:solidFill>
+                <a:latin typeface="Arial" pitchFamily="34" charset="0"/>
+                <a:ea typeface="Arial" pitchFamily="34" charset="-122"/>
+                <a:cs typeface="Arial" pitchFamily="34" charset="-120"/>
+              </a:rPr>
+              <a:t>50 T€ · 10 %</a:t>
+            </a:r>
+            <a:endParaRPr lang="en-US" sz="1000" dirty="0"/>
+          </a:p>
+        </p:txBody>
+      </p:sp>
+      <p:sp>
+        <p:nvSpPr>
+          <p:cNvPr id="36" name="Shape 33"/>
+          <p:cNvSpPr/>
+          <p:nvPr/>
+        </p:nvSpPr>
+        <p:spPr>
+          <a:xfrm>
+            <a:off x="9259580" y="4773168"/>
+            <a:ext cx="109728" cy="109728"/>
+          </a:xfrm>
+          <a:prstGeom prst="ellipse">
+            <a:avLst/>
+          </a:prstGeom>
+          <a:solidFill>
+            <a:srgbClr val="9AA3B5"/>
+          </a:solidFill>
+          <a:ln w="12700">
+            <a:solidFill>
+              <a:srgbClr val="9AA3B5"/>
+            </a:solidFill>
+            <a:prstDash val="solid"/>
+          </a:ln>
+        </p:spPr>
+      </p:sp>
+      <p:sp>
+        <p:nvSpPr>
+          <p:cNvPr id="37" name="Text 34"/>
+          <p:cNvSpPr txBox="1"/>
+          <p:nvPr/>
+        </p:nvSpPr>
+        <p:spPr>
+          <a:xfrm>
+            <a:off x="9442460" y="4709160"/>
+            <a:ext cx="1834835" cy="237744"/>
+          </a:xfrm>
+          <a:prstGeom prst="rect">
+            <a:avLst/>
+          </a:prstGeom>
+          <a:noFill/>
+          <a:ln/>
+        </p:spPr>
+        <p:txBody>
+          <a:bodyPr wrap="square" lIns="0" tIns="0" rIns="0" bIns="0" rtlCol="0" anchor="t">
+            <a:normAutofit/>
+          </a:bodyPr>
+          <a:lstStyle/>
+          <a:p>
+            <a:pPr indent="0" marL="0">
+              <a:buNone/>
+            </a:pPr>
+            <a:r>
+              <a:rPr lang="en-US" sz="1000" b="1" dirty="0">
+                <a:solidFill>
+                  <a:srgbClr val="FFFFFF"/>
+                </a:solidFill>
+                <a:latin typeface="Arial" pitchFamily="34" charset="0"/>
+                <a:ea typeface="Arial" pitchFamily="34" charset="-122"/>
+                <a:cs typeface="Arial" pitchFamily="34" charset="-120"/>
+              </a:rPr>
+              <a:t>Reserve</a:t>
+            </a:r>
+            <a:endParaRPr lang="en-US" sz="1000" dirty="0"/>
+          </a:p>
+        </p:txBody>
+      </p:sp>
+      <p:sp>
+        <p:nvSpPr>
+          <p:cNvPr id="38" name="Text 35"/>
+          <p:cNvSpPr txBox="1"/>
+          <p:nvPr/>
+        </p:nvSpPr>
+        <p:spPr>
+          <a:xfrm>
+            <a:off x="9442460" y="4937760"/>
+            <a:ext cx="1834835" cy="219456"/>
+          </a:xfrm>
+          <a:prstGeom prst="rect">
+            <a:avLst/>
+          </a:prstGeom>
+          <a:noFill/>
+          <a:ln/>
+        </p:spPr>
+        <p:txBody>
+          <a:bodyPr wrap="square" lIns="0" tIns="0" rIns="0" bIns="0" rtlCol="0" anchor="t">
+            <a:normAutofit/>
+          </a:bodyPr>
+          <a:lstStyle/>
+          <a:p>
+            <a:pPr indent="0" marL="0">
+              <a:buNone/>
+            </a:pPr>
+            <a:r>
+              <a:rPr lang="en-US" sz="1000" dirty="0">
+                <a:solidFill>
+                  <a:srgbClr val="9AA3B5"/>
+                </a:solidFill>
+                <a:latin typeface="Arial" pitchFamily="34" charset="0"/>
+                <a:ea typeface="Arial" pitchFamily="34" charset="-122"/>
+                <a:cs typeface="Arial" pitchFamily="34" charset="-120"/>
+              </a:rPr>
+              <a:t>25 T€ · 5 %</a:t>
+            </a:r>
+            <a:endParaRPr lang="en-US" sz="1000" dirty="0"/>
+          </a:p>
+        </p:txBody>
+      </p:sp>
+      <p:sp>
+        <p:nvSpPr>
+          <p:cNvPr id="39" name="Shape 36"/>
+          <p:cNvSpPr/>
+          <p:nvPr/>
+        </p:nvSpPr>
+        <p:spPr>
+          <a:xfrm>
+            <a:off x="548640" y="5303520"/>
+            <a:ext cx="11094415" cy="713232"/>
+          </a:xfrm>
+          <a:prstGeom prst="roundRect">
+            <a:avLst>
+              <a:gd name="adj" fmla="val 15385"/>
+            </a:avLst>
+          </a:prstGeom>
+          <a:solidFill>
+            <a:srgbClr val="1F2330"/>
+          </a:solidFill>
+          <a:ln w="12700">
+            <a:solidFill>
+              <a:srgbClr val="1F2330"/>
+            </a:solidFill>
+            <a:prstDash val="solid"/>
+          </a:ln>
+        </p:spPr>
+      </p:sp>
+      <p:sp>
+        <p:nvSpPr>
+          <p:cNvPr id="40" name="Text 37"/>
+          <p:cNvSpPr txBox="1"/>
+          <p:nvPr/>
+        </p:nvSpPr>
+        <p:spPr>
+          <a:xfrm>
             <a:off x="822960" y="5321808"/>
             <a:ext cx="10545775" cy="676656"/>
           </a:xfrm>
@@ -16260,7 +17204,7 @@
                 <a:ea typeface="Arial" pitchFamily="34" charset="-122"/>
                 <a:cs typeface="Arial" pitchFamily="34" charset="-120"/>
               </a:rPr>
-              <a:t>Kontakt: [E-Mail]   ·   Demo: [Link]   ·   Code &amp; Doku: live-fx/   ·   [Name]</a:t>
+              <a:t>Tuncay Sancak, Gründer &amp; Geschäftsführer   ·   Investor Relations: Gönül Demet   ·   [E-Mail]   ·   Demo: [Link]</a:t>
             </a:r>
             <a:endParaRPr lang="en-US" sz="1500" dirty="0"/>
           </a:p>
@@ -16268,7 +17212,7 @@
       </p:sp>
       <p:sp>
         <p:nvSpPr>
-          <p:cNvPr id="19" name="Text 16"/>
+          <p:cNvPr id="41" name="Text 38"/>
           <p:cNvSpPr txBox="1"/>
           <p:nvPr/>
         </p:nvSpPr>
@@ -16309,14 +17253,14 @@
       </p:sp>
       <p:sp>
         <p:nvSpPr>
-          <p:cNvPr id="20" name="Text 17"/>
-          <p:cNvSpPr txBox="1"/>
-          <p:nvPr/>
-        </p:nvSpPr>
-        <p:spPr>
-          <a:xfrm>
-            <a:off x="9357055" y="6473952"/>
-            <a:ext cx="2286000" cy="228600"/>
+          <p:cNvPr id="42" name="Text 39"/>
+          <p:cNvSpPr txBox="1"/>
+          <p:nvPr/>
+        </p:nvSpPr>
+        <p:spPr>
+          <a:xfrm>
+            <a:off x="7071055" y="6473952"/>
+            <a:ext cx="4572000" cy="228600"/>
           </a:xfrm>
           <a:prstGeom prst="rect">
             <a:avLst/>
@@ -16340,7 +17284,7 @@
                 <a:ea typeface="Arial" pitchFamily="34" charset="-122"/>
                 <a:cs typeface="Arial" pitchFamily="34" charset="-120"/>
               </a:rPr>
-              <a:t>LiveFX  ·  17</a:t>
+              <a:t>Vertraulich · Oktober 2026  ·  LiveFX  ·  17</a:t>
             </a:r>
             <a:endParaRPr lang="en-US" sz="900" dirty="0"/>
           </a:p>
@@ -16466,8 +17410,8 @@
         </p:nvSpPr>
         <p:spPr>
           <a:xfrm>
-            <a:off x="9357055" y="6473952"/>
-            <a:ext cx="2286000" cy="228600"/>
+            <a:off x="7071055" y="6473952"/>
+            <a:ext cx="4572000" cy="228600"/>
           </a:xfrm>
           <a:prstGeom prst="rect">
             <a:avLst/>
@@ -16491,7 +17435,7 @@
                 <a:ea typeface="Arial" pitchFamily="34" charset="-122"/>
                 <a:cs typeface="Arial" pitchFamily="34" charset="-120"/>
               </a:rPr>
-              <a:t>LiveFX  ·  2</a:t>
+              <a:t>Vertraulich · Oktober 2026  ·  LiveFX  ·  2</a:t>
             </a:r>
             <a:endParaRPr lang="en-US" sz="900" dirty="0"/>
           </a:p>
@@ -17160,7 +18104,7 @@
                 <a:ea typeface="Arial" pitchFamily="34" charset="-122"/>
                 <a:cs typeface="Arial" pitchFamily="34" charset="-120"/>
               </a:rPr>
-              <a:t>„Ich sage ‚krass‘ – und nichts passiert, außer dass ich selbst zur Tastatur greife.“  – [Name], aus dem eigenen Stream</a:t>
+              <a:t>„Ich sage ‚krass‘ – und nichts passiert, außer dass ich selbst zur Tastatur greife.“  – Tuncay Sancak, aus dem eigenen Stream</a:t>
             </a:r>
             <a:endParaRPr lang="en-US" sz="1400" dirty="0"/>
           </a:p>
@@ -17286,8 +18230,8 @@
         </p:nvSpPr>
         <p:spPr>
           <a:xfrm>
-            <a:off x="9357055" y="6473952"/>
-            <a:ext cx="2286000" cy="228600"/>
+            <a:off x="7071055" y="6473952"/>
+            <a:ext cx="4572000" cy="228600"/>
           </a:xfrm>
           <a:prstGeom prst="rect">
             <a:avLst/>
@@ -17311,7 +18255,7 @@
                 <a:ea typeface="Arial" pitchFamily="34" charset="-122"/>
                 <a:cs typeface="Arial" pitchFamily="34" charset="-120"/>
               </a:rPr>
-              <a:t>LiveFX  ·  3</a:t>
+              <a:t>Vertraulich · Oktober 2026  ·  LiveFX  ·  3</a:t>
             </a:r>
             <a:endParaRPr lang="en-US" sz="900" dirty="0"/>
           </a:p>
@@ -18924,8 +19868,8 @@
         </p:nvSpPr>
         <p:spPr>
           <a:xfrm>
-            <a:off x="9357055" y="6473952"/>
-            <a:ext cx="2286000" cy="228600"/>
+            <a:off x="7071055" y="6473952"/>
+            <a:ext cx="4572000" cy="228600"/>
           </a:xfrm>
           <a:prstGeom prst="rect">
             <a:avLst/>
@@ -18949,7 +19893,7 @@
                 <a:ea typeface="Arial" pitchFamily="34" charset="-122"/>
                 <a:cs typeface="Arial" pitchFamily="34" charset="-120"/>
               </a:rPr>
-              <a:t>LiveFX  ·  4</a:t>
+              <a:t>Vertraulich · Oktober 2026  ·  LiveFX  ·  4</a:t>
             </a:r>
             <a:endParaRPr lang="en-US" sz="900" dirty="0"/>
           </a:p>
@@ -19338,8 +20282,8 @@
         </p:nvSpPr>
         <p:spPr>
           <a:xfrm>
-            <a:off x="9357055" y="6473952"/>
-            <a:ext cx="2286000" cy="228600"/>
+            <a:off x="7071055" y="6473952"/>
+            <a:ext cx="4572000" cy="228600"/>
           </a:xfrm>
           <a:prstGeom prst="rect">
             <a:avLst/>
@@ -19363,7 +20307,7 @@
                 <a:ea typeface="Arial" pitchFamily="34" charset="-122"/>
                 <a:cs typeface="Arial" pitchFamily="34" charset="-120"/>
               </a:rPr>
-              <a:t>LiveFX  ·  5</a:t>
+              <a:t>Vertraulich · Oktober 2026  ·  LiveFX  ·  5</a:t>
             </a:r>
             <a:endParaRPr lang="en-US" sz="900" dirty="0"/>
           </a:p>
@@ -20673,8 +21617,8 @@
         </p:nvSpPr>
         <p:spPr>
           <a:xfrm>
-            <a:off x="9357055" y="6473952"/>
-            <a:ext cx="2286000" cy="228600"/>
+            <a:off x="7071055" y="6473952"/>
+            <a:ext cx="4572000" cy="228600"/>
           </a:xfrm>
           <a:prstGeom prst="rect">
             <a:avLst/>
@@ -20698,7 +21642,7 @@
                 <a:ea typeface="Arial" pitchFamily="34" charset="-122"/>
                 <a:cs typeface="Arial" pitchFamily="34" charset="-120"/>
               </a:rPr>
-              <a:t>LiveFX  ·  6</a:t>
+              <a:t>Vertraulich · Oktober 2026  ·  LiveFX  ·  6</a:t>
             </a:r>
             <a:endParaRPr lang="en-US" sz="900" dirty="0"/>
           </a:p>
@@ -21438,8 +22382,8 @@
         </p:nvSpPr>
         <p:spPr>
           <a:xfrm>
-            <a:off x="9357055" y="6473952"/>
-            <a:ext cx="2286000" cy="228600"/>
+            <a:off x="7071055" y="6473952"/>
+            <a:ext cx="4572000" cy="228600"/>
           </a:xfrm>
           <a:prstGeom prst="rect">
             <a:avLst/>
@@ -21463,7 +22407,7 @@
                 <a:ea typeface="Arial" pitchFamily="34" charset="-122"/>
                 <a:cs typeface="Arial" pitchFamily="34" charset="-120"/>
               </a:rPr>
-              <a:t>LiveFX  ·  7</a:t>
+              <a:t>Vertraulich · Oktober 2026  ·  LiveFX  ·  7</a:t>
             </a:r>
             <a:endParaRPr lang="en-US" sz="900" dirty="0"/>
           </a:p>
@@ -21929,7 +22873,7 @@
                 <a:ea typeface="Arial" pitchFamily="34" charset="-122"/>
                 <a:cs typeface="Arial" pitchFamily="34" charset="-120"/>
               </a:rPr>
-              <a:t>20–40 T Pro-Abos × 9,99 €/Monat ≈ 2,4–4,8 Mio. € ARR (DACH + Türkei + EN-Nische)</a:t>
+              <a:t>5.000–15.000 zahlende Pro-Nutzer × 9,99 €/Monat ≈ 0,6–1,8 Mio. € ARR (wie Businessplan; DACH + Türkei + EN-Nische)</a:t>
             </a:r>
             <a:endParaRPr lang="en-US" sz="1050" dirty="0"/>
           </a:p>
@@ -22573,8 +23517,8 @@
         </p:nvSpPr>
         <p:spPr>
           <a:xfrm>
-            <a:off x="9357055" y="6473952"/>
-            <a:ext cx="2286000" cy="228600"/>
+            <a:off x="7071055" y="6473952"/>
+            <a:ext cx="4572000" cy="228600"/>
           </a:xfrm>
           <a:prstGeom prst="rect">
             <a:avLst/>
@@ -22598,7 +23542,7 @@
                 <a:ea typeface="Arial" pitchFamily="34" charset="-122"/>
                 <a:cs typeface="Arial" pitchFamily="34" charset="-120"/>
               </a:rPr>
-              <a:t>LiveFX  ·  8</a:t>
+              <a:t>Vertraulich · Oktober 2026  ·  LiveFX  ·  8</a:t>
             </a:r>
             <a:endParaRPr lang="en-US" sz="900" dirty="0"/>
           </a:p>
@@ -23567,8 +24511,8 @@
         </p:nvSpPr>
         <p:spPr>
           <a:xfrm>
-            <a:off x="9357055" y="6473952"/>
-            <a:ext cx="2286000" cy="228600"/>
+            <a:off x="7071055" y="6473952"/>
+            <a:ext cx="4572000" cy="228600"/>
           </a:xfrm>
           <a:prstGeom prst="rect">
             <a:avLst/>
@@ -23592,7 +24536,7 @@
                 <a:ea typeface="Arial" pitchFamily="34" charset="-122"/>
                 <a:cs typeface="Arial" pitchFamily="34" charset="-120"/>
               </a:rPr>
-              <a:t>LiveFX  ·  9</a:t>
+              <a:t>Vertraulich · Oktober 2026  ·  LiveFX  ·  9</a:t>
             </a:r>
             <a:endParaRPr lang="en-US" sz="900" dirty="0"/>
           </a:p>

--- a/live-fx/business/LiveFX_Pitch.pptx
+++ b/live-fx/business/LiveFX_Pitch.pptx
@@ -22,9 +22,11 @@
     <p:sldId id="270" r:id="rId16"/>
     <p:sldId id="271" r:id="rId17"/>
     <p:sldId id="272" r:id="rId18"/>
+    <p:sldId id="273" r:id="rId19"/>
+    <p:sldId id="274" r:id="rId20"/>
   </p:sldIdLst>
   <p:notesMasterIdLst>
-    <p:notesMasterId r:id="rId19"/>
+    <p:notesMasterId r:id="rId21"/>
   </p:notesMasterIdLst>
   <p:sldSz cx="12192000" cy="6858000"/>
   <p:notesSz cx="6858000" cy="12192000"/>
@@ -123,7 +125,7 @@
   <p:extLst>
     <p:ext uri="{521415D9-36F7-43E2-AB2F-B90AF26B5E84}">
       <p14:sectionLst xmlns:p14="http://schemas.microsoft.com/office/powerpoint/2010/main">
-        <p14:section name="Heute: LiveFX 2.0" id="{115b8b9e-bf86-2021-5767-a3c9bdfc864b}">
+        <p14:section name="Heute: LiveFX 2.1" id="{f1613e5f-53a5-6353-1122-f7dc61b0abbd}">
           <p14:sldIdLst>
             <p14:sldId id="256"/>
             <p14:sldId id="257"/>
@@ -138,7 +140,7 @@
             <p14:sldId id="266"/>
           </p14:sldIdLst>
         </p14:section>
-        <p14:section name="Vision 2027–2029" id="{00220776-bcbe-4b51-2862-a09e2039e5bc}">
+        <p14:section name="Vision 2027–2029" id="{7fa908a5-2b7a-2e04-7c8a-963e9d4c976d}">
           <p14:sldIdLst>
             <p14:sldId id="267"/>
             <p14:sldId id="268"/>
@@ -146,10 +148,12 @@
             <p14:sldId id="270"/>
           </p14:sldIdLst>
         </p14:section>
-        <p14:section name="Team und Ask" id="{c70f0e0e-fd10-f567-8485-fd3b814d12b8}">
+        <p14:section name="Team und Ask" id="{f7b1e52c-d0ae-9a81-acc4-95620f33f16c}">
           <p14:sldIdLst>
             <p14:sldId id="271"/>
             <p14:sldId id="272"/>
+            <p14:sldId id="273"/>
+            <p14:sldId id="274"/>
           </p14:sldIdLst>
         </p14:section>
       </p14:sectionLst>
@@ -1116,7 +1120,7 @@
           <a:p>
             <a:r>
               <a:rPr lang="en-US" dirty="0"/>
-              <a:t>Reihenfolge nach Hebel: Mobile-SDK löst das größte Problem (Handy-Streamer ohne OBS). Plattform-Integration ist der Ask dieses Decks. KI-Verstehen und Story-Engine sind unsere technische Differenzierung. Wichtig: Die Szenen werden prozedural gezeichnet, nicht von einer Video-KI generiert – das ist die Brücke zu den nächsten vier Folien.</a:t>
+              <a:t>Sortiert nach Geld und Beweis: Die 250 T€ tragen uns 18 Monate mit einer Entwickler:in. Zuerst Pro-Abo und Mobile-App/PWA, parallel WortBild als erste Vision-Linie, dann DE/EN und ein Plattform- oder Bildungspilot. Jeder Schritt hat ein Gate (nächste Folien). In Monat 18 holen wir die Seed-Runde von etwa 350 T€ – erst dann starten Story-Engine, Auto-Edit und VR/AR. So bleibt das kleine Team fokussiert.</a:t>
             </a:r>
             <a:endParaRPr lang="en-US" dirty="0"/>
           </a:p>
@@ -1292,7 +1296,7 @@
           <a:p>
             <a:r>
               <a:rPr lang="en-US" dirty="0"/>
-              <a:t>So sieht es aus: Die Streamerin tut nichts außer reden. „Es war Nacht“ – der Himmel wird dunkel. „Ein Mädchen ging in den Wald“ – Bäume wachsen, die Figur läuft ein. „Es begann zu regnen“ – Regen, Atmosphäre-Loop wechselt. „Plötzlich ein Drache“ – Blitz, Kamera-Ruck, Drache. Technisch: Ein Satz erzeugt ein Delta von 200–500 Byte, Szenen wechseln 1- bis 3-mal pro Minute, gezeichnet wird in einem Canvas mit höchstens 1.200 Partikeln – dieses Budget hält unsere Effekt-Engine schon heute neben OBS. Kosten: Video-KI kostet nach Listenpreis 0,05 USD (Veo 3.1 Lite, 720p) bis 0,75 USD pro Sekunde [Quelle 24, 25], also 180–2.700 USD pro Stunde, und live geht es gar nicht. LiveFX: 0 € ohne KI, 0,25–0,75 USD pro Stunde mit optionaler Text-KI. Markt: Hörbuch DE 374 Mio. € [Quelle 19], 23,8 Mio. Menschen hören wöchentlich Podcasts [Quelle 20], YouTube über 1 Mrd. Podcast-Zuschauer [Quelle 21]; KI-Video wächst von 3,67 auf 24,89 Mrd. USD bis 2036 [Quelle 23]. Zeitplan: MVP Deutsch Q2 2027, TR/EN und Welten-Packs Q3 2027. Erster Verlags-Fall: die eigene Kinderbuchreihe.</a:t>
+              <a:t>So sieht es aus: Die Streamerin tut nichts außer reden. „Es war Nacht“ – der Himmel wird dunkel. „Ein Mädchen ging in den Wald“ – Bäume wachsen, die Figur läuft ein. „Es begann zu regnen“ – Regen, Atmosphäre-Loop wechselt. „Plötzlich ein Drache“ – Blitz, Kamera-Ruck, Drache. Technisch: Ein Satz erzeugt ein Delta von 200–500 Byte, Szenen wechseln 1- bis 3-mal pro Minute, gezeichnet wird in einem Canvas mit höchstens 1.200 Partikeln – dieses Budget hält unsere Effekt-Engine schon heute neben OBS. Kosten: Video-KI kostet nach Listenpreis 0,05 USD (Veo 3.1 Lite, 720p) bis 0,75 USD pro Sekunde [Quelle 24, 25], also 180–2.700 USD pro Stunde, und live geht es gar nicht. LiveFX: 0 € ohne KI, 0,25–0,75 USD pro Stunde mit optionaler Text-KI. Markt: Hörbuch DE 374 Mio. € [Quelle 19], 23,8 Mio. Menschen hören wöchentlich Podcasts [Quelle 20], YouTube über 1 Mrd. Podcast-Zuschauer [Quelle 21]; KI-Video wächst von 3,67 auf 24,89 Mrd. USD bis 2036 [Quelle 23]. Zeitplan: Die Story-Engine wird aus der Folgerunde nach Gate 2 finanziert – MVP Deutsch ab Monat 19 (H2 2028), danach TR/EN und Welten-Packs. Erster Verlags-Fall: die eigene Kinderbuchreihe.</a:t>
             </a:r>
             <a:endParaRPr lang="en-US" dirty="0"/>
           </a:p>
@@ -1468,7 +1472,7 @@
           <a:p>
             <a:r>
               <a:rPr lang="en-US" dirty="0"/>
-              <a:t>Zwei Türen in dasselbe Werkzeug. Erstens Live → Highlights: Unser Server kennt schon heute jeden Trigger, jedes Geschenk, jede Chat-Nachricht mit Zeitstempel – daraus werden 3–5 Clips pro Stream. Zweitens Auto-Edit: Eine 20-Minuten-MP4 wird ins Fenster gezogen, Whisper transkribiert lokal im Browser [Quelle 60], LiveFX setzt Effekte, Szenen und Schnitte als verschiebbare Chips, der Export läuft über WebCodecs und den Hardware-Encoder des Geräts [Quelle 57, 58, 59]. Die Datei verlässt den Rechner nie, die Grenzkosten pro Video liegen bei null. Räume: Bühne und Klassenzimmer gehen heute schon (Vollbild, Handy als Regie). Hörbuch mit Bildern und AR am Handy kommen 2027. WebXR [Quelle 47, 48] und Display-Brillen wie Meta Ray-Ban Display [Quelle 46] sind Vision – IDC erwartet 2026 13,6 Mio. Smart Glasses [Quelle 45], Display-Brillen sind davon nur ein kleiner Teil. Wettbewerb ehrlich: CapCut hat 736 Mio. MAU [Quelle 52]; wir treten nicht als Universal-Editor an, sondern über Sprache → Effekt, Szenen, TR/DE und lokale Verarbeitung. Käufer-Signal: Canva kaufte 2026 Cavalry und MangoAI [Quelle 56].</a:t>
+              <a:t>Zwei Türen in dasselbe Werkzeug. Erstens Live → Highlights: Unser Server kennt schon heute jeden Trigger, jedes Geschenk, jede Chat-Nachricht mit Zeitstempel – daraus werden 3–5 Clips pro Stream. Zweitens Auto-Edit: Eine 20-Minuten-MP4 wird ins Fenster gezogen, Whisper transkribiert lokal im Browser [Quelle 60], LiveFX setzt Effekte, Szenen und Schnitte als verschiebbare Chips, der Export läuft über WebCodecs und den Hardware-Encoder des Geräts [Quelle 57, 58, 59]. Die Datei verlässt den Rechner nie, die Grenzkosten pro Video liegen bei null. Räume: Bühne und Klassenzimmer gehen heute schon (Vollbild, Handy als Regie). Hörbuch mit Bildern und AR am Handy kommen mit der Folgerunde nach Gate 2. WebXR [Quelle 47, 48] und Display-Brillen wie Meta Ray-Ban Display [Quelle 46] sind Vision – IDC erwartet 2026 13,6 Mio. Smart Glasses [Quelle 45], Display-Brillen sind davon nur ein kleiner Teil. Wettbewerb ehrlich: CapCut hat 736 Mio. MAU [Quelle 52]; wir treten nicht als Universal-Editor an, sondern über Sprache → Effekt, Szenen, TR/DE und lokale Verarbeitung. Käufer-Signal: Canva kaufte 2026 Cavalry und MangoAI [Quelle 56].</a:t>
             </a:r>
             <a:endParaRPr lang="en-US" dirty="0"/>
           </a:p>
@@ -1556,7 +1560,7 @@
           <a:p>
             <a:r>
               <a:rPr lang="en-US" dirty="0"/>
-              <a:t>Der Gründer ist Nutzer, Content-Lieferant und Produktverantwortlicher in einer Person – das ist der Grund, warum das Produkt in Dialekten, Hochkant und Türkçe funktioniert. Und als Kinderbuchautor bringt er den ersten Verlags- und Bildungsfall selbst mit. Gönül Demet verantwortet Investor Relations und ist Ansprechpartnerin für die Pre-Seed-Runde. Mit dem Pre-Seed (500.000 €) kommen zwei Hires; für WortBild holen wir fachliche Prüfung über einen Edtech-Beirat.</a:t>
+              <a:t>Der Gründer ist Nutzer, Content-Lieferant und Produktverantwortlicher in einer Person – das ist der Grund, warum das Produkt in Dialekten, Hochkant und Türkçe funktioniert. Und als Kinderbuchautor bringt er den ersten Verlags- und Bildungsfall selbst mit. Gönül Demet verantwortet Investor Relations und ist Ansprechpartnerin für die Pre-Seed-Runde. Die Pre-Seed-Runde (250.000 €) finanziert eine Einstellung – eine Mobile-/Web-Entwickler:in ab Monat 3; weitere Einstellungen folgen mit der Seed-Runde nach Gate 2. Für WortBild prüft ein Edtech-Beirat fachlich.</a:t>
             </a:r>
             <a:endParaRPr lang="en-US" dirty="0"/>
           </a:p>
@@ -1644,7 +1648,7 @@
           <a:p>
             <a:r>
               <a:rPr lang="en-US" dirty="0"/>
-              <a:t>Konkret enden: Was wir brauchen, ist ein Ansprechpartner im Live-Team und ein 8-Wochen-Pilot mit 20 Creatorn. Wir liefern Overlay, Pakete, Support und die Messung (Watchtime, Gifts, Clips aus Lives). Neu: Für WortBild und Erzählfilm suchen wir einen zweiten Pilot mit Bildungsträgern, Sprachlern-Plattformen oder Verlagen – der erste Verlagsfall ist die eigene Kinderbuchreihe. Zur Runde: 500.000 € Pre-Seed für LiveFX und alle Projekte, 24 Monate. Mittelverwendung als Vorschlag: Team 250 T€, Vision-Linien 100 T€ (zuerst WortBild/Sprachenlernen und Story-Engine), Go-to-Market 75 T€, Recht/Marke/Datenschutz 50 T€, Reserve 25 T€. Ohne jeden Umsatz reicht das rund 22 Monate; das konservative Szenario ist über drei Jahre gedeckt (Businessplan 11.6). Ansprechpartnerin für Investoren: Gönül Demet. Das Deck gibt es auch auf Türkisch und Englisch.</a:t>
+              <a:t>Die Zahlen auf einer Folie. Basis-Szenario: Der Umsatz wächst von 51 T€ in 2027 auf 3,15 Mio. € in 2031; das EBITDA wird 2028 positiv und bleibt es ab Monat 22. Konservativ sind es 602 T€ Umsatz in 2031, optimistisch 7,44 Mio. € – die Jahre 4 und 5 sind fortgeschrieben. Runway: Ganz ohne Umsatz reichen die 250 T€ 18 Monate. In Monat 18 erwarten wir je nach Szenario 49 bis 369 T€ Kasse – und holen nach Gate 2 eine Seed-Runde von etwa 350 T€. Bewertung: Unser Angebot sind 250.000 € für 10 %, also 2,25 Mio. € Pre-Money und 2,5 Mio. € Post-Money. Die vier üblichen Methoden ohne Umsatz ergeben 2,35 bis 3,0 Mio. € – Berkus 2,35 Mio. €, Scorecard 2,95 Mio. € auf einer Referenz im unteren Teil der DACH-Spanne, VC-Methode 2,43 Mio. € im Upside-Szenario, Risk Factor Summation 3,0 Mio. €; gewichtet 2,71 Mio. €. Das Angebot ist also ein fairer, investorenfreundlicher Einstiegspreis unter jeder Referenzmethode. Warum: funktionsfähiges Produkt mit 575+ automatisierten Tests, eigenes IP und eigene Inhalte, drei Sprachen inklusive türkischer Nische, vier Vision-Optionen auf einer Engine und Kapitaleffizienz – bis v2.1 ohne externes Kapital gebaut. Ehrlich dagegen: Solo-Gründer, noch kein Umsatz. Alternativ ein SAFE mit 2,25 Mio. € Cap und 20 % Discount, ohne Zins. Verhandlungsbasis, mit Steuer- und Rechtsberater zu prüfen.</a:t>
             </a:r>
             <a:endParaRPr lang="en-US" dirty="0"/>
           </a:p>
@@ -1668,6 +1672,182 @@
             <a:fld id="{F7021451-1387-4CA6-816F-3879F97B5CBC}" type="slidenum">
               <a:rPr lang="en-US"/>
               <a:t>17</a:t>
+            </a:fld>
+            <a:endParaRPr lang="en-US"/>
+          </a:p>
+        </p:txBody>
+      </p:sp>
+    </p:spTree>
+    <p:extLst>
+      <p:ext uri="{BB962C8B-B14F-4D97-AF65-F5344CB8AC3E}">
+        <p14:creationId xmlns:p14="http://schemas.microsoft.com/office/powerpoint/2010/main" val="1024086991"/>
+      </p:ext>
+    </p:extLst>
+  </p:cSld>
+  <p:clrMapOvr>
+    <a:masterClrMapping/>
+  </p:clrMapOvr>
+</p:notes>
+</file>
+
+<file path=ppt/notesSlides/notesSlide18.xml><?xml version="1.0" encoding="utf-8"?>
+<p:notes xmlns:a="http://schemas.openxmlformats.org/drawingml/2006/main" xmlns:r="http://schemas.openxmlformats.org/officeDocument/2006/relationships" xmlns:p="http://schemas.openxmlformats.org/presentationml/2006/main">
+  <p:cSld>
+    <p:spTree>
+      <p:nvGrpSpPr>
+        <p:cNvPr id="1" name=""/>
+        <p:cNvGrpSpPr/>
+        <p:nvPr/>
+      </p:nvGrpSpPr>
+      <p:grpSpPr>
+        <a:xfrm>
+          <a:off x="0" y="0"/>
+          <a:ext cx="0" cy="0"/>
+          <a:chOff x="0" y="0"/>
+          <a:chExt cx="0" cy="0"/>
+        </a:xfrm>
+      </p:grpSpPr>
+      <p:sp>
+        <p:nvSpPr>
+          <p:cNvPr id="2" name="Slide Image Placeholder 1"/>
+          <p:cNvSpPr>
+            <a:spLocks noGrp="1" noRot="1" noChangeAspect="1"/>
+          </p:cNvSpPr>
+          <p:nvPr>
+            <p:ph type="sldImg"/>
+          </p:nvPr>
+        </p:nvSpPr>
+        <p:spPr/>
+      </p:sp>
+      <p:sp>
+        <p:nvSpPr>
+          <p:cNvPr id="3" name="Notes Placeholder 2"/>
+          <p:cNvSpPr>
+            <a:spLocks noGrp="1"/>
+          </p:cNvSpPr>
+          <p:nvPr>
+            <p:ph type="body" idx="1"/>
+          </p:nvPr>
+        </p:nvSpPr>
+        <p:spPr/>
+        <p:txBody>
+          <a:bodyPr/>
+          <a:lstStyle/>
+          <a:p>
+            <a:r>
+              <a:rPr lang="en-US" dirty="0"/>
+              <a:t>Vier Gates in 18 Monaten – jedes gibt das nächste Budget frei. Monat 3: Pro-Abo live und Entwickler:in an Bord. Monat 6: 10.000 registrierte Nutzer und 400 zahlende Pro als Ziel; die Schwelle liegt bei 4.000 und 120. Monat 12: 20.000 Nutzer, 800 Pro, 8.073 € MRR, ein Plattform- oder Bildungspilot läuft. Monat 18 ist Gate 2: 50.000 Nutzer, 2.000 Pro, 22.586 € MRR, fünf zahlende Schulen oder Kurse für WortBild. Das ist die Grundlage für die Seed-Runde. Alles das sind Ziele – erreicht ist davon noch nichts.</a:t>
+            </a:r>
+            <a:endParaRPr lang="en-US" dirty="0"/>
+          </a:p>
+        </p:txBody>
+      </p:sp>
+      <p:sp>
+        <p:nvSpPr>
+          <p:cNvPr id="4" name="Slide Number Placeholder 3"/>
+          <p:cNvSpPr>
+            <a:spLocks noGrp="1"/>
+          </p:cNvSpPr>
+          <p:nvPr>
+            <p:ph type="sldNum" sz="quarter" idx="10"/>
+          </p:nvPr>
+        </p:nvSpPr>
+        <p:spPr/>
+        <p:txBody>
+          <a:bodyPr/>
+          <a:lstStyle/>
+          <a:p>
+            <a:fld id="{F7021451-1387-4CA6-816F-3879F97B5CBC}" type="slidenum">
+              <a:rPr lang="en-US"/>
+              <a:t>18</a:t>
+            </a:fld>
+            <a:endParaRPr lang="en-US"/>
+          </a:p>
+        </p:txBody>
+      </p:sp>
+    </p:spTree>
+    <p:extLst>
+      <p:ext uri="{BB962C8B-B14F-4D97-AF65-F5344CB8AC3E}">
+        <p14:creationId xmlns:p14="http://schemas.microsoft.com/office/powerpoint/2010/main" val="1024086991"/>
+      </p:ext>
+    </p:extLst>
+  </p:cSld>
+  <p:clrMapOvr>
+    <a:masterClrMapping/>
+  </p:clrMapOvr>
+</p:notes>
+</file>
+
+<file path=ppt/notesSlides/notesSlide19.xml><?xml version="1.0" encoding="utf-8"?>
+<p:notes xmlns:a="http://schemas.openxmlformats.org/drawingml/2006/main" xmlns:r="http://schemas.openxmlformats.org/officeDocument/2006/relationships" xmlns:p="http://schemas.openxmlformats.org/presentationml/2006/main">
+  <p:cSld>
+    <p:spTree>
+      <p:nvGrpSpPr>
+        <p:cNvPr id="1" name=""/>
+        <p:cNvGrpSpPr/>
+        <p:nvPr/>
+      </p:nvGrpSpPr>
+      <p:grpSpPr>
+        <a:xfrm>
+          <a:off x="0" y="0"/>
+          <a:ext cx="0" cy="0"/>
+          <a:chOff x="0" y="0"/>
+          <a:chExt cx="0" cy="0"/>
+        </a:xfrm>
+      </p:grpSpPr>
+      <p:sp>
+        <p:nvSpPr>
+          <p:cNvPr id="2" name="Slide Image Placeholder 1"/>
+          <p:cNvSpPr>
+            <a:spLocks noGrp="1" noRot="1" noChangeAspect="1"/>
+          </p:cNvSpPr>
+          <p:nvPr>
+            <p:ph type="sldImg"/>
+          </p:nvPr>
+        </p:nvSpPr>
+        <p:spPr/>
+      </p:sp>
+      <p:sp>
+        <p:nvSpPr>
+          <p:cNvPr id="3" name="Notes Placeholder 2"/>
+          <p:cNvSpPr>
+            <a:spLocks noGrp="1"/>
+          </p:cNvSpPr>
+          <p:nvPr>
+            <p:ph type="body" idx="1"/>
+          </p:nvPr>
+        </p:nvSpPr>
+        <p:spPr/>
+        <p:txBody>
+          <a:bodyPr/>
+          <a:lstStyle/>
+          <a:p>
+            <a:r>
+              <a:rPr lang="en-US" dirty="0"/>
+              <a:t>Konkret enden: Wir brauchen einen Kontakt im Live-Team und einen 8-Wochen-Pilot mit 20 Creatorn. Wir liefern Overlay, Pakete, Support und die Messung (Watchtime, Gifts, Clips aus Lives). Für WortBild suchen wir einen zweiten Pilot mit Bildungsträgern, Sprachlern-Plattformen oder Verlagen – der erste Verlagsfall ist die eigene Kinderbuchreihe. Zur Runde: 250.000 € Pre-Seed für 18 Monate. Mittelverwendung (Vorschlag): Team und Produkt 125 T€, Markteintritt und Piloten 50 T€, WortBild 37,5 T€, Recht/Marke/Datenschutz 25 T€, Reserve 12,5 T€. Ganz ohne Umsatz reicht das 18 Monate. Unser Angebot: 10 % für die 250.000 € – 2,25 Mio. € Pre-Money, 2,5 Mio. € Post-Money, unter jeder üblichen Referenzmethode – oder ein SAFE mit 2,25 Mio. € Cap und 20 % Discount; Verhandlungsbasis, mit Steuer- und Rechtsberater zu prüfen. Story-Engine, Auto-Edit und VR/AR folgen mit einer Seed-Runde von etwa 350 T€ nach Gate 2. Ansprechpartnerin für Investoren: Gönül Demet. Dieses Deck gibt es auch auf Türkisch und Englisch.</a:t>
+            </a:r>
+            <a:endParaRPr lang="en-US" dirty="0"/>
+          </a:p>
+        </p:txBody>
+      </p:sp>
+      <p:sp>
+        <p:nvSpPr>
+          <p:cNvPr id="4" name="Slide Number Placeholder 3"/>
+          <p:cNvSpPr>
+            <a:spLocks noGrp="1"/>
+          </p:cNvSpPr>
+          <p:nvPr>
+            <p:ph type="sldNum" sz="quarter" idx="10"/>
+          </p:nvPr>
+        </p:nvSpPr>
+        <p:spPr/>
+        <p:txBody>
+          <a:bodyPr/>
+          <a:lstStyle/>
+          <a:p>
+            <a:fld id="{F7021451-1387-4CA6-816F-3879F97B5CBC}" type="slidenum">
+              <a:rPr lang="en-US"/>
+              <a:t>19</a:t>
             </a:fld>
             <a:endParaRPr lang="en-US"/>
           </a:p>
@@ -1996,7 +2176,7 @@
           <a:p>
             <a:r>
               <a:rPr lang="en-US" dirty="0"/>
-              <a:t>Das ist kein Prototyp mehr: Releases von 0.1 bis 2.0, Unit- und End-to-End-Tests, Anleitungen in DE/TR. Version 2.0 war ein Härtungs-Release für Bühne und Verkauf. Zwei Dinge betonen: (1) eigene Sounds und Pakete = keine Copyright-Strikes, (2) die Zuschauer-Trigger sind die Brücke zur Monetarisierung – ein Geschenk kann heute schon einen Effekt auslösen.</a:t>
+              <a:t>Das ist kein Prototyp mehr: Releases von 0.1 bis 2.1, Unit- und End-to-End-Tests, Anleitungen auf Deutsch und Türkisch. Version 2.1 hat das Produkt leichter und sicherer gemacht: Leistungsmodus mit im Mittel 63–69 % weniger Bildzeit, 143 kostenlose Sticker unter MIT-Lizenz, Text-Sticker-Pakete in drei Sprachen und eine sichere GIF-Suche über KLIPY und GIPHY mit Jugendschutz-Filter – Google hat die Tenor-API im Juni 2026 abgeschaltet. Zwei Punkte betonen: (1) eigene Sounds, freie Sticker und verlinkte GIFs heißt keine Copyright-Strikes, (2) Zuschauer-Trigger sind die Brücke zur Monetarisierung – ein Geschenk kann heute schon einen Effekt auslösen.</a:t>
             </a:r>
             <a:endParaRPr lang="en-US" dirty="0"/>
           </a:p>
@@ -2928,7 +3108,7 @@
                 <a:ea typeface="Arial" pitchFamily="34" charset="-122"/>
                 <a:cs typeface="Arial" pitchFamily="34" charset="-120"/>
               </a:rPr>
-              <a:t>LIVE MEME ENGINE  ·  v2.0</a:t>
+              <a:t>LIVE MEME ENGINE  ·  v2.1</a:t>
             </a:r>
             <a:endParaRPr lang="en-US" sz="1100" dirty="0"/>
           </a:p>
@@ -4417,7 +4597,7 @@
                 <a:ea typeface="Arial" pitchFamily="34" charset="-122"/>
                 <a:cs typeface="Arial" pitchFamily="34" charset="-120"/>
               </a:rPr>
-              <a:t>NACH HEBEL SORTIERT</a:t>
+              <a:t>18 MONATE, MIT GATES</a:t>
             </a:r>
             <a:endParaRPr lang="en-US" sz="1000" dirty="0"/>
           </a:p>
@@ -4458,7 +4638,7 @@
                 <a:ea typeface="Arial" pitchFamily="34" charset="-122"/>
                 <a:cs typeface="Arial" pitchFamily="34" charset="-120"/>
               </a:rPr>
-              <a:t>Roadmap</a:t>
+              <a:t>Roadmap: schlank bis Gate 2, dann die Seed-Runde</a:t>
             </a:r>
             <a:endParaRPr lang="en-US" sz="3200" dirty="0"/>
           </a:p>
@@ -4586,7 +4766,7 @@
                 <a:ea typeface="Arial" pitchFamily="34" charset="-122"/>
                 <a:cs typeface="Arial" pitchFamily="34" charset="-120"/>
               </a:rPr>
-              <a:t>Q4 2026</a:t>
+              <a:t>Q1 2027 · Monat 1–3</a:t>
             </a:r>
             <a:endParaRPr lang="en-US" sz="1300" dirty="0"/>
           </a:p>
@@ -4654,7 +4834,7 @@
                 <a:ea typeface="Arial" pitchFamily="34" charset="-122"/>
                 <a:cs typeface="Arial" pitchFamily="34" charset="-120"/>
               </a:rPr>
-              <a:t>Natives Mobile-SDK</a:t>
+              <a:t>Pro-Abo live</a:t>
             </a:r>
             <a:endParaRPr lang="en-US" sz="1600" dirty="0"/>
           </a:p>
@@ -4695,7 +4875,7 @@
                 <a:ea typeface="Arial" pitchFamily="34" charset="-122"/>
                 <a:cs typeface="Arial" pitchFamily="34" charset="-120"/>
               </a:rPr>
-              <a:t>Effekte direkt in der Kamera-App statt nur OBS · Offline-Erkennung stabil · 10 Creator-Tests</a:t>
+              <a:t>Pre-Seed abgeschlossen · Mobile-/Web-Entwickler:in an Bord (Monat 3) · TR-Launch · Gate G0</a:t>
             </a:r>
             <a:endParaRPr lang="en-US" sz="1200" dirty="0"/>
           </a:p>
@@ -4761,7 +4941,7 @@
                 <a:ea typeface="Arial" pitchFamily="34" charset="-122"/>
                 <a:cs typeface="Arial" pitchFamily="34" charset="-120"/>
               </a:rPr>
-              <a:t>Q1 2027</a:t>
+              <a:t>Q2 2027 · Monat 4–6</a:t>
             </a:r>
             <a:endParaRPr lang="en-US" sz="1300" dirty="0"/>
           </a:p>
@@ -4829,7 +5009,7 @@
                 <a:ea typeface="Arial" pitchFamily="34" charset="-122"/>
                 <a:cs typeface="Arial" pitchFamily="34" charset="-120"/>
               </a:rPr>
-              <a:t>Plattform-Integration</a:t>
+              <a:t>Mobile-App/PWA + WortBild</a:t>
             </a:r>
             <a:endParaRPr lang="en-US" sz="1600" dirty="0"/>
           </a:p>
@@ -4870,7 +5050,7 @@
                 <a:ea typeface="Arial" pitchFamily="34" charset="-122"/>
                 <a:cs typeface="Arial" pitchFamily="34" charset="-120"/>
               </a:rPr>
-              <a:t>TikTok LIVE Studio Plug-in / Instagram Live Producer · Installer · Marktplatz-Beta · Highlights finden</a:t>
+              <a:t>WortBild mit 300 Wörtern und Lesehilfe · 20 Beta-Creator TR/DE · Gate G1</a:t>
             </a:r>
             <a:endParaRPr lang="en-US" sz="1200" dirty="0"/>
           </a:p>
@@ -4936,7 +5116,7 @@
                 <a:ea typeface="Arial" pitchFamily="34" charset="-122"/>
                 <a:cs typeface="Arial" pitchFamily="34" charset="-120"/>
               </a:rPr>
-              <a:t>Q2 2027</a:t>
+              <a:t>Q3–Q4 2027 · Monat 7–12</a:t>
             </a:r>
             <a:endParaRPr lang="en-US" sz="1300" dirty="0"/>
           </a:p>
@@ -5004,7 +5184,7 @@
                 <a:ea typeface="Arial" pitchFamily="34" charset="-122"/>
                 <a:cs typeface="Arial" pitchFamily="34" charset="-120"/>
               </a:rPr>
-              <a:t>KI-Verstehen v2</a:t>
+              <a:t>DE/EN + Piloten</a:t>
             </a:r>
             <a:endParaRPr lang="en-US" sz="1600" dirty="0"/>
           </a:p>
@@ -5045,7 +5225,7 @@
                 <a:ea typeface="Arial" pitchFamily="34" charset="-122"/>
                 <a:cs typeface="Arial" pitchFamily="34" charset="-120"/>
               </a:rPr>
-              <a:t>Stimmung, Kontext, Ironie · Multi-Trigger pro Satz · Pro-Abo · Live-Commerce-Trigger</a:t>
+              <a:t>DE/EN-Launch · Marktplätze · Agentur-Lizenz · Plattform- oder Bildungspilot · Gate G2a</a:t>
             </a:r>
             <a:endParaRPr lang="en-US" sz="1200" dirty="0"/>
           </a:p>
@@ -5111,7 +5291,7 @@
                 <a:ea typeface="Arial" pitchFamily="34" charset="-122"/>
                 <a:cs typeface="Arial" pitchFamily="34" charset="-120"/>
               </a:rPr>
-              <a:t>Q3–Q4 2027</a:t>
+              <a:t>H1 2028 · Monat 13–18</a:t>
             </a:r>
             <a:endParaRPr lang="en-US" sz="1300" dirty="0"/>
           </a:p>
@@ -5179,7 +5359,7 @@
                 <a:ea typeface="Arial" pitchFamily="34" charset="-122"/>
                 <a:cs typeface="Arial" pitchFamily="34" charset="-120"/>
               </a:rPr>
-              <a:t>Story-Engine</a:t>
+              <a:t>Gate 2 → Seed-Runde</a:t>
             </a:r>
             <a:endParaRPr lang="en-US" sz="1600" dirty="0"/>
           </a:p>
@@ -5220,7 +5400,7 @@
                 <a:ea typeface="Arial" pitchFamily="34" charset="-122"/>
                 <a:cs typeface="Arial" pitchFamily="34" charset="-120"/>
               </a:rPr>
-              <a:t>Ganze Geschichten als Szenenfolge · prozedural gezeichnete Szenen (Erzählfilm) · zuschauer-gestiftete Effekte · Plattform-Pilot</a:t>
+              <a:t>WortBild-Pilot ausgewertet · Seed-Runde ~350 T€ · ab Monat 19: Story-Engine, Studio, Räume, Ausbau-Team</a:t>
             </a:r>
             <a:endParaRPr lang="en-US" sz="1200" dirty="0"/>
           </a:p>
@@ -5261,7 +5441,7 @@
                 <a:ea typeface="Arial" pitchFamily="34" charset="-122"/>
                 <a:cs typeface="Arial" pitchFamily="34" charset="-120"/>
               </a:rPr>
-              <a:t>Mobile-SDK löst das größte Problem (Handy-Streamer ohne OBS). Plattform-Integration ist der Ask dieses Decks. KI-Verstehen und Story-Engine sind die technische Differenzierung – und der Einstieg in die Vision 2027–2029.</a:t>
+              <a:t>Schlank bis Monat 18: eine Entwickler:in, Pro-Abo, Mobile-App/PWA, WortBild. Story-Engine (Erzählfilm), Auto-Edit (Studio) und VR/AR (Räume) werden aus der Folgerunde nach Gate 2 finanziert.</a:t>
             </a:r>
             <a:endParaRPr lang="en-US" sz="1200" dirty="0"/>
           </a:p>
@@ -13258,7 +13438,7 @@
                 <a:ea typeface="Arial" pitchFamily="34" charset="-122"/>
                 <a:cs typeface="Arial" pitchFamily="34" charset="-120"/>
               </a:rPr>
-              <a:t>2027</a:t>
+              <a:t>Folgerunde</a:t>
             </a:r>
             <a:endParaRPr lang="en-US" sz="950" dirty="0"/>
           </a:p>
@@ -13367,7 +13547,7 @@
                 <a:ea typeface="Arial" pitchFamily="34" charset="-122"/>
                 <a:cs typeface="Arial" pitchFamily="34" charset="-120"/>
               </a:rPr>
-              <a:t>2027</a:t>
+              <a:t>Folgerunde</a:t>
             </a:r>
             <a:endParaRPr lang="en-US" sz="950" dirty="0"/>
           </a:p>
@@ -13476,7 +13656,7 @@
                 <a:ea typeface="Arial" pitchFamily="34" charset="-122"/>
                 <a:cs typeface="Arial" pitchFamily="34" charset="-120"/>
               </a:rPr>
-              <a:t>Vision 2028</a:t>
+              <a:t>Vision 2029</a:t>
             </a:r>
             <a:endParaRPr lang="en-US" sz="950" dirty="0"/>
           </a:p>
@@ -13585,7 +13765,7 @@
                 <a:ea typeface="Arial" pitchFamily="34" charset="-122"/>
                 <a:cs typeface="Arial" pitchFamily="34" charset="-120"/>
               </a:rPr>
-              <a:t>Vision 2028</a:t>
+              <a:t>Vision 2029</a:t>
             </a:r>
             <a:endParaRPr lang="en-US" sz="950" dirty="0"/>
           </a:p>
@@ -15445,7 +15625,7 @@
                 <a:ea typeface="Arial" pitchFamily="34" charset="-122"/>
                 <a:cs typeface="Arial" pitchFamily="34" charset="-120"/>
               </a:rPr>
-              <a:t>[Position offen] – Tech-Lead</a:t>
+              <a:t>[Position offen] – Mobile-/Web-Entwickler:in</a:t>
             </a:r>
             <a:endParaRPr lang="en-US" sz="1500" dirty="0"/>
           </a:p>
@@ -15486,7 +15666,7 @@
                 <a:ea typeface="Arial" pitchFamily="34" charset="-122"/>
                 <a:cs typeface="Arial" pitchFamily="34" charset="-120"/>
               </a:rPr>
-              <a:t>Audio / Realtime, Mobile-SDK, Canvas/WebGPU</a:t>
+              <a:t>Erste Einstellung aus dem Pre-Seed (Monat 3): iOS/Android, PWA, später SDK</a:t>
             </a:r>
             <a:endParaRPr lang="en-US" sz="1200" dirty="0"/>
           </a:p>
@@ -15659,7 +15839,7 @@
                 <a:ea typeface="Arial" pitchFamily="34" charset="-122"/>
                 <a:cs typeface="Arial" pitchFamily="34" charset="-120"/>
               </a:rPr>
-              <a:t>Growth TR + DACH, Creator-Programm, Bildungsvertrieb</a:t>
+              <a:t>Growth TR + DACH, Creator-Programm, Bildungsvertrieb – mit der Seed-Runde</a:t>
             </a:r>
             <a:endParaRPr lang="en-US" sz="1200" dirty="0"/>
           </a:p>
@@ -15870,6 +16050,5010 @@
           <a:chExt cx="0" cy="0"/>
         </a:xfrm>
       </p:grpSpPr>
+      <p:sp>
+        <p:nvSpPr>
+          <p:cNvPr id="2" name="Kicker"/>
+          <p:cNvSpPr txBox="1"/>
+          <p:nvPr/>
+        </p:nvSpPr>
+        <p:spPr>
+          <a:xfrm>
+            <a:off x="548640" y="182880"/>
+            <a:ext cx="8229600" cy="237744"/>
+          </a:xfrm>
+          <a:prstGeom prst="rect">
+            <a:avLst/>
+          </a:prstGeom>
+          <a:noFill/>
+          <a:ln/>
+        </p:spPr>
+        <p:txBody>
+          <a:bodyPr wrap="square" lIns="0" tIns="0" rIns="0" bIns="0" rtlCol="0" anchor="ctr"/>
+          <a:lstStyle/>
+          <a:p>
+            <a:pPr indent="0" marL="0">
+              <a:buNone/>
+            </a:pPr>
+            <a:r>
+              <a:rPr lang="en-US" sz="1000" b="1" spc="300" kern="0" dirty="0">
+                <a:solidFill>
+                  <a:srgbClr val="FFD166"/>
+                </a:solidFill>
+                <a:latin typeface="Arial" pitchFamily="34" charset="0"/>
+                <a:ea typeface="Arial" pitchFamily="34" charset="-122"/>
+                <a:cs typeface="Arial" pitchFamily="34" charset="-120"/>
+              </a:rPr>
+              <a:t>FINANZEN &amp; BEWERTUNG · SCHÄTZUNG</a:t>
+            </a:r>
+            <a:endParaRPr lang="en-US" sz="1000" dirty="0"/>
+          </a:p>
+        </p:txBody>
+      </p:sp>
+      <p:sp>
+        <p:nvSpPr>
+          <p:cNvPr id="3" name="Titel"/>
+          <p:cNvSpPr txBox="1"/>
+          <p:nvPr/>
+        </p:nvSpPr>
+        <p:spPr>
+          <a:xfrm>
+            <a:off x="548640" y="438912"/>
+            <a:ext cx="11094415" cy="777240"/>
+          </a:xfrm>
+          <a:prstGeom prst="rect">
+            <a:avLst/>
+          </a:prstGeom>
+          <a:noFill/>
+          <a:ln/>
+        </p:spPr>
+        <p:txBody>
+          <a:bodyPr wrap="square" lIns="0" tIns="0" rIns="0" bIns="0" rtlCol="0" anchor="t">
+            <a:normAutofit/>
+          </a:bodyPr>
+          <a:lstStyle/>
+          <a:p>
+            <a:pPr indent="0" marL="0">
+              <a:buNone/>
+            </a:pPr>
+            <a:r>
+              <a:rPr lang="en-US" sz="3200" b="1" dirty="0">
+                <a:solidFill>
+                  <a:srgbClr val="FFFFFF"/>
+                </a:solidFill>
+                <a:latin typeface="Arial" pitchFamily="34" charset="0"/>
+                <a:ea typeface="Arial" pitchFamily="34" charset="-122"/>
+                <a:cs typeface="Arial" pitchFamily="34" charset="-120"/>
+              </a:rPr>
+              <a:t>250 T€ für 18 Monate – dann die Seed-Runde</a:t>
+            </a:r>
+            <a:endParaRPr lang="en-US" sz="3200" dirty="0"/>
+          </a:p>
+        </p:txBody>
+      </p:sp>
+      <p:sp>
+        <p:nvSpPr>
+          <p:cNvPr id="4" name="Fuß"/>
+          <p:cNvSpPr txBox="1"/>
+          <p:nvPr/>
+        </p:nvSpPr>
+        <p:spPr>
+          <a:xfrm>
+            <a:off x="7071055" y="6473952"/>
+            <a:ext cx="4572000" cy="228600"/>
+          </a:xfrm>
+          <a:prstGeom prst="rect">
+            <a:avLst/>
+          </a:prstGeom>
+          <a:noFill/>
+          <a:ln/>
+        </p:spPr>
+        <p:txBody>
+          <a:bodyPr wrap="square" lIns="0" tIns="0" rIns="0" bIns="0" rtlCol="0" anchor="ctr"/>
+          <a:lstStyle/>
+          <a:p>
+            <a:pPr algn="r" indent="0" marL="0">
+              <a:buNone/>
+            </a:pPr>
+            <a:r>
+              <a:rPr lang="en-US" sz="900" dirty="0">
+                <a:solidFill>
+                  <a:srgbClr val="6B7280"/>
+                </a:solidFill>
+                <a:latin typeface="Arial" pitchFamily="34" charset="0"/>
+                <a:ea typeface="Arial" pitchFamily="34" charset="-122"/>
+                <a:cs typeface="Arial" pitchFamily="34" charset="-120"/>
+              </a:rPr>
+              <a:t>Vertraulich · Oktober 2026  ·  LiveFX  ·  17</a:t>
+            </a:r>
+            <a:endParaRPr lang="en-US" sz="900" dirty="0"/>
+          </a:p>
+        </p:txBody>
+      </p:sp>
+      <p:sp>
+        <p:nvSpPr>
+          <p:cNvPr id="6" name="Text 3"/>
+          <p:cNvSpPr txBox="1"/>
+          <p:nvPr/>
+        </p:nvSpPr>
+        <p:spPr>
+          <a:xfrm>
+            <a:off x="548640" y="1298448"/>
+            <a:ext cx="6583680" cy="292608"/>
+          </a:xfrm>
+          <a:prstGeom prst="rect">
+            <a:avLst/>
+          </a:prstGeom>
+          <a:noFill/>
+          <a:ln/>
+        </p:spPr>
+        <p:txBody>
+          <a:bodyPr wrap="square" lIns="0" tIns="0" rIns="0" bIns="0" rtlCol="0" anchor="t">
+            <a:normAutofit/>
+          </a:bodyPr>
+          <a:lstStyle/>
+          <a:p>
+            <a:pPr indent="0" marL="0">
+              <a:buNone/>
+            </a:pPr>
+            <a:r>
+              <a:rPr lang="en-US" sz="1300" b="1" dirty="0">
+                <a:solidFill>
+                  <a:srgbClr val="FFD166"/>
+                </a:solidFill>
+                <a:latin typeface="Arial" pitchFamily="34" charset="0"/>
+                <a:ea typeface="Arial" pitchFamily="34" charset="-122"/>
+                <a:cs typeface="Arial" pitchFamily="34" charset="-120"/>
+              </a:rPr>
+              <a:t>GuV 5 Jahre, Basis-Szenario (T€)</a:t>
+            </a:r>
+            <a:endParaRPr lang="en-US" sz="1300" dirty="0"/>
+          </a:p>
+        </p:txBody>
+      </p:sp>
+      <p:graphicFrame>
+        <p:nvGraphicFramePr>
+          <p:cNvPr id="18" name="Table 0"/>
+          <p:cNvGraphicFramePr>
+            <a:graphicFrameLocks noGrp="1"/>
+          </p:cNvGraphicFramePr>
+          <p:nvPr>
+            <p:extLst>
+              <p:ext uri="{D42A27DB-BD31-4B8C-83A1-F6EECF244321}">
+                <p14:modId xmlns:p14="http://schemas.microsoft.com/office/powerpoint/2010/main" val="1579011935"/>
+              </p:ext>
+            </p:extLst>
+          </p:nvPr>
+        </p:nvGraphicFramePr>
+        <p:xfrm>
+          <a:off x="548640" y="1645920"/>
+          <a:ext cx="6583680" cy="914400"/>
+        </p:xfrm>
+        <a:graphic>
+          <a:graphicData uri="http://schemas.openxmlformats.org/drawingml/2006/table">
+            <a:tbl>
+              <a:tblPr/>
+              <a:tblGrid>
+                <a:gridCol w="1600200"/>
+                <a:gridCol w="996696"/>
+                <a:gridCol w="996696"/>
+                <a:gridCol w="996696"/>
+                <a:gridCol w="996696"/>
+                <a:gridCol w="996696"/>
+              </a:tblGrid>
+              <a:tr h="365760">
+                <a:tc>
+                  <a:txBody>
+                    <a:bodyPr/>
+                    <a:lstStyle/>
+                    <a:p>
+                      <a:pPr algn="l" indent="0" marL="0">
+                        <a:buNone/>
+                      </a:pPr>
+                      <a:r>
+                        <a:rPr lang="en-US" sz="1200" b="1" dirty="0">
+                          <a:solidFill>
+                            <a:srgbClr val="FFD166"/>
+                          </a:solidFill>
+                          <a:latin typeface="Arial" pitchFamily="34" charset="0"/>
+                          <a:ea typeface="Arial" pitchFamily="34" charset="-122"/>
+                          <a:cs typeface="Arial" pitchFamily="34" charset="-120"/>
+                        </a:rPr>
+                        <a:t>T€</a:t>
+                      </a:r>
+                      <a:endParaRPr lang="en-US" sz="1200" dirty="0">
+                        <a:latin typeface="Arial" charset="0"/>
+                        <a:ea typeface="Arial" charset="0"/>
+                        <a:cs typeface="Arial" charset="0"/>
+                      </a:endParaRPr>
+                    </a:p>
+                  </a:txBody>
+                  <a:tcPr marL="91440" marR="91440" marT="0" marB="0" anchor="ctr">
+                    <a:lnL w="12700" cap="flat" cmpd="sng" algn="ctr">
+                      <a:solidFill>
+                        <a:srgbClr val="0F1115"/>
+                      </a:solidFill>
+                      <a:prstDash val="solid"/>
+                      <a:round/>
+                      <a:headEnd type="none" w="med" len="med"/>
+                      <a:tailEnd type="none" w="med" len="med"/>
+                    </a:lnL>
+                    <a:lnR w="12700" cap="flat" cmpd="sng" algn="ctr">
+                      <a:solidFill>
+                        <a:srgbClr val="0F1115"/>
+                      </a:solidFill>
+                      <a:prstDash val="solid"/>
+                      <a:round/>
+                      <a:headEnd type="none" w="med" len="med"/>
+                      <a:tailEnd type="none" w="med" len="med"/>
+                    </a:lnR>
+                    <a:lnT w="12700" cap="flat" cmpd="sng" algn="ctr">
+                      <a:solidFill>
+                        <a:srgbClr val="0F1115"/>
+                      </a:solidFill>
+                      <a:prstDash val="solid"/>
+                      <a:round/>
+                      <a:headEnd type="none" w="med" len="med"/>
+                      <a:tailEnd type="none" w="med" len="med"/>
+                    </a:lnT>
+                    <a:lnB w="12700" cap="flat" cmpd="sng" algn="ctr">
+                      <a:solidFill>
+                        <a:srgbClr val="0F1115"/>
+                      </a:solidFill>
+                      <a:prstDash val="solid"/>
+                      <a:round/>
+                      <a:headEnd type="none" w="med" len="med"/>
+                      <a:tailEnd type="none" w="med" len="med"/>
+                    </a:lnB>
+                    <a:solidFill>
+                      <a:srgbClr val="1F2330"/>
+                    </a:solidFill>
+                  </a:tcPr>
+                </a:tc>
+                <a:tc>
+                  <a:txBody>
+                    <a:bodyPr/>
+                    <a:lstStyle/>
+                    <a:p>
+                      <a:pPr algn="r" indent="0" marL="0">
+                        <a:buNone/>
+                      </a:pPr>
+                      <a:r>
+                        <a:rPr lang="en-US" sz="1200" b="1" dirty="0">
+                          <a:solidFill>
+                            <a:srgbClr val="FFD166"/>
+                          </a:solidFill>
+                          <a:latin typeface="Arial" pitchFamily="34" charset="0"/>
+                          <a:ea typeface="Arial" pitchFamily="34" charset="-122"/>
+                          <a:cs typeface="Arial" pitchFamily="34" charset="-120"/>
+                        </a:rPr>
+                        <a:t>2027</a:t>
+                      </a:r>
+                      <a:endParaRPr lang="en-US" sz="1200" dirty="0">
+                        <a:latin typeface="Arial" charset="0"/>
+                        <a:ea typeface="Arial" charset="0"/>
+                        <a:cs typeface="Arial" charset="0"/>
+                      </a:endParaRPr>
+                    </a:p>
+                  </a:txBody>
+                  <a:tcPr marL="91440" marR="91440" marT="0" marB="0" anchor="ctr">
+                    <a:lnL w="12700" cap="flat" cmpd="sng" algn="ctr">
+                      <a:solidFill>
+                        <a:srgbClr val="0F1115"/>
+                      </a:solidFill>
+                      <a:prstDash val="solid"/>
+                      <a:round/>
+                      <a:headEnd type="none" w="med" len="med"/>
+                      <a:tailEnd type="none" w="med" len="med"/>
+                    </a:lnL>
+                    <a:lnR w="12700" cap="flat" cmpd="sng" algn="ctr">
+                      <a:solidFill>
+                        <a:srgbClr val="0F1115"/>
+                      </a:solidFill>
+                      <a:prstDash val="solid"/>
+                      <a:round/>
+                      <a:headEnd type="none" w="med" len="med"/>
+                      <a:tailEnd type="none" w="med" len="med"/>
+                    </a:lnR>
+                    <a:lnT w="12700" cap="flat" cmpd="sng" algn="ctr">
+                      <a:solidFill>
+                        <a:srgbClr val="0F1115"/>
+                      </a:solidFill>
+                      <a:prstDash val="solid"/>
+                      <a:round/>
+                      <a:headEnd type="none" w="med" len="med"/>
+                      <a:tailEnd type="none" w="med" len="med"/>
+                    </a:lnT>
+                    <a:lnB w="12700" cap="flat" cmpd="sng" algn="ctr">
+                      <a:solidFill>
+                        <a:srgbClr val="0F1115"/>
+                      </a:solidFill>
+                      <a:prstDash val="solid"/>
+                      <a:round/>
+                      <a:headEnd type="none" w="med" len="med"/>
+                      <a:tailEnd type="none" w="med" len="med"/>
+                    </a:lnB>
+                    <a:solidFill>
+                      <a:srgbClr val="1F2330"/>
+                    </a:solidFill>
+                  </a:tcPr>
+                </a:tc>
+                <a:tc>
+                  <a:txBody>
+                    <a:bodyPr/>
+                    <a:lstStyle/>
+                    <a:p>
+                      <a:pPr algn="r" indent="0" marL="0">
+                        <a:buNone/>
+                      </a:pPr>
+                      <a:r>
+                        <a:rPr lang="en-US" sz="1200" b="1" dirty="0">
+                          <a:solidFill>
+                            <a:srgbClr val="FFD166"/>
+                          </a:solidFill>
+                          <a:latin typeface="Arial" pitchFamily="34" charset="0"/>
+                          <a:ea typeface="Arial" pitchFamily="34" charset="-122"/>
+                          <a:cs typeface="Arial" pitchFamily="34" charset="-120"/>
+                        </a:rPr>
+                        <a:t>2028</a:t>
+                      </a:r>
+                      <a:endParaRPr lang="en-US" sz="1200" dirty="0">
+                        <a:latin typeface="Arial" charset="0"/>
+                        <a:ea typeface="Arial" charset="0"/>
+                        <a:cs typeface="Arial" charset="0"/>
+                      </a:endParaRPr>
+                    </a:p>
+                  </a:txBody>
+                  <a:tcPr marL="91440" marR="91440" marT="0" marB="0" anchor="ctr">
+                    <a:lnL w="12700" cap="flat" cmpd="sng" algn="ctr">
+                      <a:solidFill>
+                        <a:srgbClr val="0F1115"/>
+                      </a:solidFill>
+                      <a:prstDash val="solid"/>
+                      <a:round/>
+                      <a:headEnd type="none" w="med" len="med"/>
+                      <a:tailEnd type="none" w="med" len="med"/>
+                    </a:lnL>
+                    <a:lnR w="12700" cap="flat" cmpd="sng" algn="ctr">
+                      <a:solidFill>
+                        <a:srgbClr val="0F1115"/>
+                      </a:solidFill>
+                      <a:prstDash val="solid"/>
+                      <a:round/>
+                      <a:headEnd type="none" w="med" len="med"/>
+                      <a:tailEnd type="none" w="med" len="med"/>
+                    </a:lnR>
+                    <a:lnT w="12700" cap="flat" cmpd="sng" algn="ctr">
+                      <a:solidFill>
+                        <a:srgbClr val="0F1115"/>
+                      </a:solidFill>
+                      <a:prstDash val="solid"/>
+                      <a:round/>
+                      <a:headEnd type="none" w="med" len="med"/>
+                      <a:tailEnd type="none" w="med" len="med"/>
+                    </a:lnT>
+                    <a:lnB w="12700" cap="flat" cmpd="sng" algn="ctr">
+                      <a:solidFill>
+                        <a:srgbClr val="0F1115"/>
+                      </a:solidFill>
+                      <a:prstDash val="solid"/>
+                      <a:round/>
+                      <a:headEnd type="none" w="med" len="med"/>
+                      <a:tailEnd type="none" w="med" len="med"/>
+                    </a:lnB>
+                    <a:solidFill>
+                      <a:srgbClr val="1F2330"/>
+                    </a:solidFill>
+                  </a:tcPr>
+                </a:tc>
+                <a:tc>
+                  <a:txBody>
+                    <a:bodyPr/>
+                    <a:lstStyle/>
+                    <a:p>
+                      <a:pPr algn="r" indent="0" marL="0">
+                        <a:buNone/>
+                      </a:pPr>
+                      <a:r>
+                        <a:rPr lang="en-US" sz="1200" b="1" dirty="0">
+                          <a:solidFill>
+                            <a:srgbClr val="FFD166"/>
+                          </a:solidFill>
+                          <a:latin typeface="Arial" pitchFamily="34" charset="0"/>
+                          <a:ea typeface="Arial" pitchFamily="34" charset="-122"/>
+                          <a:cs typeface="Arial" pitchFamily="34" charset="-120"/>
+                        </a:rPr>
+                        <a:t>2029</a:t>
+                      </a:r>
+                      <a:endParaRPr lang="en-US" sz="1200" dirty="0">
+                        <a:latin typeface="Arial" charset="0"/>
+                        <a:ea typeface="Arial" charset="0"/>
+                        <a:cs typeface="Arial" charset="0"/>
+                      </a:endParaRPr>
+                    </a:p>
+                  </a:txBody>
+                  <a:tcPr marL="91440" marR="91440" marT="0" marB="0" anchor="ctr">
+                    <a:lnL w="12700" cap="flat" cmpd="sng" algn="ctr">
+                      <a:solidFill>
+                        <a:srgbClr val="0F1115"/>
+                      </a:solidFill>
+                      <a:prstDash val="solid"/>
+                      <a:round/>
+                      <a:headEnd type="none" w="med" len="med"/>
+                      <a:tailEnd type="none" w="med" len="med"/>
+                    </a:lnL>
+                    <a:lnR w="12700" cap="flat" cmpd="sng" algn="ctr">
+                      <a:solidFill>
+                        <a:srgbClr val="0F1115"/>
+                      </a:solidFill>
+                      <a:prstDash val="solid"/>
+                      <a:round/>
+                      <a:headEnd type="none" w="med" len="med"/>
+                      <a:tailEnd type="none" w="med" len="med"/>
+                    </a:lnR>
+                    <a:lnT w="12700" cap="flat" cmpd="sng" algn="ctr">
+                      <a:solidFill>
+                        <a:srgbClr val="0F1115"/>
+                      </a:solidFill>
+                      <a:prstDash val="solid"/>
+                      <a:round/>
+                      <a:headEnd type="none" w="med" len="med"/>
+                      <a:tailEnd type="none" w="med" len="med"/>
+                    </a:lnT>
+                    <a:lnB w="12700" cap="flat" cmpd="sng" algn="ctr">
+                      <a:solidFill>
+                        <a:srgbClr val="0F1115"/>
+                      </a:solidFill>
+                      <a:prstDash val="solid"/>
+                      <a:round/>
+                      <a:headEnd type="none" w="med" len="med"/>
+                      <a:tailEnd type="none" w="med" len="med"/>
+                    </a:lnB>
+                    <a:solidFill>
+                      <a:srgbClr val="1F2330"/>
+                    </a:solidFill>
+                  </a:tcPr>
+                </a:tc>
+                <a:tc>
+                  <a:txBody>
+                    <a:bodyPr/>
+                    <a:lstStyle/>
+                    <a:p>
+                      <a:pPr algn="r" indent="0" marL="0">
+                        <a:buNone/>
+                      </a:pPr>
+                      <a:r>
+                        <a:rPr lang="en-US" sz="1200" b="1" dirty="0">
+                          <a:solidFill>
+                            <a:srgbClr val="FFD166"/>
+                          </a:solidFill>
+                          <a:latin typeface="Arial" pitchFamily="34" charset="0"/>
+                          <a:ea typeface="Arial" pitchFamily="34" charset="-122"/>
+                          <a:cs typeface="Arial" pitchFamily="34" charset="-120"/>
+                        </a:rPr>
+                        <a:t>2030</a:t>
+                      </a:r>
+                      <a:endParaRPr lang="en-US" sz="1200" dirty="0">
+                        <a:latin typeface="Arial" charset="0"/>
+                        <a:ea typeface="Arial" charset="0"/>
+                        <a:cs typeface="Arial" charset="0"/>
+                      </a:endParaRPr>
+                    </a:p>
+                  </a:txBody>
+                  <a:tcPr marL="91440" marR="91440" marT="0" marB="0" anchor="ctr">
+                    <a:lnL w="12700" cap="flat" cmpd="sng" algn="ctr">
+                      <a:solidFill>
+                        <a:srgbClr val="0F1115"/>
+                      </a:solidFill>
+                      <a:prstDash val="solid"/>
+                      <a:round/>
+                      <a:headEnd type="none" w="med" len="med"/>
+                      <a:tailEnd type="none" w="med" len="med"/>
+                    </a:lnL>
+                    <a:lnR w="12700" cap="flat" cmpd="sng" algn="ctr">
+                      <a:solidFill>
+                        <a:srgbClr val="0F1115"/>
+                      </a:solidFill>
+                      <a:prstDash val="solid"/>
+                      <a:round/>
+                      <a:headEnd type="none" w="med" len="med"/>
+                      <a:tailEnd type="none" w="med" len="med"/>
+                    </a:lnR>
+                    <a:lnT w="12700" cap="flat" cmpd="sng" algn="ctr">
+                      <a:solidFill>
+                        <a:srgbClr val="0F1115"/>
+                      </a:solidFill>
+                      <a:prstDash val="solid"/>
+                      <a:round/>
+                      <a:headEnd type="none" w="med" len="med"/>
+                      <a:tailEnd type="none" w="med" len="med"/>
+                    </a:lnT>
+                    <a:lnB w="12700" cap="flat" cmpd="sng" algn="ctr">
+                      <a:solidFill>
+                        <a:srgbClr val="0F1115"/>
+                      </a:solidFill>
+                      <a:prstDash val="solid"/>
+                      <a:round/>
+                      <a:headEnd type="none" w="med" len="med"/>
+                      <a:tailEnd type="none" w="med" len="med"/>
+                    </a:lnB>
+                    <a:solidFill>
+                      <a:srgbClr val="1F2330"/>
+                    </a:solidFill>
+                  </a:tcPr>
+                </a:tc>
+                <a:tc>
+                  <a:txBody>
+                    <a:bodyPr/>
+                    <a:lstStyle/>
+                    <a:p>
+                      <a:pPr algn="r" indent="0" marL="0">
+                        <a:buNone/>
+                      </a:pPr>
+                      <a:r>
+                        <a:rPr lang="en-US" sz="1200" b="1" dirty="0">
+                          <a:solidFill>
+                            <a:srgbClr val="FFD166"/>
+                          </a:solidFill>
+                          <a:latin typeface="Arial" pitchFamily="34" charset="0"/>
+                          <a:ea typeface="Arial" pitchFamily="34" charset="-122"/>
+                          <a:cs typeface="Arial" pitchFamily="34" charset="-120"/>
+                        </a:rPr>
+                        <a:t>2031</a:t>
+                      </a:r>
+                      <a:endParaRPr lang="en-US" sz="1200" dirty="0">
+                        <a:latin typeface="Arial" charset="0"/>
+                        <a:ea typeface="Arial" charset="0"/>
+                        <a:cs typeface="Arial" charset="0"/>
+                      </a:endParaRPr>
+                    </a:p>
+                  </a:txBody>
+                  <a:tcPr marL="91440" marR="91440" marT="0" marB="0" anchor="ctr">
+                    <a:lnL w="12700" cap="flat" cmpd="sng" algn="ctr">
+                      <a:solidFill>
+                        <a:srgbClr val="0F1115"/>
+                      </a:solidFill>
+                      <a:prstDash val="solid"/>
+                      <a:round/>
+                      <a:headEnd type="none" w="med" len="med"/>
+                      <a:tailEnd type="none" w="med" len="med"/>
+                    </a:lnL>
+                    <a:lnR w="12700" cap="flat" cmpd="sng" algn="ctr">
+                      <a:solidFill>
+                        <a:srgbClr val="0F1115"/>
+                      </a:solidFill>
+                      <a:prstDash val="solid"/>
+                      <a:round/>
+                      <a:headEnd type="none" w="med" len="med"/>
+                      <a:tailEnd type="none" w="med" len="med"/>
+                    </a:lnR>
+                    <a:lnT w="12700" cap="flat" cmpd="sng" algn="ctr">
+                      <a:solidFill>
+                        <a:srgbClr val="0F1115"/>
+                      </a:solidFill>
+                      <a:prstDash val="solid"/>
+                      <a:round/>
+                      <a:headEnd type="none" w="med" len="med"/>
+                      <a:tailEnd type="none" w="med" len="med"/>
+                    </a:lnT>
+                    <a:lnB w="12700" cap="flat" cmpd="sng" algn="ctr">
+                      <a:solidFill>
+                        <a:srgbClr val="0F1115"/>
+                      </a:solidFill>
+                      <a:prstDash val="solid"/>
+                      <a:round/>
+                      <a:headEnd type="none" w="med" len="med"/>
+                      <a:tailEnd type="none" w="med" len="med"/>
+                    </a:lnB>
+                    <a:solidFill>
+                      <a:srgbClr val="1F2330"/>
+                    </a:solidFill>
+                  </a:tcPr>
+                </a:tc>
+              </a:tr>
+              <a:tr h="365760">
+                <a:tc>
+                  <a:txBody>
+                    <a:bodyPr/>
+                    <a:lstStyle/>
+                    <a:p>
+                      <a:pPr algn="l" indent="0" marL="0">
+                        <a:buNone/>
+                      </a:pPr>
+                      <a:r>
+                        <a:rPr lang="en-US" sz="1200" b="1" dirty="0">
+                          <a:solidFill>
+                            <a:srgbClr val="9AA3B5"/>
+                          </a:solidFill>
+                          <a:latin typeface="Arial" pitchFamily="34" charset="0"/>
+                          <a:ea typeface="Arial" pitchFamily="34" charset="-122"/>
+                          <a:cs typeface="Arial" pitchFamily="34" charset="-120"/>
+                        </a:rPr>
+                        <a:t>Umsatz</a:t>
+                      </a:r>
+                      <a:endParaRPr lang="en-US" sz="1200" dirty="0">
+                        <a:latin typeface="Arial" charset="0"/>
+                        <a:ea typeface="Arial" charset="0"/>
+                        <a:cs typeface="Arial" charset="0"/>
+                      </a:endParaRPr>
+                    </a:p>
+                  </a:txBody>
+                  <a:tcPr marL="91440" marR="91440" marT="0" marB="0" anchor="ctr">
+                    <a:lnL w="12700" cap="flat" cmpd="sng" algn="ctr">
+                      <a:solidFill>
+                        <a:srgbClr val="0F1115"/>
+                      </a:solidFill>
+                      <a:prstDash val="solid"/>
+                      <a:round/>
+                      <a:headEnd type="none" w="med" len="med"/>
+                      <a:tailEnd type="none" w="med" len="med"/>
+                    </a:lnL>
+                    <a:lnR w="12700" cap="flat" cmpd="sng" algn="ctr">
+                      <a:solidFill>
+                        <a:srgbClr val="0F1115"/>
+                      </a:solidFill>
+                      <a:prstDash val="solid"/>
+                      <a:round/>
+                      <a:headEnd type="none" w="med" len="med"/>
+                      <a:tailEnd type="none" w="med" len="med"/>
+                    </a:lnR>
+                    <a:lnT w="12700" cap="flat" cmpd="sng" algn="ctr">
+                      <a:solidFill>
+                        <a:srgbClr val="0F1115"/>
+                      </a:solidFill>
+                      <a:prstDash val="solid"/>
+                      <a:round/>
+                      <a:headEnd type="none" w="med" len="med"/>
+                      <a:tailEnd type="none" w="med" len="med"/>
+                    </a:lnT>
+                    <a:lnB w="12700" cap="flat" cmpd="sng" algn="ctr">
+                      <a:solidFill>
+                        <a:srgbClr val="0F1115"/>
+                      </a:solidFill>
+                      <a:prstDash val="solid"/>
+                      <a:round/>
+                      <a:headEnd type="none" w="med" len="med"/>
+                      <a:tailEnd type="none" w="med" len="med"/>
+                    </a:lnB>
+                    <a:solidFill>
+                      <a:srgbClr val="181B23"/>
+                    </a:solidFill>
+                  </a:tcPr>
+                </a:tc>
+                <a:tc>
+                  <a:txBody>
+                    <a:bodyPr/>
+                    <a:lstStyle/>
+                    <a:p>
+                      <a:pPr algn="r" indent="0" marL="0">
+                        <a:buNone/>
+                      </a:pPr>
+                      <a:r>
+                        <a:rPr lang="en-US" sz="1200" dirty="0">
+                          <a:solidFill>
+                            <a:srgbClr val="FFFFFF"/>
+                          </a:solidFill>
+                          <a:latin typeface="Arial" pitchFamily="34" charset="0"/>
+                          <a:ea typeface="Arial" pitchFamily="34" charset="-122"/>
+                          <a:cs typeface="Arial" pitchFamily="34" charset="-120"/>
+                        </a:rPr>
+                        <a:t>51</a:t>
+                      </a:r>
+                      <a:endParaRPr lang="en-US" sz="1200" dirty="0">
+                        <a:latin typeface="Arial" charset="0"/>
+                        <a:ea typeface="Arial" charset="0"/>
+                        <a:cs typeface="Arial" charset="0"/>
+                      </a:endParaRPr>
+                    </a:p>
+                  </a:txBody>
+                  <a:tcPr marL="91440" marR="91440" marT="0" marB="0" anchor="ctr">
+                    <a:lnL w="12700" cap="flat" cmpd="sng" algn="ctr">
+                      <a:solidFill>
+                        <a:srgbClr val="0F1115"/>
+                      </a:solidFill>
+                      <a:prstDash val="solid"/>
+                      <a:round/>
+                      <a:headEnd type="none" w="med" len="med"/>
+                      <a:tailEnd type="none" w="med" len="med"/>
+                    </a:lnL>
+                    <a:lnR w="12700" cap="flat" cmpd="sng" algn="ctr">
+                      <a:solidFill>
+                        <a:srgbClr val="0F1115"/>
+                      </a:solidFill>
+                      <a:prstDash val="solid"/>
+                      <a:round/>
+                      <a:headEnd type="none" w="med" len="med"/>
+                      <a:tailEnd type="none" w="med" len="med"/>
+                    </a:lnR>
+                    <a:lnT w="12700" cap="flat" cmpd="sng" algn="ctr">
+                      <a:solidFill>
+                        <a:srgbClr val="0F1115"/>
+                      </a:solidFill>
+                      <a:prstDash val="solid"/>
+                      <a:round/>
+                      <a:headEnd type="none" w="med" len="med"/>
+                      <a:tailEnd type="none" w="med" len="med"/>
+                    </a:lnT>
+                    <a:lnB w="12700" cap="flat" cmpd="sng" algn="ctr">
+                      <a:solidFill>
+                        <a:srgbClr val="0F1115"/>
+                      </a:solidFill>
+                      <a:prstDash val="solid"/>
+                      <a:round/>
+                      <a:headEnd type="none" w="med" len="med"/>
+                      <a:tailEnd type="none" w="med" len="med"/>
+                    </a:lnB>
+                    <a:solidFill>
+                      <a:srgbClr val="181B23"/>
+                    </a:solidFill>
+                  </a:tcPr>
+                </a:tc>
+                <a:tc>
+                  <a:txBody>
+                    <a:bodyPr/>
+                    <a:lstStyle/>
+                    <a:p>
+                      <a:pPr algn="r" indent="0" marL="0">
+                        <a:buNone/>
+                      </a:pPr>
+                      <a:r>
+                        <a:rPr lang="en-US" sz="1200" dirty="0">
+                          <a:solidFill>
+                            <a:srgbClr val="FFFFFF"/>
+                          </a:solidFill>
+                          <a:latin typeface="Arial" pitchFamily="34" charset="0"/>
+                          <a:ea typeface="Arial" pitchFamily="34" charset="-122"/>
+                          <a:cs typeface="Arial" pitchFamily="34" charset="-120"/>
+                        </a:rPr>
+                        <a:t>336</a:t>
+                      </a:r>
+                      <a:endParaRPr lang="en-US" sz="1200" dirty="0">
+                        <a:latin typeface="Arial" charset="0"/>
+                        <a:ea typeface="Arial" charset="0"/>
+                        <a:cs typeface="Arial" charset="0"/>
+                      </a:endParaRPr>
+                    </a:p>
+                  </a:txBody>
+                  <a:tcPr marL="91440" marR="91440" marT="0" marB="0" anchor="ctr">
+                    <a:lnL w="12700" cap="flat" cmpd="sng" algn="ctr">
+                      <a:solidFill>
+                        <a:srgbClr val="0F1115"/>
+                      </a:solidFill>
+                      <a:prstDash val="solid"/>
+                      <a:round/>
+                      <a:headEnd type="none" w="med" len="med"/>
+                      <a:tailEnd type="none" w="med" len="med"/>
+                    </a:lnL>
+                    <a:lnR w="12700" cap="flat" cmpd="sng" algn="ctr">
+                      <a:solidFill>
+                        <a:srgbClr val="0F1115"/>
+                      </a:solidFill>
+                      <a:prstDash val="solid"/>
+                      <a:round/>
+                      <a:headEnd type="none" w="med" len="med"/>
+                      <a:tailEnd type="none" w="med" len="med"/>
+                    </a:lnR>
+                    <a:lnT w="12700" cap="flat" cmpd="sng" algn="ctr">
+                      <a:solidFill>
+                        <a:srgbClr val="0F1115"/>
+                      </a:solidFill>
+                      <a:prstDash val="solid"/>
+                      <a:round/>
+                      <a:headEnd type="none" w="med" len="med"/>
+                      <a:tailEnd type="none" w="med" len="med"/>
+                    </a:lnT>
+                    <a:lnB w="12700" cap="flat" cmpd="sng" algn="ctr">
+                      <a:solidFill>
+                        <a:srgbClr val="0F1115"/>
+                      </a:solidFill>
+                      <a:prstDash val="solid"/>
+                      <a:round/>
+                      <a:headEnd type="none" w="med" len="med"/>
+                      <a:tailEnd type="none" w="med" len="med"/>
+                    </a:lnB>
+                    <a:solidFill>
+                      <a:srgbClr val="181B23"/>
+                    </a:solidFill>
+                  </a:tcPr>
+                </a:tc>
+                <a:tc>
+                  <a:txBody>
+                    <a:bodyPr/>
+                    <a:lstStyle/>
+                    <a:p>
+                      <a:pPr algn="r" indent="0" marL="0">
+                        <a:buNone/>
+                      </a:pPr>
+                      <a:r>
+                        <a:rPr lang="en-US" sz="1200" dirty="0">
+                          <a:solidFill>
+                            <a:srgbClr val="FFFFFF"/>
+                          </a:solidFill>
+                          <a:latin typeface="Arial" pitchFamily="34" charset="0"/>
+                          <a:ea typeface="Arial" pitchFamily="34" charset="-122"/>
+                          <a:cs typeface="Arial" pitchFamily="34" charset="-120"/>
+                        </a:rPr>
+                        <a:t>1.038</a:t>
+                      </a:r>
+                      <a:endParaRPr lang="en-US" sz="1200" dirty="0">
+                        <a:latin typeface="Arial" charset="0"/>
+                        <a:ea typeface="Arial" charset="0"/>
+                        <a:cs typeface="Arial" charset="0"/>
+                      </a:endParaRPr>
+                    </a:p>
+                  </a:txBody>
+                  <a:tcPr marL="91440" marR="91440" marT="0" marB="0" anchor="ctr">
+                    <a:lnL w="12700" cap="flat" cmpd="sng" algn="ctr">
+                      <a:solidFill>
+                        <a:srgbClr val="0F1115"/>
+                      </a:solidFill>
+                      <a:prstDash val="solid"/>
+                      <a:round/>
+                      <a:headEnd type="none" w="med" len="med"/>
+                      <a:tailEnd type="none" w="med" len="med"/>
+                    </a:lnL>
+                    <a:lnR w="12700" cap="flat" cmpd="sng" algn="ctr">
+                      <a:solidFill>
+                        <a:srgbClr val="0F1115"/>
+                      </a:solidFill>
+                      <a:prstDash val="solid"/>
+                      <a:round/>
+                      <a:headEnd type="none" w="med" len="med"/>
+                      <a:tailEnd type="none" w="med" len="med"/>
+                    </a:lnR>
+                    <a:lnT w="12700" cap="flat" cmpd="sng" algn="ctr">
+                      <a:solidFill>
+                        <a:srgbClr val="0F1115"/>
+                      </a:solidFill>
+                      <a:prstDash val="solid"/>
+                      <a:round/>
+                      <a:headEnd type="none" w="med" len="med"/>
+                      <a:tailEnd type="none" w="med" len="med"/>
+                    </a:lnT>
+                    <a:lnB w="12700" cap="flat" cmpd="sng" algn="ctr">
+                      <a:solidFill>
+                        <a:srgbClr val="0F1115"/>
+                      </a:solidFill>
+                      <a:prstDash val="solid"/>
+                      <a:round/>
+                      <a:headEnd type="none" w="med" len="med"/>
+                      <a:tailEnd type="none" w="med" len="med"/>
+                    </a:lnB>
+                    <a:solidFill>
+                      <a:srgbClr val="181B23"/>
+                    </a:solidFill>
+                  </a:tcPr>
+                </a:tc>
+                <a:tc>
+                  <a:txBody>
+                    <a:bodyPr/>
+                    <a:lstStyle/>
+                    <a:p>
+                      <a:pPr algn="r" indent="0" marL="0">
+                        <a:buNone/>
+                      </a:pPr>
+                      <a:r>
+                        <a:rPr lang="en-US" sz="1200" dirty="0">
+                          <a:solidFill>
+                            <a:srgbClr val="FFFFFF"/>
+                          </a:solidFill>
+                          <a:latin typeface="Arial" pitchFamily="34" charset="0"/>
+                          <a:ea typeface="Arial" pitchFamily="34" charset="-122"/>
+                          <a:cs typeface="Arial" pitchFamily="34" charset="-120"/>
+                        </a:rPr>
+                        <a:t>1.984</a:t>
+                      </a:r>
+                      <a:endParaRPr lang="en-US" sz="1200" dirty="0">
+                        <a:latin typeface="Arial" charset="0"/>
+                        <a:ea typeface="Arial" charset="0"/>
+                        <a:cs typeface="Arial" charset="0"/>
+                      </a:endParaRPr>
+                    </a:p>
+                  </a:txBody>
+                  <a:tcPr marL="91440" marR="91440" marT="0" marB="0" anchor="ctr">
+                    <a:lnL w="12700" cap="flat" cmpd="sng" algn="ctr">
+                      <a:solidFill>
+                        <a:srgbClr val="0F1115"/>
+                      </a:solidFill>
+                      <a:prstDash val="solid"/>
+                      <a:round/>
+                      <a:headEnd type="none" w="med" len="med"/>
+                      <a:tailEnd type="none" w="med" len="med"/>
+                    </a:lnL>
+                    <a:lnR w="12700" cap="flat" cmpd="sng" algn="ctr">
+                      <a:solidFill>
+                        <a:srgbClr val="0F1115"/>
+                      </a:solidFill>
+                      <a:prstDash val="solid"/>
+                      <a:round/>
+                      <a:headEnd type="none" w="med" len="med"/>
+                      <a:tailEnd type="none" w="med" len="med"/>
+                    </a:lnR>
+                    <a:lnT w="12700" cap="flat" cmpd="sng" algn="ctr">
+                      <a:solidFill>
+                        <a:srgbClr val="0F1115"/>
+                      </a:solidFill>
+                      <a:prstDash val="solid"/>
+                      <a:round/>
+                      <a:headEnd type="none" w="med" len="med"/>
+                      <a:tailEnd type="none" w="med" len="med"/>
+                    </a:lnT>
+                    <a:lnB w="12700" cap="flat" cmpd="sng" algn="ctr">
+                      <a:solidFill>
+                        <a:srgbClr val="0F1115"/>
+                      </a:solidFill>
+                      <a:prstDash val="solid"/>
+                      <a:round/>
+                      <a:headEnd type="none" w="med" len="med"/>
+                      <a:tailEnd type="none" w="med" len="med"/>
+                    </a:lnB>
+                    <a:solidFill>
+                      <a:srgbClr val="181B23"/>
+                    </a:solidFill>
+                  </a:tcPr>
+                </a:tc>
+                <a:tc>
+                  <a:txBody>
+                    <a:bodyPr/>
+                    <a:lstStyle/>
+                    <a:p>
+                      <a:pPr algn="r" indent="0" marL="0">
+                        <a:buNone/>
+                      </a:pPr>
+                      <a:r>
+                        <a:rPr lang="en-US" sz="1200" dirty="0">
+                          <a:solidFill>
+                            <a:srgbClr val="FFFFFF"/>
+                          </a:solidFill>
+                          <a:latin typeface="Arial" pitchFamily="34" charset="0"/>
+                          <a:ea typeface="Arial" pitchFamily="34" charset="-122"/>
+                          <a:cs typeface="Arial" pitchFamily="34" charset="-120"/>
+                        </a:rPr>
+                        <a:t>3.152</a:t>
+                      </a:r>
+                      <a:endParaRPr lang="en-US" sz="1200" dirty="0">
+                        <a:latin typeface="Arial" charset="0"/>
+                        <a:ea typeface="Arial" charset="0"/>
+                        <a:cs typeface="Arial" charset="0"/>
+                      </a:endParaRPr>
+                    </a:p>
+                  </a:txBody>
+                  <a:tcPr marL="91440" marR="91440" marT="0" marB="0" anchor="ctr">
+                    <a:lnL w="12700" cap="flat" cmpd="sng" algn="ctr">
+                      <a:solidFill>
+                        <a:srgbClr val="0F1115"/>
+                      </a:solidFill>
+                      <a:prstDash val="solid"/>
+                      <a:round/>
+                      <a:headEnd type="none" w="med" len="med"/>
+                      <a:tailEnd type="none" w="med" len="med"/>
+                    </a:lnL>
+                    <a:lnR w="12700" cap="flat" cmpd="sng" algn="ctr">
+                      <a:solidFill>
+                        <a:srgbClr val="0F1115"/>
+                      </a:solidFill>
+                      <a:prstDash val="solid"/>
+                      <a:round/>
+                      <a:headEnd type="none" w="med" len="med"/>
+                      <a:tailEnd type="none" w="med" len="med"/>
+                    </a:lnR>
+                    <a:lnT w="12700" cap="flat" cmpd="sng" algn="ctr">
+                      <a:solidFill>
+                        <a:srgbClr val="0F1115"/>
+                      </a:solidFill>
+                      <a:prstDash val="solid"/>
+                      <a:round/>
+                      <a:headEnd type="none" w="med" len="med"/>
+                      <a:tailEnd type="none" w="med" len="med"/>
+                    </a:lnT>
+                    <a:lnB w="12700" cap="flat" cmpd="sng" algn="ctr">
+                      <a:solidFill>
+                        <a:srgbClr val="0F1115"/>
+                      </a:solidFill>
+                      <a:prstDash val="solid"/>
+                      <a:round/>
+                      <a:headEnd type="none" w="med" len="med"/>
+                      <a:tailEnd type="none" w="med" len="med"/>
+                    </a:lnB>
+                    <a:solidFill>
+                      <a:srgbClr val="181B23"/>
+                    </a:solidFill>
+                  </a:tcPr>
+                </a:tc>
+              </a:tr>
+              <a:tr h="365760">
+                <a:tc>
+                  <a:txBody>
+                    <a:bodyPr/>
+                    <a:lstStyle/>
+                    <a:p>
+                      <a:pPr algn="l" indent="0" marL="0">
+                        <a:buNone/>
+                      </a:pPr>
+                      <a:r>
+                        <a:rPr lang="en-US" sz="1200" b="1" dirty="0">
+                          <a:solidFill>
+                            <a:srgbClr val="9AA3B5"/>
+                          </a:solidFill>
+                          <a:latin typeface="Arial" pitchFamily="34" charset="0"/>
+                          <a:ea typeface="Arial" pitchFamily="34" charset="-122"/>
+                          <a:cs typeface="Arial" pitchFamily="34" charset="-120"/>
+                        </a:rPr>
+                        <a:t>Kosten</a:t>
+                      </a:r>
+                      <a:endParaRPr lang="en-US" sz="1200" dirty="0">
+                        <a:latin typeface="Arial" charset="0"/>
+                        <a:ea typeface="Arial" charset="0"/>
+                        <a:cs typeface="Arial" charset="0"/>
+                      </a:endParaRPr>
+                    </a:p>
+                  </a:txBody>
+                  <a:tcPr marL="91440" marR="91440" marT="0" marB="0" anchor="ctr">
+                    <a:lnL w="12700" cap="flat" cmpd="sng" algn="ctr">
+                      <a:solidFill>
+                        <a:srgbClr val="0F1115"/>
+                      </a:solidFill>
+                      <a:prstDash val="solid"/>
+                      <a:round/>
+                      <a:headEnd type="none" w="med" len="med"/>
+                      <a:tailEnd type="none" w="med" len="med"/>
+                    </a:lnL>
+                    <a:lnR w="12700" cap="flat" cmpd="sng" algn="ctr">
+                      <a:solidFill>
+                        <a:srgbClr val="0F1115"/>
+                      </a:solidFill>
+                      <a:prstDash val="solid"/>
+                      <a:round/>
+                      <a:headEnd type="none" w="med" len="med"/>
+                      <a:tailEnd type="none" w="med" len="med"/>
+                    </a:lnR>
+                    <a:lnT w="12700" cap="flat" cmpd="sng" algn="ctr">
+                      <a:solidFill>
+                        <a:srgbClr val="0F1115"/>
+                      </a:solidFill>
+                      <a:prstDash val="solid"/>
+                      <a:round/>
+                      <a:headEnd type="none" w="med" len="med"/>
+                      <a:tailEnd type="none" w="med" len="med"/>
+                    </a:lnT>
+                    <a:lnB w="12700" cap="flat" cmpd="sng" algn="ctr">
+                      <a:solidFill>
+                        <a:srgbClr val="0F1115"/>
+                      </a:solidFill>
+                      <a:prstDash val="solid"/>
+                      <a:round/>
+                      <a:headEnd type="none" w="med" len="med"/>
+                      <a:tailEnd type="none" w="med" len="med"/>
+                    </a:lnB>
+                    <a:solidFill>
+                      <a:srgbClr val="181B23"/>
+                    </a:solidFill>
+                  </a:tcPr>
+                </a:tc>
+                <a:tc>
+                  <a:txBody>
+                    <a:bodyPr/>
+                    <a:lstStyle/>
+                    <a:p>
+                      <a:pPr algn="r" indent="0" marL="0">
+                        <a:buNone/>
+                      </a:pPr>
+                      <a:r>
+                        <a:rPr lang="en-US" sz="1200" dirty="0">
+                          <a:solidFill>
+                            <a:srgbClr val="FFFFFF"/>
+                          </a:solidFill>
+                          <a:latin typeface="Arial" pitchFamily="34" charset="0"/>
+                          <a:ea typeface="Arial" pitchFamily="34" charset="-122"/>
+                          <a:cs typeface="Arial" pitchFamily="34" charset="-120"/>
+                        </a:rPr>
+                        <a:t>166</a:t>
+                      </a:r>
+                      <a:endParaRPr lang="en-US" sz="1200" dirty="0">
+                        <a:latin typeface="Arial" charset="0"/>
+                        <a:ea typeface="Arial" charset="0"/>
+                        <a:cs typeface="Arial" charset="0"/>
+                      </a:endParaRPr>
+                    </a:p>
+                  </a:txBody>
+                  <a:tcPr marL="91440" marR="91440" marT="0" marB="0" anchor="ctr">
+                    <a:lnL w="12700" cap="flat" cmpd="sng" algn="ctr">
+                      <a:solidFill>
+                        <a:srgbClr val="0F1115"/>
+                      </a:solidFill>
+                      <a:prstDash val="solid"/>
+                      <a:round/>
+                      <a:headEnd type="none" w="med" len="med"/>
+                      <a:tailEnd type="none" w="med" len="med"/>
+                    </a:lnL>
+                    <a:lnR w="12700" cap="flat" cmpd="sng" algn="ctr">
+                      <a:solidFill>
+                        <a:srgbClr val="0F1115"/>
+                      </a:solidFill>
+                      <a:prstDash val="solid"/>
+                      <a:round/>
+                      <a:headEnd type="none" w="med" len="med"/>
+                      <a:tailEnd type="none" w="med" len="med"/>
+                    </a:lnR>
+                    <a:lnT w="12700" cap="flat" cmpd="sng" algn="ctr">
+                      <a:solidFill>
+                        <a:srgbClr val="0F1115"/>
+                      </a:solidFill>
+                      <a:prstDash val="solid"/>
+                      <a:round/>
+                      <a:headEnd type="none" w="med" len="med"/>
+                      <a:tailEnd type="none" w="med" len="med"/>
+                    </a:lnT>
+                    <a:lnB w="12700" cap="flat" cmpd="sng" algn="ctr">
+                      <a:solidFill>
+                        <a:srgbClr val="0F1115"/>
+                      </a:solidFill>
+                      <a:prstDash val="solid"/>
+                      <a:round/>
+                      <a:headEnd type="none" w="med" len="med"/>
+                      <a:tailEnd type="none" w="med" len="med"/>
+                    </a:lnB>
+                    <a:solidFill>
+                      <a:srgbClr val="181B23"/>
+                    </a:solidFill>
+                  </a:tcPr>
+                </a:tc>
+                <a:tc>
+                  <a:txBody>
+                    <a:bodyPr/>
+                    <a:lstStyle/>
+                    <a:p>
+                      <a:pPr algn="r" indent="0" marL="0">
+                        <a:buNone/>
+                      </a:pPr>
+                      <a:r>
+                        <a:rPr lang="en-US" sz="1200" dirty="0">
+                          <a:solidFill>
+                            <a:srgbClr val="FFFFFF"/>
+                          </a:solidFill>
+                          <a:latin typeface="Arial" pitchFamily="34" charset="0"/>
+                          <a:ea typeface="Arial" pitchFamily="34" charset="-122"/>
+                          <a:cs typeface="Arial" pitchFamily="34" charset="-120"/>
+                        </a:rPr>
+                        <a:t>295</a:t>
+                      </a:r>
+                      <a:endParaRPr lang="en-US" sz="1200" dirty="0">
+                        <a:latin typeface="Arial" charset="0"/>
+                        <a:ea typeface="Arial" charset="0"/>
+                        <a:cs typeface="Arial" charset="0"/>
+                      </a:endParaRPr>
+                    </a:p>
+                  </a:txBody>
+                  <a:tcPr marL="91440" marR="91440" marT="0" marB="0" anchor="ctr">
+                    <a:lnL w="12700" cap="flat" cmpd="sng" algn="ctr">
+                      <a:solidFill>
+                        <a:srgbClr val="0F1115"/>
+                      </a:solidFill>
+                      <a:prstDash val="solid"/>
+                      <a:round/>
+                      <a:headEnd type="none" w="med" len="med"/>
+                      <a:tailEnd type="none" w="med" len="med"/>
+                    </a:lnL>
+                    <a:lnR w="12700" cap="flat" cmpd="sng" algn="ctr">
+                      <a:solidFill>
+                        <a:srgbClr val="0F1115"/>
+                      </a:solidFill>
+                      <a:prstDash val="solid"/>
+                      <a:round/>
+                      <a:headEnd type="none" w="med" len="med"/>
+                      <a:tailEnd type="none" w="med" len="med"/>
+                    </a:lnR>
+                    <a:lnT w="12700" cap="flat" cmpd="sng" algn="ctr">
+                      <a:solidFill>
+                        <a:srgbClr val="0F1115"/>
+                      </a:solidFill>
+                      <a:prstDash val="solid"/>
+                      <a:round/>
+                      <a:headEnd type="none" w="med" len="med"/>
+                      <a:tailEnd type="none" w="med" len="med"/>
+                    </a:lnT>
+                    <a:lnB w="12700" cap="flat" cmpd="sng" algn="ctr">
+                      <a:solidFill>
+                        <a:srgbClr val="0F1115"/>
+                      </a:solidFill>
+                      <a:prstDash val="solid"/>
+                      <a:round/>
+                      <a:headEnd type="none" w="med" len="med"/>
+                      <a:tailEnd type="none" w="med" len="med"/>
+                    </a:lnB>
+                    <a:solidFill>
+                      <a:srgbClr val="181B23"/>
+                    </a:solidFill>
+                  </a:tcPr>
+                </a:tc>
+                <a:tc>
+                  <a:txBody>
+                    <a:bodyPr/>
+                    <a:lstStyle/>
+                    <a:p>
+                      <a:pPr algn="r" indent="0" marL="0">
+                        <a:buNone/>
+                      </a:pPr>
+                      <a:r>
+                        <a:rPr lang="en-US" sz="1200" dirty="0">
+                          <a:solidFill>
+                            <a:srgbClr val="FFFFFF"/>
+                          </a:solidFill>
+                          <a:latin typeface="Arial" pitchFamily="34" charset="0"/>
+                          <a:ea typeface="Arial" pitchFamily="34" charset="-122"/>
+                          <a:cs typeface="Arial" pitchFamily="34" charset="-120"/>
+                        </a:rPr>
+                        <a:t>710</a:t>
+                      </a:r>
+                      <a:endParaRPr lang="en-US" sz="1200" dirty="0">
+                        <a:latin typeface="Arial" charset="0"/>
+                        <a:ea typeface="Arial" charset="0"/>
+                        <a:cs typeface="Arial" charset="0"/>
+                      </a:endParaRPr>
+                    </a:p>
+                  </a:txBody>
+                  <a:tcPr marL="91440" marR="91440" marT="0" marB="0" anchor="ctr">
+                    <a:lnL w="12700" cap="flat" cmpd="sng" algn="ctr">
+                      <a:solidFill>
+                        <a:srgbClr val="0F1115"/>
+                      </a:solidFill>
+                      <a:prstDash val="solid"/>
+                      <a:round/>
+                      <a:headEnd type="none" w="med" len="med"/>
+                      <a:tailEnd type="none" w="med" len="med"/>
+                    </a:lnL>
+                    <a:lnR w="12700" cap="flat" cmpd="sng" algn="ctr">
+                      <a:solidFill>
+                        <a:srgbClr val="0F1115"/>
+                      </a:solidFill>
+                      <a:prstDash val="solid"/>
+                      <a:round/>
+                      <a:headEnd type="none" w="med" len="med"/>
+                      <a:tailEnd type="none" w="med" len="med"/>
+                    </a:lnR>
+                    <a:lnT w="12700" cap="flat" cmpd="sng" algn="ctr">
+                      <a:solidFill>
+                        <a:srgbClr val="0F1115"/>
+                      </a:solidFill>
+                      <a:prstDash val="solid"/>
+                      <a:round/>
+                      <a:headEnd type="none" w="med" len="med"/>
+                      <a:tailEnd type="none" w="med" len="med"/>
+                    </a:lnT>
+                    <a:lnB w="12700" cap="flat" cmpd="sng" algn="ctr">
+                      <a:solidFill>
+                        <a:srgbClr val="0F1115"/>
+                      </a:solidFill>
+                      <a:prstDash val="solid"/>
+                      <a:round/>
+                      <a:headEnd type="none" w="med" len="med"/>
+                      <a:tailEnd type="none" w="med" len="med"/>
+                    </a:lnB>
+                    <a:solidFill>
+                      <a:srgbClr val="181B23"/>
+                    </a:solidFill>
+                  </a:tcPr>
+                </a:tc>
+                <a:tc>
+                  <a:txBody>
+                    <a:bodyPr/>
+                    <a:lstStyle/>
+                    <a:p>
+                      <a:pPr algn="r" indent="0" marL="0">
+                        <a:buNone/>
+                      </a:pPr>
+                      <a:r>
+                        <a:rPr lang="en-US" sz="1200" dirty="0">
+                          <a:solidFill>
+                            <a:srgbClr val="FFFFFF"/>
+                          </a:solidFill>
+                          <a:latin typeface="Arial" pitchFamily="34" charset="0"/>
+                          <a:ea typeface="Arial" pitchFamily="34" charset="-122"/>
+                          <a:cs typeface="Arial" pitchFamily="34" charset="-120"/>
+                        </a:rPr>
+                        <a:t>1.065</a:t>
+                      </a:r>
+                      <a:endParaRPr lang="en-US" sz="1200" dirty="0">
+                        <a:latin typeface="Arial" charset="0"/>
+                        <a:ea typeface="Arial" charset="0"/>
+                        <a:cs typeface="Arial" charset="0"/>
+                      </a:endParaRPr>
+                    </a:p>
+                  </a:txBody>
+                  <a:tcPr marL="91440" marR="91440" marT="0" marB="0" anchor="ctr">
+                    <a:lnL w="12700" cap="flat" cmpd="sng" algn="ctr">
+                      <a:solidFill>
+                        <a:srgbClr val="0F1115"/>
+                      </a:solidFill>
+                      <a:prstDash val="solid"/>
+                      <a:round/>
+                      <a:headEnd type="none" w="med" len="med"/>
+                      <a:tailEnd type="none" w="med" len="med"/>
+                    </a:lnL>
+                    <a:lnR w="12700" cap="flat" cmpd="sng" algn="ctr">
+                      <a:solidFill>
+                        <a:srgbClr val="0F1115"/>
+                      </a:solidFill>
+                      <a:prstDash val="solid"/>
+                      <a:round/>
+                      <a:headEnd type="none" w="med" len="med"/>
+                      <a:tailEnd type="none" w="med" len="med"/>
+                    </a:lnR>
+                    <a:lnT w="12700" cap="flat" cmpd="sng" algn="ctr">
+                      <a:solidFill>
+                        <a:srgbClr val="0F1115"/>
+                      </a:solidFill>
+                      <a:prstDash val="solid"/>
+                      <a:round/>
+                      <a:headEnd type="none" w="med" len="med"/>
+                      <a:tailEnd type="none" w="med" len="med"/>
+                    </a:lnT>
+                    <a:lnB w="12700" cap="flat" cmpd="sng" algn="ctr">
+                      <a:solidFill>
+                        <a:srgbClr val="0F1115"/>
+                      </a:solidFill>
+                      <a:prstDash val="solid"/>
+                      <a:round/>
+                      <a:headEnd type="none" w="med" len="med"/>
+                      <a:tailEnd type="none" w="med" len="med"/>
+                    </a:lnB>
+                    <a:solidFill>
+                      <a:srgbClr val="181B23"/>
+                    </a:solidFill>
+                  </a:tcPr>
+                </a:tc>
+                <a:tc>
+                  <a:txBody>
+                    <a:bodyPr/>
+                    <a:lstStyle/>
+                    <a:p>
+                      <a:pPr algn="r" indent="0" marL="0">
+                        <a:buNone/>
+                      </a:pPr>
+                      <a:r>
+                        <a:rPr lang="en-US" sz="1200" dirty="0">
+                          <a:solidFill>
+                            <a:srgbClr val="FFFFFF"/>
+                          </a:solidFill>
+                          <a:latin typeface="Arial" pitchFamily="34" charset="0"/>
+                          <a:ea typeface="Arial" pitchFamily="34" charset="-122"/>
+                          <a:cs typeface="Arial" pitchFamily="34" charset="-120"/>
+                        </a:rPr>
+                        <a:t>1.491</a:t>
+                      </a:r>
+                      <a:endParaRPr lang="en-US" sz="1200" dirty="0">
+                        <a:latin typeface="Arial" charset="0"/>
+                        <a:ea typeface="Arial" charset="0"/>
+                        <a:cs typeface="Arial" charset="0"/>
+                      </a:endParaRPr>
+                    </a:p>
+                  </a:txBody>
+                  <a:tcPr marL="91440" marR="91440" marT="0" marB="0" anchor="ctr">
+                    <a:lnL w="12700" cap="flat" cmpd="sng" algn="ctr">
+                      <a:solidFill>
+                        <a:srgbClr val="0F1115"/>
+                      </a:solidFill>
+                      <a:prstDash val="solid"/>
+                      <a:round/>
+                      <a:headEnd type="none" w="med" len="med"/>
+                      <a:tailEnd type="none" w="med" len="med"/>
+                    </a:lnL>
+                    <a:lnR w="12700" cap="flat" cmpd="sng" algn="ctr">
+                      <a:solidFill>
+                        <a:srgbClr val="0F1115"/>
+                      </a:solidFill>
+                      <a:prstDash val="solid"/>
+                      <a:round/>
+                      <a:headEnd type="none" w="med" len="med"/>
+                      <a:tailEnd type="none" w="med" len="med"/>
+                    </a:lnR>
+                    <a:lnT w="12700" cap="flat" cmpd="sng" algn="ctr">
+                      <a:solidFill>
+                        <a:srgbClr val="0F1115"/>
+                      </a:solidFill>
+                      <a:prstDash val="solid"/>
+                      <a:round/>
+                      <a:headEnd type="none" w="med" len="med"/>
+                      <a:tailEnd type="none" w="med" len="med"/>
+                    </a:lnT>
+                    <a:lnB w="12700" cap="flat" cmpd="sng" algn="ctr">
+                      <a:solidFill>
+                        <a:srgbClr val="0F1115"/>
+                      </a:solidFill>
+                      <a:prstDash val="solid"/>
+                      <a:round/>
+                      <a:headEnd type="none" w="med" len="med"/>
+                      <a:tailEnd type="none" w="med" len="med"/>
+                    </a:lnB>
+                    <a:solidFill>
+                      <a:srgbClr val="181B23"/>
+                    </a:solidFill>
+                  </a:tcPr>
+                </a:tc>
+              </a:tr>
+              <a:tr h="365760">
+                <a:tc>
+                  <a:txBody>
+                    <a:bodyPr/>
+                    <a:lstStyle/>
+                    <a:p>
+                      <a:pPr algn="l" indent="0" marL="0">
+                        <a:buNone/>
+                      </a:pPr>
+                      <a:r>
+                        <a:rPr lang="en-US" sz="1200" b="1" dirty="0">
+                          <a:solidFill>
+                            <a:srgbClr val="9AA3B5"/>
+                          </a:solidFill>
+                          <a:latin typeface="Arial" pitchFamily="34" charset="0"/>
+                          <a:ea typeface="Arial" pitchFamily="34" charset="-122"/>
+                          <a:cs typeface="Arial" pitchFamily="34" charset="-120"/>
+                        </a:rPr>
+                        <a:t>EBITDA</a:t>
+                      </a:r>
+                      <a:endParaRPr lang="en-US" sz="1200" dirty="0">
+                        <a:latin typeface="Arial" charset="0"/>
+                        <a:ea typeface="Arial" charset="0"/>
+                        <a:cs typeface="Arial" charset="0"/>
+                      </a:endParaRPr>
+                    </a:p>
+                  </a:txBody>
+                  <a:tcPr marL="91440" marR="91440" marT="0" marB="0" anchor="ctr">
+                    <a:lnL w="12700" cap="flat" cmpd="sng" algn="ctr">
+                      <a:solidFill>
+                        <a:srgbClr val="0F1115"/>
+                      </a:solidFill>
+                      <a:prstDash val="solid"/>
+                      <a:round/>
+                      <a:headEnd type="none" w="med" len="med"/>
+                      <a:tailEnd type="none" w="med" len="med"/>
+                    </a:lnL>
+                    <a:lnR w="12700" cap="flat" cmpd="sng" algn="ctr">
+                      <a:solidFill>
+                        <a:srgbClr val="0F1115"/>
+                      </a:solidFill>
+                      <a:prstDash val="solid"/>
+                      <a:round/>
+                      <a:headEnd type="none" w="med" len="med"/>
+                      <a:tailEnd type="none" w="med" len="med"/>
+                    </a:lnR>
+                    <a:lnT w="12700" cap="flat" cmpd="sng" algn="ctr">
+                      <a:solidFill>
+                        <a:srgbClr val="0F1115"/>
+                      </a:solidFill>
+                      <a:prstDash val="solid"/>
+                      <a:round/>
+                      <a:headEnd type="none" w="med" len="med"/>
+                      <a:tailEnd type="none" w="med" len="med"/>
+                    </a:lnT>
+                    <a:lnB w="12700" cap="flat" cmpd="sng" algn="ctr">
+                      <a:solidFill>
+                        <a:srgbClr val="0F1115"/>
+                      </a:solidFill>
+                      <a:prstDash val="solid"/>
+                      <a:round/>
+                      <a:headEnd type="none" w="med" len="med"/>
+                      <a:tailEnd type="none" w="med" len="med"/>
+                    </a:lnB>
+                    <a:solidFill>
+                      <a:srgbClr val="2A1530"/>
+                    </a:solidFill>
+                  </a:tcPr>
+                </a:tc>
+                <a:tc>
+                  <a:txBody>
+                    <a:bodyPr/>
+                    <a:lstStyle/>
+                    <a:p>
+                      <a:pPr algn="r" indent="0" marL="0">
+                        <a:buNone/>
+                      </a:pPr>
+                      <a:r>
+                        <a:rPr lang="en-US" sz="1200" b="1" dirty="0">
+                          <a:solidFill>
+                            <a:srgbClr val="FF2D75"/>
+                          </a:solidFill>
+                          <a:latin typeface="Arial" pitchFamily="34" charset="0"/>
+                          <a:ea typeface="Arial" pitchFamily="34" charset="-122"/>
+                          <a:cs typeface="Arial" pitchFamily="34" charset="-120"/>
+                        </a:rPr>
+                        <a:t>−116</a:t>
+                      </a:r>
+                      <a:endParaRPr lang="en-US" sz="1200" dirty="0">
+                        <a:latin typeface="Arial" charset="0"/>
+                        <a:ea typeface="Arial" charset="0"/>
+                        <a:cs typeface="Arial" charset="0"/>
+                      </a:endParaRPr>
+                    </a:p>
+                  </a:txBody>
+                  <a:tcPr marL="91440" marR="91440" marT="0" marB="0" anchor="ctr">
+                    <a:lnL w="12700" cap="flat" cmpd="sng" algn="ctr">
+                      <a:solidFill>
+                        <a:srgbClr val="0F1115"/>
+                      </a:solidFill>
+                      <a:prstDash val="solid"/>
+                      <a:round/>
+                      <a:headEnd type="none" w="med" len="med"/>
+                      <a:tailEnd type="none" w="med" len="med"/>
+                    </a:lnL>
+                    <a:lnR w="12700" cap="flat" cmpd="sng" algn="ctr">
+                      <a:solidFill>
+                        <a:srgbClr val="0F1115"/>
+                      </a:solidFill>
+                      <a:prstDash val="solid"/>
+                      <a:round/>
+                      <a:headEnd type="none" w="med" len="med"/>
+                      <a:tailEnd type="none" w="med" len="med"/>
+                    </a:lnR>
+                    <a:lnT w="12700" cap="flat" cmpd="sng" algn="ctr">
+                      <a:solidFill>
+                        <a:srgbClr val="0F1115"/>
+                      </a:solidFill>
+                      <a:prstDash val="solid"/>
+                      <a:round/>
+                      <a:headEnd type="none" w="med" len="med"/>
+                      <a:tailEnd type="none" w="med" len="med"/>
+                    </a:lnT>
+                    <a:lnB w="12700" cap="flat" cmpd="sng" algn="ctr">
+                      <a:solidFill>
+                        <a:srgbClr val="0F1115"/>
+                      </a:solidFill>
+                      <a:prstDash val="solid"/>
+                      <a:round/>
+                      <a:headEnd type="none" w="med" len="med"/>
+                      <a:tailEnd type="none" w="med" len="med"/>
+                    </a:lnB>
+                    <a:solidFill>
+                      <a:srgbClr val="2A1530"/>
+                    </a:solidFill>
+                  </a:tcPr>
+                </a:tc>
+                <a:tc>
+                  <a:txBody>
+                    <a:bodyPr/>
+                    <a:lstStyle/>
+                    <a:p>
+                      <a:pPr algn="r" indent="0" marL="0">
+                        <a:buNone/>
+                      </a:pPr>
+                      <a:r>
+                        <a:rPr lang="en-US" sz="1200" b="1" dirty="0">
+                          <a:solidFill>
+                            <a:srgbClr val="FF2D75"/>
+                          </a:solidFill>
+                          <a:latin typeface="Arial" pitchFamily="34" charset="0"/>
+                          <a:ea typeface="Arial" pitchFamily="34" charset="-122"/>
+                          <a:cs typeface="Arial" pitchFamily="34" charset="-120"/>
+                        </a:rPr>
+                        <a:t>+41</a:t>
+                      </a:r>
+                      <a:endParaRPr lang="en-US" sz="1200" dirty="0">
+                        <a:latin typeface="Arial" charset="0"/>
+                        <a:ea typeface="Arial" charset="0"/>
+                        <a:cs typeface="Arial" charset="0"/>
+                      </a:endParaRPr>
+                    </a:p>
+                  </a:txBody>
+                  <a:tcPr marL="91440" marR="91440" marT="0" marB="0" anchor="ctr">
+                    <a:lnL w="12700" cap="flat" cmpd="sng" algn="ctr">
+                      <a:solidFill>
+                        <a:srgbClr val="0F1115"/>
+                      </a:solidFill>
+                      <a:prstDash val="solid"/>
+                      <a:round/>
+                      <a:headEnd type="none" w="med" len="med"/>
+                      <a:tailEnd type="none" w="med" len="med"/>
+                    </a:lnL>
+                    <a:lnR w="12700" cap="flat" cmpd="sng" algn="ctr">
+                      <a:solidFill>
+                        <a:srgbClr val="0F1115"/>
+                      </a:solidFill>
+                      <a:prstDash val="solid"/>
+                      <a:round/>
+                      <a:headEnd type="none" w="med" len="med"/>
+                      <a:tailEnd type="none" w="med" len="med"/>
+                    </a:lnR>
+                    <a:lnT w="12700" cap="flat" cmpd="sng" algn="ctr">
+                      <a:solidFill>
+                        <a:srgbClr val="0F1115"/>
+                      </a:solidFill>
+                      <a:prstDash val="solid"/>
+                      <a:round/>
+                      <a:headEnd type="none" w="med" len="med"/>
+                      <a:tailEnd type="none" w="med" len="med"/>
+                    </a:lnT>
+                    <a:lnB w="12700" cap="flat" cmpd="sng" algn="ctr">
+                      <a:solidFill>
+                        <a:srgbClr val="0F1115"/>
+                      </a:solidFill>
+                      <a:prstDash val="solid"/>
+                      <a:round/>
+                      <a:headEnd type="none" w="med" len="med"/>
+                      <a:tailEnd type="none" w="med" len="med"/>
+                    </a:lnB>
+                    <a:solidFill>
+                      <a:srgbClr val="2A1530"/>
+                    </a:solidFill>
+                  </a:tcPr>
+                </a:tc>
+                <a:tc>
+                  <a:txBody>
+                    <a:bodyPr/>
+                    <a:lstStyle/>
+                    <a:p>
+                      <a:pPr algn="r" indent="0" marL="0">
+                        <a:buNone/>
+                      </a:pPr>
+                      <a:r>
+                        <a:rPr lang="en-US" sz="1200" b="1" dirty="0">
+                          <a:solidFill>
+                            <a:srgbClr val="FF2D75"/>
+                          </a:solidFill>
+                          <a:latin typeface="Arial" pitchFamily="34" charset="0"/>
+                          <a:ea typeface="Arial" pitchFamily="34" charset="-122"/>
+                          <a:cs typeface="Arial" pitchFamily="34" charset="-120"/>
+                        </a:rPr>
+                        <a:t>+328</a:t>
+                      </a:r>
+                      <a:endParaRPr lang="en-US" sz="1200" dirty="0">
+                        <a:latin typeface="Arial" charset="0"/>
+                        <a:ea typeface="Arial" charset="0"/>
+                        <a:cs typeface="Arial" charset="0"/>
+                      </a:endParaRPr>
+                    </a:p>
+                  </a:txBody>
+                  <a:tcPr marL="91440" marR="91440" marT="0" marB="0" anchor="ctr">
+                    <a:lnL w="12700" cap="flat" cmpd="sng" algn="ctr">
+                      <a:solidFill>
+                        <a:srgbClr val="0F1115"/>
+                      </a:solidFill>
+                      <a:prstDash val="solid"/>
+                      <a:round/>
+                      <a:headEnd type="none" w="med" len="med"/>
+                      <a:tailEnd type="none" w="med" len="med"/>
+                    </a:lnL>
+                    <a:lnR w="12700" cap="flat" cmpd="sng" algn="ctr">
+                      <a:solidFill>
+                        <a:srgbClr val="0F1115"/>
+                      </a:solidFill>
+                      <a:prstDash val="solid"/>
+                      <a:round/>
+                      <a:headEnd type="none" w="med" len="med"/>
+                      <a:tailEnd type="none" w="med" len="med"/>
+                    </a:lnR>
+                    <a:lnT w="12700" cap="flat" cmpd="sng" algn="ctr">
+                      <a:solidFill>
+                        <a:srgbClr val="0F1115"/>
+                      </a:solidFill>
+                      <a:prstDash val="solid"/>
+                      <a:round/>
+                      <a:headEnd type="none" w="med" len="med"/>
+                      <a:tailEnd type="none" w="med" len="med"/>
+                    </a:lnT>
+                    <a:lnB w="12700" cap="flat" cmpd="sng" algn="ctr">
+                      <a:solidFill>
+                        <a:srgbClr val="0F1115"/>
+                      </a:solidFill>
+                      <a:prstDash val="solid"/>
+                      <a:round/>
+                      <a:headEnd type="none" w="med" len="med"/>
+                      <a:tailEnd type="none" w="med" len="med"/>
+                    </a:lnB>
+                    <a:solidFill>
+                      <a:srgbClr val="2A1530"/>
+                    </a:solidFill>
+                  </a:tcPr>
+                </a:tc>
+                <a:tc>
+                  <a:txBody>
+                    <a:bodyPr/>
+                    <a:lstStyle/>
+                    <a:p>
+                      <a:pPr algn="r" indent="0" marL="0">
+                        <a:buNone/>
+                      </a:pPr>
+                      <a:r>
+                        <a:rPr lang="en-US" sz="1200" b="1" dirty="0">
+                          <a:solidFill>
+                            <a:srgbClr val="FF2D75"/>
+                          </a:solidFill>
+                          <a:latin typeface="Arial" pitchFamily="34" charset="0"/>
+                          <a:ea typeface="Arial" pitchFamily="34" charset="-122"/>
+                          <a:cs typeface="Arial" pitchFamily="34" charset="-120"/>
+                        </a:rPr>
+                        <a:t>+919</a:t>
+                      </a:r>
+                      <a:endParaRPr lang="en-US" sz="1200" dirty="0">
+                        <a:latin typeface="Arial" charset="0"/>
+                        <a:ea typeface="Arial" charset="0"/>
+                        <a:cs typeface="Arial" charset="0"/>
+                      </a:endParaRPr>
+                    </a:p>
+                  </a:txBody>
+                  <a:tcPr marL="91440" marR="91440" marT="0" marB="0" anchor="ctr">
+                    <a:lnL w="12700" cap="flat" cmpd="sng" algn="ctr">
+                      <a:solidFill>
+                        <a:srgbClr val="0F1115"/>
+                      </a:solidFill>
+                      <a:prstDash val="solid"/>
+                      <a:round/>
+                      <a:headEnd type="none" w="med" len="med"/>
+                      <a:tailEnd type="none" w="med" len="med"/>
+                    </a:lnL>
+                    <a:lnR w="12700" cap="flat" cmpd="sng" algn="ctr">
+                      <a:solidFill>
+                        <a:srgbClr val="0F1115"/>
+                      </a:solidFill>
+                      <a:prstDash val="solid"/>
+                      <a:round/>
+                      <a:headEnd type="none" w="med" len="med"/>
+                      <a:tailEnd type="none" w="med" len="med"/>
+                    </a:lnR>
+                    <a:lnT w="12700" cap="flat" cmpd="sng" algn="ctr">
+                      <a:solidFill>
+                        <a:srgbClr val="0F1115"/>
+                      </a:solidFill>
+                      <a:prstDash val="solid"/>
+                      <a:round/>
+                      <a:headEnd type="none" w="med" len="med"/>
+                      <a:tailEnd type="none" w="med" len="med"/>
+                    </a:lnT>
+                    <a:lnB w="12700" cap="flat" cmpd="sng" algn="ctr">
+                      <a:solidFill>
+                        <a:srgbClr val="0F1115"/>
+                      </a:solidFill>
+                      <a:prstDash val="solid"/>
+                      <a:round/>
+                      <a:headEnd type="none" w="med" len="med"/>
+                      <a:tailEnd type="none" w="med" len="med"/>
+                    </a:lnB>
+                    <a:solidFill>
+                      <a:srgbClr val="2A1530"/>
+                    </a:solidFill>
+                  </a:tcPr>
+                </a:tc>
+                <a:tc>
+                  <a:txBody>
+                    <a:bodyPr/>
+                    <a:lstStyle/>
+                    <a:p>
+                      <a:pPr algn="r" indent="0" marL="0">
+                        <a:buNone/>
+                      </a:pPr>
+                      <a:r>
+                        <a:rPr lang="en-US" sz="1200" b="1" dirty="0">
+                          <a:solidFill>
+                            <a:srgbClr val="FF2D75"/>
+                          </a:solidFill>
+                          <a:latin typeface="Arial" pitchFamily="34" charset="0"/>
+                          <a:ea typeface="Arial" pitchFamily="34" charset="-122"/>
+                          <a:cs typeface="Arial" pitchFamily="34" charset="-120"/>
+                        </a:rPr>
+                        <a:t>+1.661</a:t>
+                      </a:r>
+                      <a:endParaRPr lang="en-US" sz="1200" dirty="0">
+                        <a:latin typeface="Arial" charset="0"/>
+                        <a:ea typeface="Arial" charset="0"/>
+                        <a:cs typeface="Arial" charset="0"/>
+                      </a:endParaRPr>
+                    </a:p>
+                  </a:txBody>
+                  <a:tcPr marL="91440" marR="91440" marT="0" marB="0" anchor="ctr">
+                    <a:lnL w="12700" cap="flat" cmpd="sng" algn="ctr">
+                      <a:solidFill>
+                        <a:srgbClr val="0F1115"/>
+                      </a:solidFill>
+                      <a:prstDash val="solid"/>
+                      <a:round/>
+                      <a:headEnd type="none" w="med" len="med"/>
+                      <a:tailEnd type="none" w="med" len="med"/>
+                    </a:lnL>
+                    <a:lnR w="12700" cap="flat" cmpd="sng" algn="ctr">
+                      <a:solidFill>
+                        <a:srgbClr val="0F1115"/>
+                      </a:solidFill>
+                      <a:prstDash val="solid"/>
+                      <a:round/>
+                      <a:headEnd type="none" w="med" len="med"/>
+                      <a:tailEnd type="none" w="med" len="med"/>
+                    </a:lnR>
+                    <a:lnT w="12700" cap="flat" cmpd="sng" algn="ctr">
+                      <a:solidFill>
+                        <a:srgbClr val="0F1115"/>
+                      </a:solidFill>
+                      <a:prstDash val="solid"/>
+                      <a:round/>
+                      <a:headEnd type="none" w="med" len="med"/>
+                      <a:tailEnd type="none" w="med" len="med"/>
+                    </a:lnT>
+                    <a:lnB w="12700" cap="flat" cmpd="sng" algn="ctr">
+                      <a:solidFill>
+                        <a:srgbClr val="0F1115"/>
+                      </a:solidFill>
+                      <a:prstDash val="solid"/>
+                      <a:round/>
+                      <a:headEnd type="none" w="med" len="med"/>
+                      <a:tailEnd type="none" w="med" len="med"/>
+                    </a:lnB>
+                    <a:solidFill>
+                      <a:srgbClr val="2A1530"/>
+                    </a:solidFill>
+                  </a:tcPr>
+                </a:tc>
+              </a:tr>
+              <a:tr h="365760">
+                <a:tc>
+                  <a:txBody>
+                    <a:bodyPr/>
+                    <a:lstStyle/>
+                    <a:p>
+                      <a:pPr algn="l" indent="0" marL="0">
+                        <a:buNone/>
+                      </a:pPr>
+                      <a:r>
+                        <a:rPr lang="en-US" sz="1200" b="1" dirty="0">
+                          <a:solidFill>
+                            <a:srgbClr val="9AA3B5"/>
+                          </a:solidFill>
+                          <a:latin typeface="Arial" pitchFamily="34" charset="0"/>
+                          <a:ea typeface="Arial" pitchFamily="34" charset="-122"/>
+                          <a:cs typeface="Arial" pitchFamily="34" charset="-120"/>
+                        </a:rPr>
+                        <a:t>Kasse Jahresende</a:t>
+                      </a:r>
+                      <a:endParaRPr lang="en-US" sz="1200" dirty="0">
+                        <a:latin typeface="Arial" charset="0"/>
+                        <a:ea typeface="Arial" charset="0"/>
+                        <a:cs typeface="Arial" charset="0"/>
+                      </a:endParaRPr>
+                    </a:p>
+                  </a:txBody>
+                  <a:tcPr marL="91440" marR="91440" marT="0" marB="0" anchor="ctr">
+                    <a:lnL w="12700" cap="flat" cmpd="sng" algn="ctr">
+                      <a:solidFill>
+                        <a:srgbClr val="0F1115"/>
+                      </a:solidFill>
+                      <a:prstDash val="solid"/>
+                      <a:round/>
+                      <a:headEnd type="none" w="med" len="med"/>
+                      <a:tailEnd type="none" w="med" len="med"/>
+                    </a:lnL>
+                    <a:lnR w="12700" cap="flat" cmpd="sng" algn="ctr">
+                      <a:solidFill>
+                        <a:srgbClr val="0F1115"/>
+                      </a:solidFill>
+                      <a:prstDash val="solid"/>
+                      <a:round/>
+                      <a:headEnd type="none" w="med" len="med"/>
+                      <a:tailEnd type="none" w="med" len="med"/>
+                    </a:lnR>
+                    <a:lnT w="12700" cap="flat" cmpd="sng" algn="ctr">
+                      <a:solidFill>
+                        <a:srgbClr val="0F1115"/>
+                      </a:solidFill>
+                      <a:prstDash val="solid"/>
+                      <a:round/>
+                      <a:headEnd type="none" w="med" len="med"/>
+                      <a:tailEnd type="none" w="med" len="med"/>
+                    </a:lnT>
+                    <a:lnB w="12700" cap="flat" cmpd="sng" algn="ctr">
+                      <a:solidFill>
+                        <a:srgbClr val="0F1115"/>
+                      </a:solidFill>
+                      <a:prstDash val="solid"/>
+                      <a:round/>
+                      <a:headEnd type="none" w="med" len="med"/>
+                      <a:tailEnd type="none" w="med" len="med"/>
+                    </a:lnB>
+                    <a:solidFill>
+                      <a:srgbClr val="181B23"/>
+                    </a:solidFill>
+                  </a:tcPr>
+                </a:tc>
+                <a:tc>
+                  <a:txBody>
+                    <a:bodyPr/>
+                    <a:lstStyle/>
+                    <a:p>
+                      <a:pPr algn="r" indent="0" marL="0">
+                        <a:buNone/>
+                      </a:pPr>
+                      <a:r>
+                        <a:rPr lang="en-US" sz="1200" dirty="0">
+                          <a:solidFill>
+                            <a:srgbClr val="FFFFFF"/>
+                          </a:solidFill>
+                          <a:latin typeface="Arial" pitchFamily="34" charset="0"/>
+                          <a:ea typeface="Arial" pitchFamily="34" charset="-122"/>
+                          <a:cs typeface="Arial" pitchFamily="34" charset="-120"/>
+                        </a:rPr>
+                        <a:t>134</a:t>
+                      </a:r>
+                      <a:endParaRPr lang="en-US" sz="1200" dirty="0">
+                        <a:latin typeface="Arial" charset="0"/>
+                        <a:ea typeface="Arial" charset="0"/>
+                        <a:cs typeface="Arial" charset="0"/>
+                      </a:endParaRPr>
+                    </a:p>
+                  </a:txBody>
+                  <a:tcPr marL="91440" marR="91440" marT="0" marB="0" anchor="ctr">
+                    <a:lnL w="12700" cap="flat" cmpd="sng" algn="ctr">
+                      <a:solidFill>
+                        <a:srgbClr val="0F1115"/>
+                      </a:solidFill>
+                      <a:prstDash val="solid"/>
+                      <a:round/>
+                      <a:headEnd type="none" w="med" len="med"/>
+                      <a:tailEnd type="none" w="med" len="med"/>
+                    </a:lnL>
+                    <a:lnR w="12700" cap="flat" cmpd="sng" algn="ctr">
+                      <a:solidFill>
+                        <a:srgbClr val="0F1115"/>
+                      </a:solidFill>
+                      <a:prstDash val="solid"/>
+                      <a:round/>
+                      <a:headEnd type="none" w="med" len="med"/>
+                      <a:tailEnd type="none" w="med" len="med"/>
+                    </a:lnR>
+                    <a:lnT w="12700" cap="flat" cmpd="sng" algn="ctr">
+                      <a:solidFill>
+                        <a:srgbClr val="0F1115"/>
+                      </a:solidFill>
+                      <a:prstDash val="solid"/>
+                      <a:round/>
+                      <a:headEnd type="none" w="med" len="med"/>
+                      <a:tailEnd type="none" w="med" len="med"/>
+                    </a:lnT>
+                    <a:lnB w="12700" cap="flat" cmpd="sng" algn="ctr">
+                      <a:solidFill>
+                        <a:srgbClr val="0F1115"/>
+                      </a:solidFill>
+                      <a:prstDash val="solid"/>
+                      <a:round/>
+                      <a:headEnd type="none" w="med" len="med"/>
+                      <a:tailEnd type="none" w="med" len="med"/>
+                    </a:lnB>
+                    <a:solidFill>
+                      <a:srgbClr val="181B23"/>
+                    </a:solidFill>
+                  </a:tcPr>
+                </a:tc>
+                <a:tc>
+                  <a:txBody>
+                    <a:bodyPr/>
+                    <a:lstStyle/>
+                    <a:p>
+                      <a:pPr algn="r" indent="0" marL="0">
+                        <a:buNone/>
+                      </a:pPr>
+                      <a:r>
+                        <a:rPr lang="en-US" sz="1200" dirty="0">
+                          <a:solidFill>
+                            <a:srgbClr val="FFFFFF"/>
+                          </a:solidFill>
+                          <a:latin typeface="Arial" pitchFamily="34" charset="0"/>
+                          <a:ea typeface="Arial" pitchFamily="34" charset="-122"/>
+                          <a:cs typeface="Arial" pitchFamily="34" charset="-120"/>
+                        </a:rPr>
+                        <a:t>175</a:t>
+                      </a:r>
+                      <a:endParaRPr lang="en-US" sz="1200" dirty="0">
+                        <a:latin typeface="Arial" charset="0"/>
+                        <a:ea typeface="Arial" charset="0"/>
+                        <a:cs typeface="Arial" charset="0"/>
+                      </a:endParaRPr>
+                    </a:p>
+                  </a:txBody>
+                  <a:tcPr marL="91440" marR="91440" marT="0" marB="0" anchor="ctr">
+                    <a:lnL w="12700" cap="flat" cmpd="sng" algn="ctr">
+                      <a:solidFill>
+                        <a:srgbClr val="0F1115"/>
+                      </a:solidFill>
+                      <a:prstDash val="solid"/>
+                      <a:round/>
+                      <a:headEnd type="none" w="med" len="med"/>
+                      <a:tailEnd type="none" w="med" len="med"/>
+                    </a:lnL>
+                    <a:lnR w="12700" cap="flat" cmpd="sng" algn="ctr">
+                      <a:solidFill>
+                        <a:srgbClr val="0F1115"/>
+                      </a:solidFill>
+                      <a:prstDash val="solid"/>
+                      <a:round/>
+                      <a:headEnd type="none" w="med" len="med"/>
+                      <a:tailEnd type="none" w="med" len="med"/>
+                    </a:lnR>
+                    <a:lnT w="12700" cap="flat" cmpd="sng" algn="ctr">
+                      <a:solidFill>
+                        <a:srgbClr val="0F1115"/>
+                      </a:solidFill>
+                      <a:prstDash val="solid"/>
+                      <a:round/>
+                      <a:headEnd type="none" w="med" len="med"/>
+                      <a:tailEnd type="none" w="med" len="med"/>
+                    </a:lnT>
+                    <a:lnB w="12700" cap="flat" cmpd="sng" algn="ctr">
+                      <a:solidFill>
+                        <a:srgbClr val="0F1115"/>
+                      </a:solidFill>
+                      <a:prstDash val="solid"/>
+                      <a:round/>
+                      <a:headEnd type="none" w="med" len="med"/>
+                      <a:tailEnd type="none" w="med" len="med"/>
+                    </a:lnB>
+                    <a:solidFill>
+                      <a:srgbClr val="181B23"/>
+                    </a:solidFill>
+                  </a:tcPr>
+                </a:tc>
+                <a:tc>
+                  <a:txBody>
+                    <a:bodyPr/>
+                    <a:lstStyle/>
+                    <a:p>
+                      <a:pPr algn="r" indent="0" marL="0">
+                        <a:buNone/>
+                      </a:pPr>
+                      <a:r>
+                        <a:rPr lang="en-US" sz="1200" dirty="0">
+                          <a:solidFill>
+                            <a:srgbClr val="FFFFFF"/>
+                          </a:solidFill>
+                          <a:latin typeface="Arial" pitchFamily="34" charset="0"/>
+                          <a:ea typeface="Arial" pitchFamily="34" charset="-122"/>
+                          <a:cs typeface="Arial" pitchFamily="34" charset="-120"/>
+                        </a:rPr>
+                        <a:t>503</a:t>
+                      </a:r>
+                      <a:endParaRPr lang="en-US" sz="1200" dirty="0">
+                        <a:latin typeface="Arial" charset="0"/>
+                        <a:ea typeface="Arial" charset="0"/>
+                        <a:cs typeface="Arial" charset="0"/>
+                      </a:endParaRPr>
+                    </a:p>
+                  </a:txBody>
+                  <a:tcPr marL="91440" marR="91440" marT="0" marB="0" anchor="ctr">
+                    <a:lnL w="12700" cap="flat" cmpd="sng" algn="ctr">
+                      <a:solidFill>
+                        <a:srgbClr val="0F1115"/>
+                      </a:solidFill>
+                      <a:prstDash val="solid"/>
+                      <a:round/>
+                      <a:headEnd type="none" w="med" len="med"/>
+                      <a:tailEnd type="none" w="med" len="med"/>
+                    </a:lnL>
+                    <a:lnR w="12700" cap="flat" cmpd="sng" algn="ctr">
+                      <a:solidFill>
+                        <a:srgbClr val="0F1115"/>
+                      </a:solidFill>
+                      <a:prstDash val="solid"/>
+                      <a:round/>
+                      <a:headEnd type="none" w="med" len="med"/>
+                      <a:tailEnd type="none" w="med" len="med"/>
+                    </a:lnR>
+                    <a:lnT w="12700" cap="flat" cmpd="sng" algn="ctr">
+                      <a:solidFill>
+                        <a:srgbClr val="0F1115"/>
+                      </a:solidFill>
+                      <a:prstDash val="solid"/>
+                      <a:round/>
+                      <a:headEnd type="none" w="med" len="med"/>
+                      <a:tailEnd type="none" w="med" len="med"/>
+                    </a:lnT>
+                    <a:lnB w="12700" cap="flat" cmpd="sng" algn="ctr">
+                      <a:solidFill>
+                        <a:srgbClr val="0F1115"/>
+                      </a:solidFill>
+                      <a:prstDash val="solid"/>
+                      <a:round/>
+                      <a:headEnd type="none" w="med" len="med"/>
+                      <a:tailEnd type="none" w="med" len="med"/>
+                    </a:lnB>
+                    <a:solidFill>
+                      <a:srgbClr val="181B23"/>
+                    </a:solidFill>
+                  </a:tcPr>
+                </a:tc>
+                <a:tc>
+                  <a:txBody>
+                    <a:bodyPr/>
+                    <a:lstStyle/>
+                    <a:p>
+                      <a:pPr algn="r" indent="0" marL="0">
+                        <a:buNone/>
+                      </a:pPr>
+                      <a:r>
+                        <a:rPr lang="en-US" sz="1200" dirty="0">
+                          <a:solidFill>
+                            <a:srgbClr val="FFFFFF"/>
+                          </a:solidFill>
+                          <a:latin typeface="Arial" pitchFamily="34" charset="0"/>
+                          <a:ea typeface="Arial" pitchFamily="34" charset="-122"/>
+                          <a:cs typeface="Arial" pitchFamily="34" charset="-120"/>
+                        </a:rPr>
+                        <a:t>1.422</a:t>
+                      </a:r>
+                      <a:endParaRPr lang="en-US" sz="1200" dirty="0">
+                        <a:latin typeface="Arial" charset="0"/>
+                        <a:ea typeface="Arial" charset="0"/>
+                        <a:cs typeface="Arial" charset="0"/>
+                      </a:endParaRPr>
+                    </a:p>
+                  </a:txBody>
+                  <a:tcPr marL="91440" marR="91440" marT="0" marB="0" anchor="ctr">
+                    <a:lnL w="12700" cap="flat" cmpd="sng" algn="ctr">
+                      <a:solidFill>
+                        <a:srgbClr val="0F1115"/>
+                      </a:solidFill>
+                      <a:prstDash val="solid"/>
+                      <a:round/>
+                      <a:headEnd type="none" w="med" len="med"/>
+                      <a:tailEnd type="none" w="med" len="med"/>
+                    </a:lnL>
+                    <a:lnR w="12700" cap="flat" cmpd="sng" algn="ctr">
+                      <a:solidFill>
+                        <a:srgbClr val="0F1115"/>
+                      </a:solidFill>
+                      <a:prstDash val="solid"/>
+                      <a:round/>
+                      <a:headEnd type="none" w="med" len="med"/>
+                      <a:tailEnd type="none" w="med" len="med"/>
+                    </a:lnR>
+                    <a:lnT w="12700" cap="flat" cmpd="sng" algn="ctr">
+                      <a:solidFill>
+                        <a:srgbClr val="0F1115"/>
+                      </a:solidFill>
+                      <a:prstDash val="solid"/>
+                      <a:round/>
+                      <a:headEnd type="none" w="med" len="med"/>
+                      <a:tailEnd type="none" w="med" len="med"/>
+                    </a:lnT>
+                    <a:lnB w="12700" cap="flat" cmpd="sng" algn="ctr">
+                      <a:solidFill>
+                        <a:srgbClr val="0F1115"/>
+                      </a:solidFill>
+                      <a:prstDash val="solid"/>
+                      <a:round/>
+                      <a:headEnd type="none" w="med" len="med"/>
+                      <a:tailEnd type="none" w="med" len="med"/>
+                    </a:lnB>
+                    <a:solidFill>
+                      <a:srgbClr val="181B23"/>
+                    </a:solidFill>
+                  </a:tcPr>
+                </a:tc>
+                <a:tc>
+                  <a:txBody>
+                    <a:bodyPr/>
+                    <a:lstStyle/>
+                    <a:p>
+                      <a:pPr algn="r" indent="0" marL="0">
+                        <a:buNone/>
+                      </a:pPr>
+                      <a:r>
+                        <a:rPr lang="en-US" sz="1200" dirty="0">
+                          <a:solidFill>
+                            <a:srgbClr val="FFFFFF"/>
+                          </a:solidFill>
+                          <a:latin typeface="Arial" pitchFamily="34" charset="0"/>
+                          <a:ea typeface="Arial" pitchFamily="34" charset="-122"/>
+                          <a:cs typeface="Arial" pitchFamily="34" charset="-120"/>
+                        </a:rPr>
+                        <a:t>3.083</a:t>
+                      </a:r>
+                      <a:endParaRPr lang="en-US" sz="1200" dirty="0">
+                        <a:latin typeface="Arial" charset="0"/>
+                        <a:ea typeface="Arial" charset="0"/>
+                        <a:cs typeface="Arial" charset="0"/>
+                      </a:endParaRPr>
+                    </a:p>
+                  </a:txBody>
+                  <a:tcPr marL="91440" marR="91440" marT="0" marB="0" anchor="ctr">
+                    <a:lnL w="12700" cap="flat" cmpd="sng" algn="ctr">
+                      <a:solidFill>
+                        <a:srgbClr val="0F1115"/>
+                      </a:solidFill>
+                      <a:prstDash val="solid"/>
+                      <a:round/>
+                      <a:headEnd type="none" w="med" len="med"/>
+                      <a:tailEnd type="none" w="med" len="med"/>
+                    </a:lnL>
+                    <a:lnR w="12700" cap="flat" cmpd="sng" algn="ctr">
+                      <a:solidFill>
+                        <a:srgbClr val="0F1115"/>
+                      </a:solidFill>
+                      <a:prstDash val="solid"/>
+                      <a:round/>
+                      <a:headEnd type="none" w="med" len="med"/>
+                      <a:tailEnd type="none" w="med" len="med"/>
+                    </a:lnR>
+                    <a:lnT w="12700" cap="flat" cmpd="sng" algn="ctr">
+                      <a:solidFill>
+                        <a:srgbClr val="0F1115"/>
+                      </a:solidFill>
+                      <a:prstDash val="solid"/>
+                      <a:round/>
+                      <a:headEnd type="none" w="med" len="med"/>
+                      <a:tailEnd type="none" w="med" len="med"/>
+                    </a:lnT>
+                    <a:lnB w="12700" cap="flat" cmpd="sng" algn="ctr">
+                      <a:solidFill>
+                        <a:srgbClr val="0F1115"/>
+                      </a:solidFill>
+                      <a:prstDash val="solid"/>
+                      <a:round/>
+                      <a:headEnd type="none" w="med" len="med"/>
+                      <a:tailEnd type="none" w="med" len="med"/>
+                    </a:lnB>
+                    <a:solidFill>
+                      <a:srgbClr val="181B23"/>
+                    </a:solidFill>
+                  </a:tcPr>
+                </a:tc>
+              </a:tr>
+            </a:tbl>
+          </a:graphicData>
+        </a:graphic>
+      </p:graphicFrame>
+      <p:sp>
+        <p:nvSpPr>
+          <p:cNvPr id="8" name="Text 4"/>
+          <p:cNvSpPr txBox="1"/>
+          <p:nvPr/>
+        </p:nvSpPr>
+        <p:spPr>
+          <a:xfrm>
+            <a:off x="548640" y="3529584"/>
+            <a:ext cx="6583680" cy="384048"/>
+          </a:xfrm>
+          <a:prstGeom prst="rect">
+            <a:avLst/>
+          </a:prstGeom>
+          <a:noFill/>
+          <a:ln/>
+        </p:spPr>
+        <p:txBody>
+          <a:bodyPr wrap="square" lIns="0" tIns="0" rIns="0" bIns="0" rtlCol="0" anchor="t">
+            <a:normAutofit/>
+          </a:bodyPr>
+          <a:lstStyle/>
+          <a:p>
+            <a:pPr indent="0" marL="0">
+              <a:buNone/>
+            </a:pPr>
+            <a:r>
+              <a:rPr lang="en-US" sz="1000" i="1" dirty="0">
+                <a:solidFill>
+                  <a:srgbClr val="9AA3B5"/>
+                </a:solidFill>
+                <a:latin typeface="Arial" pitchFamily="34" charset="0"/>
+                <a:ea typeface="Arial" pitchFamily="34" charset="-122"/>
+                <a:cs typeface="Arial" pitchFamily="34" charset="-120"/>
+              </a:rPr>
+              <a:t>Umsatz 2031: konservativ 602 T€ · optimistisch 7,44 Mio. €. Jahre 4–5 fortgeschrieben; noch kein Umsatz.</a:t>
+            </a:r>
+            <a:endParaRPr lang="en-US" sz="1000" dirty="0"/>
+          </a:p>
+        </p:txBody>
+      </p:sp>
+      <p:sp>
+        <p:nvSpPr>
+          <p:cNvPr id="9" name="Shape 5"/>
+          <p:cNvSpPr/>
+          <p:nvPr/>
+        </p:nvSpPr>
+        <p:spPr>
+          <a:xfrm>
+            <a:off x="548640" y="4160520"/>
+            <a:ext cx="2103120" cy="1417320"/>
+          </a:xfrm>
+          <a:prstGeom prst="roundRect">
+            <a:avLst>
+              <a:gd name="adj" fmla="val 7742"/>
+            </a:avLst>
+          </a:prstGeom>
+          <a:solidFill>
+            <a:srgbClr val="181B23"/>
+          </a:solidFill>
+          <a:ln w="12700">
+            <a:solidFill>
+              <a:srgbClr val="181B23"/>
+            </a:solidFill>
+            <a:prstDash val="solid"/>
+          </a:ln>
+        </p:spPr>
+      </p:sp>
+      <p:sp>
+        <p:nvSpPr>
+          <p:cNvPr id="10" name="Text 6"/>
+          <p:cNvSpPr txBox="1"/>
+          <p:nvPr/>
+        </p:nvSpPr>
+        <p:spPr>
+          <a:xfrm>
+            <a:off x="713232" y="4270248"/>
+            <a:ext cx="1773936" cy="502920"/>
+          </a:xfrm>
+          <a:prstGeom prst="rect">
+            <a:avLst/>
+          </a:prstGeom>
+          <a:noFill/>
+          <a:ln/>
+        </p:spPr>
+        <p:txBody>
+          <a:bodyPr wrap="square" lIns="0" tIns="0" rIns="0" bIns="0" rtlCol="0" anchor="t">
+            <a:normAutofit/>
+          </a:bodyPr>
+          <a:lstStyle/>
+          <a:p>
+            <a:pPr indent="0" marL="0">
+              <a:buNone/>
+            </a:pPr>
+            <a:r>
+              <a:rPr lang="en-US" sz="2200" b="1" dirty="0">
+                <a:solidFill>
+                  <a:srgbClr val="2DFFB5"/>
+                </a:solidFill>
+                <a:latin typeface="Arial" pitchFamily="34" charset="0"/>
+                <a:ea typeface="Arial" pitchFamily="34" charset="-122"/>
+                <a:cs typeface="Arial" pitchFamily="34" charset="-120"/>
+              </a:rPr>
+              <a:t>18 Monate</a:t>
+            </a:r>
+            <a:endParaRPr lang="en-US" sz="2200" dirty="0"/>
+          </a:p>
+        </p:txBody>
+      </p:sp>
+      <p:sp>
+        <p:nvSpPr>
+          <p:cNvPr id="11" name="Text 7"/>
+          <p:cNvSpPr txBox="1"/>
+          <p:nvPr/>
+        </p:nvSpPr>
+        <p:spPr>
+          <a:xfrm>
+            <a:off x="713232" y="4818888"/>
+            <a:ext cx="1773936" cy="694944"/>
+          </a:xfrm>
+          <a:prstGeom prst="rect">
+            <a:avLst/>
+          </a:prstGeom>
+          <a:noFill/>
+          <a:ln/>
+        </p:spPr>
+        <p:txBody>
+          <a:bodyPr wrap="square" lIns="0" tIns="0" rIns="0" bIns="0" rtlCol="0" anchor="t">
+            <a:normAutofit/>
+          </a:bodyPr>
+          <a:lstStyle/>
+          <a:p>
+            <a:pPr indent="0" marL="0">
+              <a:buNone/>
+            </a:pPr>
+            <a:r>
+              <a:rPr lang="en-US" sz="1100" dirty="0">
+                <a:solidFill>
+                  <a:srgbClr val="9AA3B5"/>
+                </a:solidFill>
+                <a:latin typeface="Arial" pitchFamily="34" charset="0"/>
+                <a:ea typeface="Arial" pitchFamily="34" charset="-122"/>
+                <a:cs typeface="Arial" pitchFamily="34" charset="-120"/>
+              </a:rPr>
+              <a:t>Runway ganz ohne Umsatz – Ø Kosten 13.444 € pro Monat</a:t>
+            </a:r>
+            <a:endParaRPr lang="en-US" sz="1100" dirty="0"/>
+          </a:p>
+        </p:txBody>
+      </p:sp>
+      <p:sp>
+        <p:nvSpPr>
+          <p:cNvPr id="12" name="Shape 8"/>
+          <p:cNvSpPr/>
+          <p:nvPr/>
+        </p:nvSpPr>
+        <p:spPr>
+          <a:xfrm>
+            <a:off x="2788920" y="4160520"/>
+            <a:ext cx="2103120" cy="1417320"/>
+          </a:xfrm>
+          <a:prstGeom prst="roundRect">
+            <a:avLst>
+              <a:gd name="adj" fmla="val 7742"/>
+            </a:avLst>
+          </a:prstGeom>
+          <a:solidFill>
+            <a:srgbClr val="181B23"/>
+          </a:solidFill>
+          <a:ln w="12700">
+            <a:solidFill>
+              <a:srgbClr val="181B23"/>
+            </a:solidFill>
+            <a:prstDash val="solid"/>
+          </a:ln>
+        </p:spPr>
+      </p:sp>
+      <p:sp>
+        <p:nvSpPr>
+          <p:cNvPr id="13" name="Text 9"/>
+          <p:cNvSpPr txBox="1"/>
+          <p:nvPr/>
+        </p:nvSpPr>
+        <p:spPr>
+          <a:xfrm>
+            <a:off x="2953512" y="4270248"/>
+            <a:ext cx="1773936" cy="502920"/>
+          </a:xfrm>
+          <a:prstGeom prst="rect">
+            <a:avLst/>
+          </a:prstGeom>
+          <a:noFill/>
+          <a:ln/>
+        </p:spPr>
+        <p:txBody>
+          <a:bodyPr wrap="square" lIns="0" tIns="0" rIns="0" bIns="0" rtlCol="0" anchor="t">
+            <a:normAutofit/>
+          </a:bodyPr>
+          <a:lstStyle/>
+          <a:p>
+            <a:pPr indent="0" marL="0">
+              <a:buNone/>
+            </a:pPr>
+            <a:r>
+              <a:rPr lang="en-US" sz="1700" b="1" dirty="0">
+                <a:solidFill>
+                  <a:srgbClr val="5AD1FF"/>
+                </a:solidFill>
+                <a:latin typeface="Arial" pitchFamily="34" charset="0"/>
+                <a:ea typeface="Arial" pitchFamily="34" charset="-122"/>
+                <a:cs typeface="Arial" pitchFamily="34" charset="-120"/>
+              </a:rPr>
+              <a:t>49 · 146 · 369 T€</a:t>
+            </a:r>
+            <a:endParaRPr lang="en-US" sz="1700" dirty="0"/>
+          </a:p>
+        </p:txBody>
+      </p:sp>
+      <p:sp>
+        <p:nvSpPr>
+          <p:cNvPr id="14" name="Text 10"/>
+          <p:cNvSpPr txBox="1"/>
+          <p:nvPr/>
+        </p:nvSpPr>
+        <p:spPr>
+          <a:xfrm>
+            <a:off x="2953512" y="4818888"/>
+            <a:ext cx="1773936" cy="694944"/>
+          </a:xfrm>
+          <a:prstGeom prst="rect">
+            <a:avLst/>
+          </a:prstGeom>
+          <a:noFill/>
+          <a:ln/>
+        </p:spPr>
+        <p:txBody>
+          <a:bodyPr wrap="square" lIns="0" tIns="0" rIns="0" bIns="0" rtlCol="0" anchor="t">
+            <a:normAutofit/>
+          </a:bodyPr>
+          <a:lstStyle/>
+          <a:p>
+            <a:pPr indent="0" marL="0">
+              <a:buNone/>
+            </a:pPr>
+            <a:r>
+              <a:rPr lang="en-US" sz="1100" dirty="0">
+                <a:solidFill>
+                  <a:srgbClr val="9AA3B5"/>
+                </a:solidFill>
+                <a:latin typeface="Arial" pitchFamily="34" charset="0"/>
+                <a:ea typeface="Arial" pitchFamily="34" charset="-122"/>
+                <a:cs typeface="Arial" pitchFamily="34" charset="-120"/>
+              </a:rPr>
+              <a:t>Kasse in Monat 18: konservativ · Basis · optimistisch</a:t>
+            </a:r>
+            <a:endParaRPr lang="en-US" sz="1100" dirty="0"/>
+          </a:p>
+        </p:txBody>
+      </p:sp>
+      <p:sp>
+        <p:nvSpPr>
+          <p:cNvPr id="15" name="Shape 11"/>
+          <p:cNvSpPr/>
+          <p:nvPr/>
+        </p:nvSpPr>
+        <p:spPr>
+          <a:xfrm>
+            <a:off x="5029200" y="4160520"/>
+            <a:ext cx="2103120" cy="1417320"/>
+          </a:xfrm>
+          <a:prstGeom prst="roundRect">
+            <a:avLst>
+              <a:gd name="adj" fmla="val 7742"/>
+            </a:avLst>
+          </a:prstGeom>
+          <a:solidFill>
+            <a:srgbClr val="181B23"/>
+          </a:solidFill>
+          <a:ln w="12700">
+            <a:solidFill>
+              <a:srgbClr val="181B23"/>
+            </a:solidFill>
+            <a:prstDash val="solid"/>
+          </a:ln>
+        </p:spPr>
+      </p:sp>
+      <p:sp>
+        <p:nvSpPr>
+          <p:cNvPr id="16" name="Text 12"/>
+          <p:cNvSpPr txBox="1"/>
+          <p:nvPr/>
+        </p:nvSpPr>
+        <p:spPr>
+          <a:xfrm>
+            <a:off x="5193792" y="4270248"/>
+            <a:ext cx="1773936" cy="502920"/>
+          </a:xfrm>
+          <a:prstGeom prst="rect">
+            <a:avLst/>
+          </a:prstGeom>
+          <a:noFill/>
+          <a:ln/>
+        </p:spPr>
+        <p:txBody>
+          <a:bodyPr wrap="square" lIns="0" tIns="0" rIns="0" bIns="0" rtlCol="0" anchor="t">
+            <a:normAutofit/>
+          </a:bodyPr>
+          <a:lstStyle/>
+          <a:p>
+            <a:pPr indent="0" marL="0">
+              <a:buNone/>
+            </a:pPr>
+            <a:r>
+              <a:rPr lang="en-US" sz="2200" b="1" dirty="0">
+                <a:solidFill>
+                  <a:srgbClr val="FF2D75"/>
+                </a:solidFill>
+                <a:latin typeface="Arial" pitchFamily="34" charset="0"/>
+                <a:ea typeface="Arial" pitchFamily="34" charset="-122"/>
+                <a:cs typeface="Arial" pitchFamily="34" charset="-120"/>
+              </a:rPr>
+              <a:t>~350 T€</a:t>
+            </a:r>
+            <a:endParaRPr lang="en-US" sz="2200" dirty="0"/>
+          </a:p>
+        </p:txBody>
+      </p:sp>
+      <p:sp>
+        <p:nvSpPr>
+          <p:cNvPr id="17" name="Text 13"/>
+          <p:cNvSpPr txBox="1"/>
+          <p:nvPr/>
+        </p:nvSpPr>
+        <p:spPr>
+          <a:xfrm>
+            <a:off x="5193792" y="4818888"/>
+            <a:ext cx="1773936" cy="694944"/>
+          </a:xfrm>
+          <a:prstGeom prst="rect">
+            <a:avLst/>
+          </a:prstGeom>
+          <a:noFill/>
+          <a:ln/>
+        </p:spPr>
+        <p:txBody>
+          <a:bodyPr wrap="square" lIns="0" tIns="0" rIns="0" bIns="0" rtlCol="0" anchor="t">
+            <a:normAutofit/>
+          </a:bodyPr>
+          <a:lstStyle/>
+          <a:p>
+            <a:pPr indent="0" marL="0">
+              <a:buNone/>
+            </a:pPr>
+            <a:r>
+              <a:rPr lang="en-US" sz="1100" dirty="0">
+                <a:solidFill>
+                  <a:srgbClr val="9AA3B5"/>
+                </a:solidFill>
+                <a:latin typeface="Arial" pitchFamily="34" charset="0"/>
+                <a:ea typeface="Arial" pitchFamily="34" charset="-122"/>
+                <a:cs typeface="Arial" pitchFamily="34" charset="-120"/>
+              </a:rPr>
+              <a:t>Seed-Runde nach Gate 2 (Monat 15–18)</a:t>
+            </a:r>
+            <a:endParaRPr lang="en-US" sz="1100" dirty="0"/>
+          </a:p>
+        </p:txBody>
+      </p:sp>
+      <p:sp>
+        <p:nvSpPr>
+          <p:cNvPr id="18" name="Text 14"/>
+          <p:cNvSpPr txBox="1"/>
+          <p:nvPr/>
+        </p:nvSpPr>
+        <p:spPr>
+          <a:xfrm>
+            <a:off x="7406640" y="1298448"/>
+            <a:ext cx="4236415" cy="292608"/>
+          </a:xfrm>
+          <a:prstGeom prst="rect">
+            <a:avLst/>
+          </a:prstGeom>
+          <a:noFill/>
+          <a:ln/>
+        </p:spPr>
+        <p:txBody>
+          <a:bodyPr wrap="square" lIns="0" tIns="0" rIns="0" bIns="0" rtlCol="0" anchor="t">
+            <a:normAutofit/>
+          </a:bodyPr>
+          <a:lstStyle/>
+          <a:p>
+            <a:pPr indent="0" marL="0">
+              <a:buNone/>
+            </a:pPr>
+            <a:r>
+              <a:rPr lang="en-US" sz="1300" b="1" dirty="0">
+                <a:solidFill>
+                  <a:srgbClr val="FFD166"/>
+                </a:solidFill>
+                <a:latin typeface="Arial" pitchFamily="34" charset="0"/>
+                <a:ea typeface="Arial" pitchFamily="34" charset="-122"/>
+                <a:cs typeface="Arial" pitchFamily="34" charset="-120"/>
+              </a:rPr>
+              <a:t>Referenzmethoden (Pre-Money)</a:t>
+            </a:r>
+            <a:endParaRPr lang="en-US" sz="1300" dirty="0"/>
+          </a:p>
+        </p:txBody>
+      </p:sp>
+      <p:sp>
+        <p:nvSpPr>
+          <p:cNvPr id="19" name="Text 15"/>
+          <p:cNvSpPr txBox="1"/>
+          <p:nvPr/>
+        </p:nvSpPr>
+        <p:spPr>
+          <a:xfrm>
+            <a:off x="7406640" y="1691640"/>
+            <a:ext cx="1143000" cy="292608"/>
+          </a:xfrm>
+          <a:prstGeom prst="rect">
+            <a:avLst/>
+          </a:prstGeom>
+          <a:noFill/>
+          <a:ln/>
+        </p:spPr>
+        <p:txBody>
+          <a:bodyPr wrap="square" lIns="0" tIns="0" rIns="0" bIns="0" rtlCol="0" anchor="ctr">
+            <a:normAutofit/>
+          </a:bodyPr>
+          <a:lstStyle/>
+          <a:p>
+            <a:pPr indent="0" marL="0">
+              <a:buNone/>
+            </a:pPr>
+            <a:r>
+              <a:rPr lang="en-US" sz="1100" dirty="0">
+                <a:solidFill>
+                  <a:srgbClr val="FFFFFF"/>
+                </a:solidFill>
+                <a:latin typeface="Arial" pitchFamily="34" charset="0"/>
+                <a:ea typeface="Arial" pitchFamily="34" charset="-122"/>
+                <a:cs typeface="Arial" pitchFamily="34" charset="-120"/>
+              </a:rPr>
+              <a:t>Berkus</a:t>
+            </a:r>
+            <a:endParaRPr lang="en-US" sz="1100" dirty="0"/>
+          </a:p>
+        </p:txBody>
+      </p:sp>
+      <p:sp>
+        <p:nvSpPr>
+          <p:cNvPr id="20" name="Shape 16"/>
+          <p:cNvSpPr/>
+          <p:nvPr/>
+        </p:nvSpPr>
+        <p:spPr>
+          <a:xfrm>
+            <a:off x="8641080" y="1737360"/>
+            <a:ext cx="1671081" cy="201168"/>
+          </a:xfrm>
+          <a:prstGeom prst="rect">
+            <a:avLst/>
+          </a:prstGeom>
+          <a:solidFill>
+            <a:srgbClr val="2DFFB5"/>
+          </a:solidFill>
+          <a:ln/>
+        </p:spPr>
+      </p:sp>
+      <p:sp>
+        <p:nvSpPr>
+          <p:cNvPr id="21" name="Text 17"/>
+          <p:cNvSpPr txBox="1"/>
+          <p:nvPr/>
+        </p:nvSpPr>
+        <p:spPr>
+          <a:xfrm>
+            <a:off x="10385313" y="1691640"/>
+            <a:ext cx="822960" cy="292608"/>
+          </a:xfrm>
+          <a:prstGeom prst="rect">
+            <a:avLst/>
+          </a:prstGeom>
+          <a:noFill/>
+          <a:ln/>
+        </p:spPr>
+        <p:txBody>
+          <a:bodyPr wrap="square" lIns="0" tIns="0" rIns="0" bIns="0" rtlCol="0" anchor="ctr">
+            <a:normAutofit/>
+          </a:bodyPr>
+          <a:lstStyle/>
+          <a:p>
+            <a:pPr indent="0" marL="0">
+              <a:buNone/>
+            </a:pPr>
+            <a:r>
+              <a:rPr lang="en-US" sz="1100" b="1" dirty="0">
+                <a:solidFill>
+                  <a:srgbClr val="2DFFB5"/>
+                </a:solidFill>
+                <a:latin typeface="Arial" pitchFamily="34" charset="0"/>
+                <a:ea typeface="Arial" pitchFamily="34" charset="-122"/>
+                <a:cs typeface="Arial" pitchFamily="34" charset="-120"/>
+              </a:rPr>
+              <a:t>2,35 Mio. €</a:t>
+            </a:r>
+            <a:endParaRPr lang="en-US" sz="1100" dirty="0"/>
+          </a:p>
+        </p:txBody>
+      </p:sp>
+      <p:sp>
+        <p:nvSpPr>
+          <p:cNvPr id="22" name="Text 18"/>
+          <p:cNvSpPr txBox="1"/>
+          <p:nvPr/>
+        </p:nvSpPr>
+        <p:spPr>
+          <a:xfrm>
+            <a:off x="7406640" y="2075688"/>
+            <a:ext cx="1143000" cy="292608"/>
+          </a:xfrm>
+          <a:prstGeom prst="rect">
+            <a:avLst/>
+          </a:prstGeom>
+          <a:noFill/>
+          <a:ln/>
+        </p:spPr>
+        <p:txBody>
+          <a:bodyPr wrap="square" lIns="0" tIns="0" rIns="0" bIns="0" rtlCol="0" anchor="ctr">
+            <a:normAutofit/>
+          </a:bodyPr>
+          <a:lstStyle/>
+          <a:p>
+            <a:pPr indent="0" marL="0">
+              <a:buNone/>
+            </a:pPr>
+            <a:r>
+              <a:rPr lang="en-US" sz="1100" dirty="0">
+                <a:solidFill>
+                  <a:srgbClr val="FFFFFF"/>
+                </a:solidFill>
+                <a:latin typeface="Arial" pitchFamily="34" charset="0"/>
+                <a:ea typeface="Arial" pitchFamily="34" charset="-122"/>
+                <a:cs typeface="Arial" pitchFamily="34" charset="-120"/>
+              </a:rPr>
+              <a:t>Scorecard</a:t>
+            </a:r>
+            <a:endParaRPr lang="en-US" sz="1100" dirty="0"/>
+          </a:p>
+        </p:txBody>
+      </p:sp>
+      <p:sp>
+        <p:nvSpPr>
+          <p:cNvPr id="23" name="Shape 19"/>
+          <p:cNvSpPr/>
+          <p:nvPr/>
+        </p:nvSpPr>
+        <p:spPr>
+          <a:xfrm>
+            <a:off x="8641080" y="2121408"/>
+            <a:ext cx="2097740" cy="201168"/>
+          </a:xfrm>
+          <a:prstGeom prst="rect">
+            <a:avLst/>
+          </a:prstGeom>
+          <a:solidFill>
+            <a:srgbClr val="5AD1FF"/>
+          </a:solidFill>
+          <a:ln/>
+        </p:spPr>
+      </p:sp>
+      <p:sp>
+        <p:nvSpPr>
+          <p:cNvPr id="24" name="Text 20"/>
+          <p:cNvSpPr txBox="1"/>
+          <p:nvPr/>
+        </p:nvSpPr>
+        <p:spPr>
+          <a:xfrm>
+            <a:off x="10811972" y="2075688"/>
+            <a:ext cx="822960" cy="292608"/>
+          </a:xfrm>
+          <a:prstGeom prst="rect">
+            <a:avLst/>
+          </a:prstGeom>
+          <a:noFill/>
+          <a:ln/>
+        </p:spPr>
+        <p:txBody>
+          <a:bodyPr wrap="square" lIns="0" tIns="0" rIns="0" bIns="0" rtlCol="0" anchor="ctr">
+            <a:normAutofit/>
+          </a:bodyPr>
+          <a:lstStyle/>
+          <a:p>
+            <a:pPr indent="0" marL="0">
+              <a:buNone/>
+            </a:pPr>
+            <a:r>
+              <a:rPr lang="en-US" sz="1100" b="1" dirty="0">
+                <a:solidFill>
+                  <a:srgbClr val="5AD1FF"/>
+                </a:solidFill>
+                <a:latin typeface="Arial" pitchFamily="34" charset="0"/>
+                <a:ea typeface="Arial" pitchFamily="34" charset="-122"/>
+                <a:cs typeface="Arial" pitchFamily="34" charset="-120"/>
+              </a:rPr>
+              <a:t>2,95 Mio. €</a:t>
+            </a:r>
+            <a:endParaRPr lang="en-US" sz="1100" dirty="0"/>
+          </a:p>
+        </p:txBody>
+      </p:sp>
+      <p:sp>
+        <p:nvSpPr>
+          <p:cNvPr id="25" name="Text 21"/>
+          <p:cNvSpPr txBox="1"/>
+          <p:nvPr/>
+        </p:nvSpPr>
+        <p:spPr>
+          <a:xfrm>
+            <a:off x="7406640" y="2459736"/>
+            <a:ext cx="1143000" cy="292608"/>
+          </a:xfrm>
+          <a:prstGeom prst="rect">
+            <a:avLst/>
+          </a:prstGeom>
+          <a:noFill/>
+          <a:ln/>
+        </p:spPr>
+        <p:txBody>
+          <a:bodyPr wrap="square" lIns="0" tIns="0" rIns="0" bIns="0" rtlCol="0" anchor="ctr">
+            <a:normAutofit/>
+          </a:bodyPr>
+          <a:lstStyle/>
+          <a:p>
+            <a:pPr indent="0" marL="0">
+              <a:buNone/>
+            </a:pPr>
+            <a:r>
+              <a:rPr lang="en-US" sz="1100" dirty="0">
+                <a:solidFill>
+                  <a:srgbClr val="FFFFFF"/>
+                </a:solidFill>
+                <a:latin typeface="Arial" pitchFamily="34" charset="0"/>
+                <a:ea typeface="Arial" pitchFamily="34" charset="-122"/>
+                <a:cs typeface="Arial" pitchFamily="34" charset="-120"/>
+              </a:rPr>
+              <a:t>VC-Methode</a:t>
+            </a:r>
+            <a:endParaRPr lang="en-US" sz="1100" dirty="0"/>
+          </a:p>
+        </p:txBody>
+      </p:sp>
+      <p:sp>
+        <p:nvSpPr>
+          <p:cNvPr id="26" name="Shape 22"/>
+          <p:cNvSpPr/>
+          <p:nvPr/>
+        </p:nvSpPr>
+        <p:spPr>
+          <a:xfrm>
+            <a:off x="8641080" y="2505456"/>
+            <a:ext cx="1727969" cy="201168"/>
+          </a:xfrm>
+          <a:prstGeom prst="rect">
+            <a:avLst/>
+          </a:prstGeom>
+          <a:solidFill>
+            <a:srgbClr val="9AA3B5"/>
+          </a:solidFill>
+          <a:ln/>
+        </p:spPr>
+      </p:sp>
+      <p:sp>
+        <p:nvSpPr>
+          <p:cNvPr id="27" name="Text 23"/>
+          <p:cNvSpPr txBox="1"/>
+          <p:nvPr/>
+        </p:nvSpPr>
+        <p:spPr>
+          <a:xfrm>
+            <a:off x="10442201" y="2459736"/>
+            <a:ext cx="822960" cy="292608"/>
+          </a:xfrm>
+          <a:prstGeom prst="rect">
+            <a:avLst/>
+          </a:prstGeom>
+          <a:noFill/>
+          <a:ln/>
+        </p:spPr>
+        <p:txBody>
+          <a:bodyPr wrap="square" lIns="0" tIns="0" rIns="0" bIns="0" rtlCol="0" anchor="ctr">
+            <a:normAutofit/>
+          </a:bodyPr>
+          <a:lstStyle/>
+          <a:p>
+            <a:pPr indent="0" marL="0">
+              <a:buNone/>
+            </a:pPr>
+            <a:r>
+              <a:rPr lang="en-US" sz="1100" b="1" dirty="0">
+                <a:solidFill>
+                  <a:srgbClr val="9AA3B5"/>
+                </a:solidFill>
+                <a:latin typeface="Arial" pitchFamily="34" charset="0"/>
+                <a:ea typeface="Arial" pitchFamily="34" charset="-122"/>
+                <a:cs typeface="Arial" pitchFamily="34" charset="-120"/>
+              </a:rPr>
+              <a:t>2,43 Mio. €</a:t>
+            </a:r>
+            <a:endParaRPr lang="en-US" sz="1100" dirty="0"/>
+          </a:p>
+        </p:txBody>
+      </p:sp>
+      <p:sp>
+        <p:nvSpPr>
+          <p:cNvPr id="28" name="Text 24"/>
+          <p:cNvSpPr txBox="1"/>
+          <p:nvPr/>
+        </p:nvSpPr>
+        <p:spPr>
+          <a:xfrm>
+            <a:off x="7406640" y="2843784"/>
+            <a:ext cx="1143000" cy="292608"/>
+          </a:xfrm>
+          <a:prstGeom prst="rect">
+            <a:avLst/>
+          </a:prstGeom>
+          <a:noFill/>
+          <a:ln/>
+        </p:spPr>
+        <p:txBody>
+          <a:bodyPr wrap="square" lIns="0" tIns="0" rIns="0" bIns="0" rtlCol="0" anchor="ctr">
+            <a:normAutofit/>
+          </a:bodyPr>
+          <a:lstStyle/>
+          <a:p>
+            <a:pPr indent="0" marL="0">
+              <a:buNone/>
+            </a:pPr>
+            <a:r>
+              <a:rPr lang="en-US" sz="1100" dirty="0">
+                <a:solidFill>
+                  <a:srgbClr val="FFFFFF"/>
+                </a:solidFill>
+                <a:latin typeface="Arial" pitchFamily="34" charset="0"/>
+                <a:ea typeface="Arial" pitchFamily="34" charset="-122"/>
+                <a:cs typeface="Arial" pitchFamily="34" charset="-120"/>
+              </a:rPr>
+              <a:t>Risk Factor Sum.</a:t>
+            </a:r>
+            <a:endParaRPr lang="en-US" sz="1100" dirty="0"/>
+          </a:p>
+        </p:txBody>
+      </p:sp>
+      <p:sp>
+        <p:nvSpPr>
+          <p:cNvPr id="29" name="Shape 25"/>
+          <p:cNvSpPr/>
+          <p:nvPr/>
+        </p:nvSpPr>
+        <p:spPr>
+          <a:xfrm>
+            <a:off x="8641080" y="2889504"/>
+            <a:ext cx="2133295" cy="201168"/>
+          </a:xfrm>
+          <a:prstGeom prst="rect">
+            <a:avLst/>
+          </a:prstGeom>
+          <a:solidFill>
+            <a:srgbClr val="2DFFB5"/>
+          </a:solidFill>
+          <a:ln/>
+        </p:spPr>
+      </p:sp>
+      <p:sp>
+        <p:nvSpPr>
+          <p:cNvPr id="30" name="Text 26"/>
+          <p:cNvSpPr txBox="1"/>
+          <p:nvPr/>
+        </p:nvSpPr>
+        <p:spPr>
+          <a:xfrm>
+            <a:off x="10847527" y="2843784"/>
+            <a:ext cx="822960" cy="292608"/>
+          </a:xfrm>
+          <a:prstGeom prst="rect">
+            <a:avLst/>
+          </a:prstGeom>
+          <a:noFill/>
+          <a:ln/>
+        </p:spPr>
+        <p:txBody>
+          <a:bodyPr wrap="square" lIns="0" tIns="0" rIns="0" bIns="0" rtlCol="0" anchor="ctr">
+            <a:normAutofit/>
+          </a:bodyPr>
+          <a:lstStyle/>
+          <a:p>
+            <a:pPr indent="0" marL="0">
+              <a:buNone/>
+            </a:pPr>
+            <a:r>
+              <a:rPr lang="en-US" sz="1100" b="1" dirty="0">
+                <a:solidFill>
+                  <a:srgbClr val="2DFFB5"/>
+                </a:solidFill>
+                <a:latin typeface="Arial" pitchFamily="34" charset="0"/>
+                <a:ea typeface="Arial" pitchFamily="34" charset="-122"/>
+                <a:cs typeface="Arial" pitchFamily="34" charset="-120"/>
+              </a:rPr>
+              <a:t>3,0 Mio. €</a:t>
+            </a:r>
+            <a:endParaRPr lang="en-US" sz="1100" dirty="0"/>
+          </a:p>
+        </p:txBody>
+      </p:sp>
+      <p:sp>
+        <p:nvSpPr>
+          <p:cNvPr id="31" name="Shape 27"/>
+          <p:cNvSpPr/>
+          <p:nvPr/>
+        </p:nvSpPr>
+        <p:spPr>
+          <a:xfrm>
+            <a:off x="7406640" y="3337560"/>
+            <a:ext cx="4236415" cy="1325880"/>
+          </a:xfrm>
+          <a:prstGeom prst="roundRect">
+            <a:avLst>
+              <a:gd name="adj" fmla="val 8276"/>
+            </a:avLst>
+          </a:prstGeom>
+          <a:solidFill>
+            <a:srgbClr val="1F2330"/>
+          </a:solidFill>
+          <a:ln w="15875">
+            <a:solidFill>
+              <a:srgbClr val="FF2D75"/>
+            </a:solidFill>
+            <a:prstDash val="solid"/>
+          </a:ln>
+        </p:spPr>
+      </p:sp>
+      <p:sp>
+        <p:nvSpPr>
+          <p:cNvPr id="32" name="Text 28"/>
+          <p:cNvSpPr txBox="1"/>
+          <p:nvPr/>
+        </p:nvSpPr>
+        <p:spPr>
+          <a:xfrm>
+            <a:off x="7607808" y="3429000"/>
+            <a:ext cx="3834079" cy="274320"/>
+          </a:xfrm>
+          <a:prstGeom prst="rect">
+            <a:avLst/>
+          </a:prstGeom>
+          <a:noFill/>
+          <a:ln/>
+        </p:spPr>
+        <p:txBody>
+          <a:bodyPr wrap="square" lIns="0" tIns="0" rIns="0" bIns="0" rtlCol="0" anchor="t">
+            <a:normAutofit/>
+          </a:bodyPr>
+          <a:lstStyle/>
+          <a:p>
+            <a:pPr indent="0" marL="0">
+              <a:buNone/>
+            </a:pPr>
+            <a:r>
+              <a:rPr lang="en-US" sz="1100" b="1" dirty="0">
+                <a:solidFill>
+                  <a:srgbClr val="9AA3B5"/>
+                </a:solidFill>
+                <a:latin typeface="Arial" pitchFamily="34" charset="0"/>
+                <a:ea typeface="Arial" pitchFamily="34" charset="-122"/>
+                <a:cs typeface="Arial" pitchFamily="34" charset="-120"/>
+              </a:rPr>
+              <a:t>Angebot der Gründer · unter jeder Referenzmethode</a:t>
+            </a:r>
+            <a:endParaRPr lang="en-US" sz="1100" dirty="0"/>
+          </a:p>
+        </p:txBody>
+      </p:sp>
+      <p:sp>
+        <p:nvSpPr>
+          <p:cNvPr id="33" name="Text 29"/>
+          <p:cNvSpPr txBox="1"/>
+          <p:nvPr/>
+        </p:nvSpPr>
+        <p:spPr>
+          <a:xfrm>
+            <a:off x="7607808" y="3685032"/>
+            <a:ext cx="3834079" cy="548640"/>
+          </a:xfrm>
+          <a:prstGeom prst="rect">
+            <a:avLst/>
+          </a:prstGeom>
+          <a:noFill/>
+          <a:ln/>
+        </p:spPr>
+        <p:txBody>
+          <a:bodyPr wrap="square" lIns="0" tIns="0" rIns="0" bIns="0" rtlCol="0" anchor="t">
+            <a:normAutofit/>
+          </a:bodyPr>
+          <a:lstStyle/>
+          <a:p>
+            <a:pPr indent="0" marL="0">
+              <a:buNone/>
+            </a:pPr>
+            <a:r>
+              <a:rPr lang="en-US" sz="3200" b="1" dirty="0">
+                <a:solidFill>
+                  <a:srgbClr val="FF2D75"/>
+                </a:solidFill>
+                <a:latin typeface="Arial" pitchFamily="34" charset="0"/>
+                <a:ea typeface="Arial" pitchFamily="34" charset="-122"/>
+                <a:cs typeface="Arial" pitchFamily="34" charset="-120"/>
+              </a:rPr>
+              <a:t>2,25 Mio. €</a:t>
+            </a:r>
+            <a:endParaRPr lang="en-US" sz="3200" dirty="0"/>
+          </a:p>
+        </p:txBody>
+      </p:sp>
+      <p:sp>
+        <p:nvSpPr>
+          <p:cNvPr id="34" name="Text 30"/>
+          <p:cNvSpPr txBox="1"/>
+          <p:nvPr/>
+        </p:nvSpPr>
+        <p:spPr>
+          <a:xfrm>
+            <a:off x="7607808" y="4233672"/>
+            <a:ext cx="3834079" cy="365760"/>
+          </a:xfrm>
+          <a:prstGeom prst="rect">
+            <a:avLst/>
+          </a:prstGeom>
+          <a:noFill/>
+          <a:ln/>
+        </p:spPr>
+        <p:txBody>
+          <a:bodyPr wrap="square" lIns="0" tIns="0" rIns="0" bIns="0" rtlCol="0" anchor="t">
+            <a:normAutofit/>
+          </a:bodyPr>
+          <a:lstStyle/>
+          <a:p>
+            <a:pPr indent="0" marL="0">
+              <a:buNone/>
+            </a:pPr>
+            <a:r>
+              <a:rPr lang="en-US" sz="1200" b="1" dirty="0">
+                <a:solidFill>
+                  <a:srgbClr val="FFFFFF"/>
+                </a:solidFill>
+                <a:latin typeface="Arial" pitchFamily="34" charset="0"/>
+                <a:ea typeface="Arial" pitchFamily="34" charset="-122"/>
+                <a:cs typeface="Arial" pitchFamily="34" charset="-120"/>
+              </a:rPr>
+              <a:t>Pre-Money · 250 T€ für 10,0 % · Post-Money 2,5 Mio. €</a:t>
+            </a:r>
+            <a:endParaRPr lang="en-US" sz="1200" dirty="0"/>
+          </a:p>
+        </p:txBody>
+      </p:sp>
+      <p:sp>
+        <p:nvSpPr>
+          <p:cNvPr id="35" name="Shape 31"/>
+          <p:cNvSpPr/>
+          <p:nvPr/>
+        </p:nvSpPr>
+        <p:spPr>
+          <a:xfrm>
+            <a:off x="7406640" y="4800600"/>
+            <a:ext cx="4236415" cy="777240"/>
+          </a:xfrm>
+          <a:prstGeom prst="roundRect">
+            <a:avLst>
+              <a:gd name="adj" fmla="val 14118"/>
+            </a:avLst>
+          </a:prstGeom>
+          <a:solidFill>
+            <a:srgbClr val="181B23"/>
+          </a:solidFill>
+          <a:ln w="12700">
+            <a:solidFill>
+              <a:srgbClr val="181B23"/>
+            </a:solidFill>
+            <a:prstDash val="solid"/>
+          </a:ln>
+        </p:spPr>
+      </p:sp>
+      <p:sp>
+        <p:nvSpPr>
+          <p:cNvPr id="36" name="Text 32"/>
+          <p:cNvSpPr txBox="1"/>
+          <p:nvPr/>
+        </p:nvSpPr>
+        <p:spPr>
+          <a:xfrm>
+            <a:off x="7607808" y="4892040"/>
+            <a:ext cx="3834079" cy="274320"/>
+          </a:xfrm>
+          <a:prstGeom prst="rect">
+            <a:avLst/>
+          </a:prstGeom>
+          <a:noFill/>
+          <a:ln/>
+        </p:spPr>
+        <p:txBody>
+          <a:bodyPr wrap="square" lIns="0" tIns="0" rIns="0" bIns="0" rtlCol="0" anchor="t">
+            <a:normAutofit/>
+          </a:bodyPr>
+          <a:lstStyle/>
+          <a:p>
+            <a:pPr indent="0" marL="0">
+              <a:buNone/>
+            </a:pPr>
+            <a:r>
+              <a:rPr lang="en-US" sz="1200" b="1" dirty="0">
+                <a:solidFill>
+                  <a:srgbClr val="5AD1FF"/>
+                </a:solidFill>
+                <a:latin typeface="Arial" pitchFamily="34" charset="0"/>
+                <a:ea typeface="Arial" pitchFamily="34" charset="-122"/>
+                <a:cs typeface="Arial" pitchFamily="34" charset="-120"/>
+              </a:rPr>
+              <a:t>Alternative: SAFE / Wandeldarlehen</a:t>
+            </a:r>
+            <a:endParaRPr lang="en-US" sz="1200" dirty="0"/>
+          </a:p>
+        </p:txBody>
+      </p:sp>
+      <p:sp>
+        <p:nvSpPr>
+          <p:cNvPr id="37" name="Text 33"/>
+          <p:cNvSpPr txBox="1"/>
+          <p:nvPr/>
+        </p:nvSpPr>
+        <p:spPr>
+          <a:xfrm>
+            <a:off x="7607808" y="5184648"/>
+            <a:ext cx="3834079" cy="320040"/>
+          </a:xfrm>
+          <a:prstGeom prst="rect">
+            <a:avLst/>
+          </a:prstGeom>
+          <a:noFill/>
+          <a:ln/>
+        </p:spPr>
+        <p:txBody>
+          <a:bodyPr wrap="square" lIns="0" tIns="0" rIns="0" bIns="0" rtlCol="0" anchor="t">
+            <a:normAutofit/>
+          </a:bodyPr>
+          <a:lstStyle/>
+          <a:p>
+            <a:pPr indent="0" marL="0">
+              <a:buNone/>
+            </a:pPr>
+            <a:r>
+              <a:rPr lang="en-US" sz="950" dirty="0">
+                <a:solidFill>
+                  <a:srgbClr val="FFFFFF"/>
+                </a:solidFill>
+                <a:latin typeface="Arial" pitchFamily="34" charset="0"/>
+                <a:ea typeface="Arial" pitchFamily="34" charset="-122"/>
+                <a:cs typeface="Arial" pitchFamily="34" charset="-120"/>
+              </a:rPr>
+              <a:t>Valuation Cap 2,25 Mio. € · 20 % Discount (15–20 % verhandelbar) · ohne Zins · Wandlung in der Seed-Runde – max. 10 %</a:t>
+            </a:r>
+            <a:endParaRPr lang="en-US" sz="950" dirty="0"/>
+          </a:p>
+        </p:txBody>
+      </p:sp>
+      <p:sp>
+        <p:nvSpPr>
+          <p:cNvPr id="38" name="Text 34"/>
+          <p:cNvSpPr txBox="1"/>
+          <p:nvPr/>
+        </p:nvSpPr>
+        <p:spPr>
+          <a:xfrm>
+            <a:off x="548640" y="5760720"/>
+            <a:ext cx="9997135" cy="457200"/>
+          </a:xfrm>
+          <a:prstGeom prst="rect">
+            <a:avLst/>
+          </a:prstGeom>
+          <a:noFill/>
+          <a:ln/>
+        </p:spPr>
+        <p:txBody>
+          <a:bodyPr wrap="square" lIns="0" tIns="0" rIns="0" bIns="0" rtlCol="0" anchor="t">
+            <a:normAutofit/>
+          </a:bodyPr>
+          <a:lstStyle/>
+          <a:p>
+            <a:pPr indent="0" marL="0">
+              <a:buNone/>
+            </a:pPr>
+            <a:r>
+              <a:rPr lang="en-US" sz="1000" i="1" dirty="0">
+                <a:solidFill>
+                  <a:srgbClr val="FFD166"/>
+                </a:solidFill>
+                <a:latin typeface="Arial" pitchFamily="34" charset="0"/>
+                <a:ea typeface="Arial" pitchFamily="34" charset="-122"/>
+                <a:cs typeface="Arial" pitchFamily="34" charset="-120"/>
+              </a:rPr>
+              <a:t>Verhandlungsbasis – mit Steuer-/Rechtsberater prüfen. Alle Zahlen sind Schätzungen aus LiveFX_Finanzmodell.xlsx (gewichteter Referenzwert 2,71 Mio. €).</a:t>
+            </a:r>
+            <a:endParaRPr lang="en-US" sz="1000" dirty="0"/>
+          </a:p>
+        </p:txBody>
+      </p:sp>
+    </p:spTree>
+  </p:cSld>
+  <p:clrMapOvr>
+    <a:masterClrMapping/>
+  </p:clrMapOvr>
+</p:sld>
+</file>
+
+<file path=ppt/slides/slide18.xml><?xml version="1.0" encoding="utf-8"?>
+<p:sld xmlns:a="http://schemas.openxmlformats.org/drawingml/2006/main" xmlns:r="http://schemas.openxmlformats.org/officeDocument/2006/relationships" xmlns:p="http://schemas.openxmlformats.org/presentationml/2006/main">
+  <p:cSld name="Slide 18">
+    <p:bg>
+      <p:bgPr>
+        <a:solidFill>
+          <a:srgbClr val="0F1115"/>
+        </a:solidFill>
+      </p:bgPr>
+    </p:bg>
+    <p:spTree>
+      <p:nvGrpSpPr>
+        <p:cNvPr id="1" name=""/>
+        <p:cNvGrpSpPr/>
+        <p:nvPr/>
+      </p:nvGrpSpPr>
+      <p:grpSpPr>
+        <a:xfrm>
+          <a:off x="0" y="0"/>
+          <a:ext cx="0" cy="0"/>
+          <a:chOff x="0" y="0"/>
+          <a:chExt cx="0" cy="0"/>
+        </a:xfrm>
+      </p:grpSpPr>
+      <p:sp>
+        <p:nvSpPr>
+          <p:cNvPr id="2" name="Kicker"/>
+          <p:cNvSpPr txBox="1"/>
+          <p:nvPr/>
+        </p:nvSpPr>
+        <p:spPr>
+          <a:xfrm>
+            <a:off x="548640" y="182880"/>
+            <a:ext cx="8229600" cy="237744"/>
+          </a:xfrm>
+          <a:prstGeom prst="rect">
+            <a:avLst/>
+          </a:prstGeom>
+          <a:noFill/>
+          <a:ln/>
+        </p:spPr>
+        <p:txBody>
+          <a:bodyPr wrap="square" lIns="0" tIns="0" rIns="0" bIns="0" rtlCol="0" anchor="ctr"/>
+          <a:lstStyle/>
+          <a:p>
+            <a:pPr indent="0" marL="0">
+              <a:buNone/>
+            </a:pPr>
+            <a:r>
+              <a:rPr lang="en-US" sz="1000" b="1" spc="300" kern="0" dirty="0">
+                <a:solidFill>
+                  <a:srgbClr val="2DFFB5"/>
+                </a:solidFill>
+                <a:latin typeface="Arial" pitchFamily="34" charset="0"/>
+                <a:ea typeface="Arial" pitchFamily="34" charset="-122"/>
+                <a:cs typeface="Arial" pitchFamily="34" charset="-120"/>
+              </a:rPr>
+              <a:t>MEILENSTEINE · 18 MONATE</a:t>
+            </a:r>
+            <a:endParaRPr lang="en-US" sz="1000" dirty="0"/>
+          </a:p>
+        </p:txBody>
+      </p:sp>
+      <p:sp>
+        <p:nvSpPr>
+          <p:cNvPr id="3" name="Titel"/>
+          <p:cNvSpPr txBox="1"/>
+          <p:nvPr/>
+        </p:nvSpPr>
+        <p:spPr>
+          <a:xfrm>
+            <a:off x="548640" y="438912"/>
+            <a:ext cx="11094415" cy="777240"/>
+          </a:xfrm>
+          <a:prstGeom prst="rect">
+            <a:avLst/>
+          </a:prstGeom>
+          <a:noFill/>
+          <a:ln/>
+        </p:spPr>
+        <p:txBody>
+          <a:bodyPr wrap="square" lIns="0" tIns="0" rIns="0" bIns="0" rtlCol="0" anchor="t">
+            <a:normAutofit/>
+          </a:bodyPr>
+          <a:lstStyle/>
+          <a:p>
+            <a:pPr indent="0" marL="0">
+              <a:buNone/>
+            </a:pPr>
+            <a:r>
+              <a:rPr lang="en-US" sz="3200" b="1" dirty="0">
+                <a:solidFill>
+                  <a:srgbClr val="FFFFFF"/>
+                </a:solidFill>
+                <a:latin typeface="Arial" pitchFamily="34" charset="0"/>
+                <a:ea typeface="Arial" pitchFamily="34" charset="-122"/>
+                <a:cs typeface="Arial" pitchFamily="34" charset="-120"/>
+              </a:rPr>
+              <a:t>Gates: was die 250 T€ beweisen müssen</a:t>
+            </a:r>
+            <a:endParaRPr lang="en-US" sz="3200" dirty="0"/>
+          </a:p>
+        </p:txBody>
+      </p:sp>
+      <p:sp>
+        <p:nvSpPr>
+          <p:cNvPr id="4" name="Fuß"/>
+          <p:cNvSpPr txBox="1"/>
+          <p:nvPr/>
+        </p:nvSpPr>
+        <p:spPr>
+          <a:xfrm>
+            <a:off x="7071055" y="6473952"/>
+            <a:ext cx="4572000" cy="228600"/>
+          </a:xfrm>
+          <a:prstGeom prst="rect">
+            <a:avLst/>
+          </a:prstGeom>
+          <a:noFill/>
+          <a:ln/>
+        </p:spPr>
+        <p:txBody>
+          <a:bodyPr wrap="square" lIns="0" tIns="0" rIns="0" bIns="0" rtlCol="0" anchor="ctr"/>
+          <a:lstStyle/>
+          <a:p>
+            <a:pPr algn="r" indent="0" marL="0">
+              <a:buNone/>
+            </a:pPr>
+            <a:r>
+              <a:rPr lang="en-US" sz="900" dirty="0">
+                <a:solidFill>
+                  <a:srgbClr val="6B7280"/>
+                </a:solidFill>
+                <a:latin typeface="Arial" pitchFamily="34" charset="0"/>
+                <a:ea typeface="Arial" pitchFamily="34" charset="-122"/>
+                <a:cs typeface="Arial" pitchFamily="34" charset="-120"/>
+              </a:rPr>
+              <a:t>Vertraulich · Oktober 2026  ·  LiveFX  ·  18</a:t>
+            </a:r>
+            <a:endParaRPr lang="en-US" sz="900" dirty="0"/>
+          </a:p>
+        </p:txBody>
+      </p:sp>
+      <p:sp>
+        <p:nvSpPr>
+          <p:cNvPr id="6" name="Shape 3"/>
+          <p:cNvSpPr/>
+          <p:nvPr/>
+        </p:nvSpPr>
+        <p:spPr>
+          <a:xfrm>
+            <a:off x="822960" y="1618488"/>
+            <a:ext cx="10545775" cy="0"/>
+          </a:xfrm>
+          <a:prstGeom prst="line">
+            <a:avLst/>
+          </a:prstGeom>
+          <a:noFill/>
+          <a:ln w="25400">
+            <a:solidFill>
+              <a:srgbClr val="2A2F3C"/>
+            </a:solidFill>
+            <a:prstDash val="solid"/>
+          </a:ln>
+        </p:spPr>
+      </p:sp>
+      <p:sp>
+        <p:nvSpPr>
+          <p:cNvPr id="7" name="Shape 4"/>
+          <p:cNvSpPr/>
+          <p:nvPr/>
+        </p:nvSpPr>
+        <p:spPr>
+          <a:xfrm>
+            <a:off x="640080" y="1444752"/>
+            <a:ext cx="2487854" cy="347472"/>
+          </a:xfrm>
+          <a:prstGeom prst="roundRect">
+            <a:avLst>
+              <a:gd name="adj" fmla="val 50000"/>
+            </a:avLst>
+          </a:prstGeom>
+          <a:solidFill>
+            <a:srgbClr val="1F2330"/>
+          </a:solidFill>
+          <a:ln w="12700">
+            <a:solidFill>
+              <a:srgbClr val="FF2D75"/>
+            </a:solidFill>
+            <a:prstDash val="solid"/>
+          </a:ln>
+        </p:spPr>
+      </p:sp>
+      <p:sp>
+        <p:nvSpPr>
+          <p:cNvPr id="8" name="Text 5"/>
+          <p:cNvSpPr txBox="1"/>
+          <p:nvPr/>
+        </p:nvSpPr>
+        <p:spPr>
+          <a:xfrm>
+            <a:off x="640080" y="1444752"/>
+            <a:ext cx="2487854" cy="347472"/>
+          </a:xfrm>
+          <a:prstGeom prst="rect">
+            <a:avLst/>
+          </a:prstGeom>
+          <a:noFill/>
+          <a:ln/>
+        </p:spPr>
+        <p:txBody>
+          <a:bodyPr wrap="square" lIns="0" tIns="0" rIns="0" bIns="0" rtlCol="0" anchor="ctr">
+            <a:normAutofit/>
+          </a:bodyPr>
+          <a:lstStyle/>
+          <a:p>
+            <a:pPr algn="ctr" indent="0" marL="0">
+              <a:buNone/>
+            </a:pPr>
+            <a:r>
+              <a:rPr lang="en-US" sz="1200" b="1" dirty="0">
+                <a:solidFill>
+                  <a:srgbClr val="FF2D75"/>
+                </a:solidFill>
+                <a:latin typeface="Arial" pitchFamily="34" charset="0"/>
+                <a:ea typeface="Arial" pitchFamily="34" charset="-122"/>
+                <a:cs typeface="Arial" pitchFamily="34" charset="-120"/>
+              </a:rPr>
+              <a:t>G0  ·  Monat 3</a:t>
+            </a:r>
+            <a:endParaRPr lang="en-US" sz="1200" dirty="0"/>
+          </a:p>
+        </p:txBody>
+      </p:sp>
+      <p:sp>
+        <p:nvSpPr>
+          <p:cNvPr id="9" name="Shape 6"/>
+          <p:cNvSpPr/>
+          <p:nvPr/>
+        </p:nvSpPr>
+        <p:spPr>
+          <a:xfrm>
+            <a:off x="548640" y="1938528"/>
+            <a:ext cx="2670734" cy="3703320"/>
+          </a:xfrm>
+          <a:prstGeom prst="roundRect">
+            <a:avLst>
+              <a:gd name="adj" fmla="val 4109"/>
+            </a:avLst>
+          </a:prstGeom>
+          <a:solidFill>
+            <a:srgbClr val="181B23"/>
+          </a:solidFill>
+          <a:ln w="12700">
+            <a:solidFill>
+              <a:srgbClr val="181B23"/>
+            </a:solidFill>
+            <a:prstDash val="solid"/>
+          </a:ln>
+        </p:spPr>
+      </p:sp>
+      <p:sp>
+        <p:nvSpPr>
+          <p:cNvPr id="10" name="Text 7"/>
+          <p:cNvSpPr txBox="1"/>
+          <p:nvPr/>
+        </p:nvSpPr>
+        <p:spPr>
+          <a:xfrm>
+            <a:off x="749808" y="2048256"/>
+            <a:ext cx="2268398" cy="365760"/>
+          </a:xfrm>
+          <a:prstGeom prst="rect">
+            <a:avLst/>
+          </a:prstGeom>
+          <a:noFill/>
+          <a:ln/>
+        </p:spPr>
+        <p:txBody>
+          <a:bodyPr wrap="square" lIns="0" tIns="0" rIns="0" bIns="0" rtlCol="0" anchor="t">
+            <a:normAutofit/>
+          </a:bodyPr>
+          <a:lstStyle/>
+          <a:p>
+            <a:pPr indent="0" marL="0">
+              <a:buNone/>
+            </a:pPr>
+            <a:r>
+              <a:rPr lang="en-US" sz="1500" b="1" dirty="0">
+                <a:solidFill>
+                  <a:srgbClr val="FF2D75"/>
+                </a:solidFill>
+                <a:latin typeface="Arial" pitchFamily="34" charset="0"/>
+                <a:ea typeface="Arial" pitchFamily="34" charset="-122"/>
+                <a:cs typeface="Arial" pitchFamily="34" charset="-120"/>
+              </a:rPr>
+              <a:t>Start</a:t>
+            </a:r>
+            <a:endParaRPr lang="en-US" sz="1500" dirty="0"/>
+          </a:p>
+        </p:txBody>
+      </p:sp>
+      <p:sp>
+        <p:nvSpPr>
+          <p:cNvPr id="11" name="Text 8"/>
+          <p:cNvSpPr txBox="1"/>
+          <p:nvPr/>
+        </p:nvSpPr>
+        <p:spPr>
+          <a:xfrm>
+            <a:off x="749808" y="2468880"/>
+            <a:ext cx="2268398" cy="2286000"/>
+          </a:xfrm>
+          <a:prstGeom prst="rect">
+            <a:avLst/>
+          </a:prstGeom>
+          <a:noFill/>
+          <a:ln/>
+        </p:spPr>
+        <p:txBody>
+          <a:bodyPr wrap="square" lIns="0" tIns="0" rIns="0" bIns="0" rtlCol="0" anchor="t">
+            <a:normAutofit/>
+          </a:bodyPr>
+          <a:lstStyle/>
+          <a:p>
+            <a:pPr marL="203200" indent="-203200">
+              <a:spcAft>
+                <a:spcPts val="500"/>
+              </a:spcAft>
+              <a:buSzPct val="100000"/>
+              <a:buChar char="•"/>
+            </a:pPr>
+            <a:r>
+              <a:rPr lang="en-US" sz="1150" dirty="0">
+                <a:solidFill>
+                  <a:srgbClr val="FFFFFF"/>
+                </a:solidFill>
+                <a:latin typeface="Arial" pitchFamily="34" charset="0"/>
+                <a:ea typeface="Arial" pitchFamily="34" charset="-122"/>
+                <a:cs typeface="Arial" pitchFamily="34" charset="-120"/>
+              </a:rPr>
+              <a:t>Pro-Abo live (Zahlung)</a:t>
+            </a:r>
+            <a:endParaRPr lang="en-US" sz="1150" dirty="0"/>
+          </a:p>
+          <a:p>
+            <a:pPr marL="203200" indent="-203200">
+              <a:spcAft>
+                <a:spcPts val="500"/>
+              </a:spcAft>
+              <a:buSzPct val="100000"/>
+              <a:buChar char="•"/>
+            </a:pPr>
+            <a:r>
+              <a:rPr lang="en-US" sz="1150" dirty="0">
+                <a:solidFill>
+                  <a:srgbClr val="FFFFFF"/>
+                </a:solidFill>
+                <a:latin typeface="Arial" pitchFamily="34" charset="0"/>
+                <a:ea typeface="Arial" pitchFamily="34" charset="-122"/>
+                <a:cs typeface="Arial" pitchFamily="34" charset="-120"/>
+              </a:rPr>
+              <a:t>Mobile-/Web-Entwickler:in an Bord</a:t>
+            </a:r>
+            <a:endParaRPr lang="en-US" sz="1150" dirty="0"/>
+          </a:p>
+        </p:txBody>
+      </p:sp>
+      <p:sp>
+        <p:nvSpPr>
+          <p:cNvPr id="12" name="Shape 9"/>
+          <p:cNvSpPr/>
+          <p:nvPr/>
+        </p:nvSpPr>
+        <p:spPr>
+          <a:xfrm>
+            <a:off x="749808" y="4846320"/>
+            <a:ext cx="2268398" cy="0"/>
+          </a:xfrm>
+          <a:prstGeom prst="line">
+            <a:avLst/>
+          </a:prstGeom>
+          <a:noFill/>
+          <a:ln w="12700">
+            <a:solidFill>
+              <a:srgbClr val="2A2F3C"/>
+            </a:solidFill>
+            <a:prstDash val="solid"/>
+          </a:ln>
+        </p:spPr>
+      </p:sp>
+      <p:sp>
+        <p:nvSpPr>
+          <p:cNvPr id="13" name="Text 10"/>
+          <p:cNvSpPr txBox="1"/>
+          <p:nvPr/>
+        </p:nvSpPr>
+        <p:spPr>
+          <a:xfrm>
+            <a:off x="749808" y="4910328"/>
+            <a:ext cx="2268398" cy="219456"/>
+          </a:xfrm>
+          <a:prstGeom prst="rect">
+            <a:avLst/>
+          </a:prstGeom>
+          <a:noFill/>
+          <a:ln/>
+        </p:spPr>
+        <p:txBody>
+          <a:bodyPr wrap="square" lIns="0" tIns="0" rIns="0" bIns="0" rtlCol="0" anchor="t">
+            <a:normAutofit/>
+          </a:bodyPr>
+          <a:lstStyle/>
+          <a:p>
+            <a:pPr indent="0" marL="0">
+              <a:buNone/>
+            </a:pPr>
+            <a:r>
+              <a:rPr lang="en-US" sz="950" b="1" spc="100" kern="0" dirty="0">
+                <a:solidFill>
+                  <a:srgbClr val="9AA3B5"/>
+                </a:solidFill>
+                <a:latin typeface="Arial" pitchFamily="34" charset="0"/>
+                <a:ea typeface="Arial" pitchFamily="34" charset="-122"/>
+                <a:cs typeface="Arial" pitchFamily="34" charset="-120"/>
+              </a:rPr>
+              <a:t>GIBT FREI</a:t>
+            </a:r>
+            <a:endParaRPr lang="en-US" sz="950" dirty="0"/>
+          </a:p>
+        </p:txBody>
+      </p:sp>
+      <p:sp>
+        <p:nvSpPr>
+          <p:cNvPr id="14" name="Text 11"/>
+          <p:cNvSpPr txBox="1"/>
+          <p:nvPr/>
+        </p:nvSpPr>
+        <p:spPr>
+          <a:xfrm>
+            <a:off x="749808" y="5148072"/>
+            <a:ext cx="2268398" cy="457200"/>
+          </a:xfrm>
+          <a:prstGeom prst="rect">
+            <a:avLst/>
+          </a:prstGeom>
+          <a:noFill/>
+          <a:ln/>
+        </p:spPr>
+        <p:txBody>
+          <a:bodyPr wrap="square" lIns="0" tIns="0" rIns="0" bIns="0" rtlCol="0" anchor="t">
+            <a:normAutofit/>
+          </a:bodyPr>
+          <a:lstStyle/>
+          <a:p>
+            <a:pPr indent="0" marL="0">
+              <a:buNone/>
+            </a:pPr>
+            <a:r>
+              <a:rPr lang="en-US" sz="1100" b="1" dirty="0">
+                <a:solidFill>
+                  <a:srgbClr val="FF2D75"/>
+                </a:solidFill>
+                <a:latin typeface="Arial" pitchFamily="34" charset="0"/>
+                <a:ea typeface="Arial" pitchFamily="34" charset="-122"/>
+                <a:cs typeface="Arial" pitchFamily="34" charset="-120"/>
+              </a:rPr>
+              <a:t>Budget Markteintritt Phase 2</a:t>
+            </a:r>
+            <a:endParaRPr lang="en-US" sz="1100" dirty="0"/>
+          </a:p>
+        </p:txBody>
+      </p:sp>
+      <p:sp>
+        <p:nvSpPr>
+          <p:cNvPr id="15" name="Shape 12"/>
+          <p:cNvSpPr/>
+          <p:nvPr/>
+        </p:nvSpPr>
+        <p:spPr>
+          <a:xfrm>
+            <a:off x="3447974" y="1444752"/>
+            <a:ext cx="2487854" cy="347472"/>
+          </a:xfrm>
+          <a:prstGeom prst="roundRect">
+            <a:avLst>
+              <a:gd name="adj" fmla="val 50000"/>
+            </a:avLst>
+          </a:prstGeom>
+          <a:solidFill>
+            <a:srgbClr val="1F2330"/>
+          </a:solidFill>
+          <a:ln w="12700">
+            <a:solidFill>
+              <a:srgbClr val="2DFFB5"/>
+            </a:solidFill>
+            <a:prstDash val="solid"/>
+          </a:ln>
+        </p:spPr>
+      </p:sp>
+      <p:sp>
+        <p:nvSpPr>
+          <p:cNvPr id="16" name="Text 13"/>
+          <p:cNvSpPr txBox="1"/>
+          <p:nvPr/>
+        </p:nvSpPr>
+        <p:spPr>
+          <a:xfrm>
+            <a:off x="3447974" y="1444752"/>
+            <a:ext cx="2487854" cy="347472"/>
+          </a:xfrm>
+          <a:prstGeom prst="rect">
+            <a:avLst/>
+          </a:prstGeom>
+          <a:noFill/>
+          <a:ln/>
+        </p:spPr>
+        <p:txBody>
+          <a:bodyPr wrap="square" lIns="0" tIns="0" rIns="0" bIns="0" rtlCol="0" anchor="ctr">
+            <a:normAutofit/>
+          </a:bodyPr>
+          <a:lstStyle/>
+          <a:p>
+            <a:pPr algn="ctr" indent="0" marL="0">
+              <a:buNone/>
+            </a:pPr>
+            <a:r>
+              <a:rPr lang="en-US" sz="1200" b="1" dirty="0">
+                <a:solidFill>
+                  <a:srgbClr val="2DFFB5"/>
+                </a:solidFill>
+                <a:latin typeface="Arial" pitchFamily="34" charset="0"/>
+                <a:ea typeface="Arial" pitchFamily="34" charset="-122"/>
+                <a:cs typeface="Arial" pitchFamily="34" charset="-120"/>
+              </a:rPr>
+              <a:t>G1  ·  Monat 6</a:t>
+            </a:r>
+            <a:endParaRPr lang="en-US" sz="1200" dirty="0"/>
+          </a:p>
+        </p:txBody>
+      </p:sp>
+      <p:sp>
+        <p:nvSpPr>
+          <p:cNvPr id="17" name="Shape 14"/>
+          <p:cNvSpPr/>
+          <p:nvPr/>
+        </p:nvSpPr>
+        <p:spPr>
+          <a:xfrm>
+            <a:off x="3356534" y="1938528"/>
+            <a:ext cx="2670734" cy="3703320"/>
+          </a:xfrm>
+          <a:prstGeom prst="roundRect">
+            <a:avLst>
+              <a:gd name="adj" fmla="val 4109"/>
+            </a:avLst>
+          </a:prstGeom>
+          <a:solidFill>
+            <a:srgbClr val="181B23"/>
+          </a:solidFill>
+          <a:ln w="12700">
+            <a:solidFill>
+              <a:srgbClr val="181B23"/>
+            </a:solidFill>
+            <a:prstDash val="solid"/>
+          </a:ln>
+        </p:spPr>
+      </p:sp>
+      <p:sp>
+        <p:nvSpPr>
+          <p:cNvPr id="18" name="Text 15"/>
+          <p:cNvSpPr txBox="1"/>
+          <p:nvPr/>
+        </p:nvSpPr>
+        <p:spPr>
+          <a:xfrm>
+            <a:off x="3557702" y="2048256"/>
+            <a:ext cx="2268398" cy="365760"/>
+          </a:xfrm>
+          <a:prstGeom prst="rect">
+            <a:avLst/>
+          </a:prstGeom>
+          <a:noFill/>
+          <a:ln/>
+        </p:spPr>
+        <p:txBody>
+          <a:bodyPr wrap="square" lIns="0" tIns="0" rIns="0" bIns="0" rtlCol="0" anchor="t">
+            <a:normAutofit/>
+          </a:bodyPr>
+          <a:lstStyle/>
+          <a:p>
+            <a:pPr indent="0" marL="0">
+              <a:buNone/>
+            </a:pPr>
+            <a:r>
+              <a:rPr lang="en-US" sz="1500" b="1" dirty="0">
+                <a:solidFill>
+                  <a:srgbClr val="2DFFB5"/>
+                </a:solidFill>
+                <a:latin typeface="Arial" pitchFamily="34" charset="0"/>
+                <a:ea typeface="Arial" pitchFamily="34" charset="-122"/>
+                <a:cs typeface="Arial" pitchFamily="34" charset="-120"/>
+              </a:rPr>
+              <a:t>Aktivierung</a:t>
+            </a:r>
+            <a:endParaRPr lang="en-US" sz="1500" dirty="0"/>
+          </a:p>
+        </p:txBody>
+      </p:sp>
+      <p:sp>
+        <p:nvSpPr>
+          <p:cNvPr id="19" name="Text 16"/>
+          <p:cNvSpPr txBox="1"/>
+          <p:nvPr/>
+        </p:nvSpPr>
+        <p:spPr>
+          <a:xfrm>
+            <a:off x="3557702" y="2468880"/>
+            <a:ext cx="2268398" cy="2286000"/>
+          </a:xfrm>
+          <a:prstGeom prst="rect">
+            <a:avLst/>
+          </a:prstGeom>
+          <a:noFill/>
+          <a:ln/>
+        </p:spPr>
+        <p:txBody>
+          <a:bodyPr wrap="square" lIns="0" tIns="0" rIns="0" bIns="0" rtlCol="0" anchor="t">
+            <a:normAutofit/>
+          </a:bodyPr>
+          <a:lstStyle/>
+          <a:p>
+            <a:pPr marL="203200" indent="-203200">
+              <a:spcAft>
+                <a:spcPts val="500"/>
+              </a:spcAft>
+              <a:buSzPct val="100000"/>
+              <a:buChar char="•"/>
+            </a:pPr>
+            <a:r>
+              <a:rPr lang="en-US" sz="1150" dirty="0">
+                <a:solidFill>
+                  <a:srgbClr val="FFFFFF"/>
+                </a:solidFill>
+                <a:latin typeface="Arial" pitchFamily="34" charset="0"/>
+                <a:ea typeface="Arial" pitchFamily="34" charset="-122"/>
+                <a:cs typeface="Arial" pitchFamily="34" charset="-120"/>
+              </a:rPr>
+              <a:t>10.000 registrierte Nutzer (Schwelle 4.000)</a:t>
+            </a:r>
+            <a:endParaRPr lang="en-US" sz="1150" dirty="0"/>
+          </a:p>
+          <a:p>
+            <a:pPr marL="203200" indent="-203200">
+              <a:spcAft>
+                <a:spcPts val="500"/>
+              </a:spcAft>
+              <a:buSzPct val="100000"/>
+              <a:buChar char="•"/>
+            </a:pPr>
+            <a:r>
+              <a:rPr lang="en-US" sz="1150" dirty="0">
+                <a:solidFill>
+                  <a:srgbClr val="FFFFFF"/>
+                </a:solidFill>
+                <a:latin typeface="Arial" pitchFamily="34" charset="0"/>
+                <a:ea typeface="Arial" pitchFamily="34" charset="-122"/>
+                <a:cs typeface="Arial" pitchFamily="34" charset="-120"/>
+              </a:rPr>
+              <a:t>400 zahlende Pro (Schwelle 120)</a:t>
+            </a:r>
+            <a:endParaRPr lang="en-US" sz="1150" dirty="0"/>
+          </a:p>
+          <a:p>
+            <a:pPr marL="203200" indent="-203200">
+              <a:spcAft>
+                <a:spcPts val="500"/>
+              </a:spcAft>
+              <a:buSzPct val="100000"/>
+              <a:buChar char="•"/>
+            </a:pPr>
+            <a:r>
+              <a:rPr lang="en-US" sz="1150" dirty="0">
+                <a:solidFill>
+                  <a:srgbClr val="FFFFFF"/>
+                </a:solidFill>
+                <a:latin typeface="Arial" pitchFamily="34" charset="0"/>
+                <a:ea typeface="Arial" pitchFamily="34" charset="-122"/>
+                <a:cs typeface="Arial" pitchFamily="34" charset="-120"/>
+              </a:rPr>
+              <a:t>20 Beta-Creator TR/DE, 10–20 Botschafter:innen</a:t>
+            </a:r>
+            <a:endParaRPr lang="en-US" sz="1150" dirty="0"/>
+          </a:p>
+          <a:p>
+            <a:pPr marL="203200" indent="-203200">
+              <a:spcAft>
+                <a:spcPts val="500"/>
+              </a:spcAft>
+              <a:buSzPct val="100000"/>
+              <a:buChar char="•"/>
+            </a:pPr>
+            <a:r>
+              <a:rPr lang="en-US" sz="1150" dirty="0">
+                <a:solidFill>
+                  <a:srgbClr val="FFFFFF"/>
+                </a:solidFill>
+                <a:latin typeface="Arial" pitchFamily="34" charset="0"/>
+                <a:ea typeface="Arial" pitchFamily="34" charset="-122"/>
+                <a:cs typeface="Arial" pitchFamily="34" charset="-120"/>
+              </a:rPr>
+              <a:t>WortBild mit 300 Wörtern</a:t>
+            </a:r>
+            <a:endParaRPr lang="en-US" sz="1150" dirty="0"/>
+          </a:p>
+          <a:p>
+            <a:pPr marL="203200" indent="-203200">
+              <a:spcAft>
+                <a:spcPts val="500"/>
+              </a:spcAft>
+              <a:buSzPct val="100000"/>
+              <a:buChar char="•"/>
+            </a:pPr>
+            <a:r>
+              <a:rPr lang="en-US" sz="1150" dirty="0">
+                <a:solidFill>
+                  <a:srgbClr val="FFFFFF"/>
+                </a:solidFill>
+                <a:latin typeface="Arial" pitchFamily="34" charset="0"/>
+                <a:ea typeface="Arial" pitchFamily="34" charset="-122"/>
+                <a:cs typeface="Arial" pitchFamily="34" charset="-120"/>
+              </a:rPr>
+              <a:t>Woche-4-Retention ≥ 30 %</a:t>
+            </a:r>
+            <a:endParaRPr lang="en-US" sz="1150" dirty="0"/>
+          </a:p>
+        </p:txBody>
+      </p:sp>
+      <p:sp>
+        <p:nvSpPr>
+          <p:cNvPr id="20" name="Shape 17"/>
+          <p:cNvSpPr/>
+          <p:nvPr/>
+        </p:nvSpPr>
+        <p:spPr>
+          <a:xfrm>
+            <a:off x="3557702" y="4846320"/>
+            <a:ext cx="2268398" cy="0"/>
+          </a:xfrm>
+          <a:prstGeom prst="line">
+            <a:avLst/>
+          </a:prstGeom>
+          <a:noFill/>
+          <a:ln w="12700">
+            <a:solidFill>
+              <a:srgbClr val="2A2F3C"/>
+            </a:solidFill>
+            <a:prstDash val="solid"/>
+          </a:ln>
+        </p:spPr>
+      </p:sp>
+      <p:sp>
+        <p:nvSpPr>
+          <p:cNvPr id="21" name="Text 18"/>
+          <p:cNvSpPr txBox="1"/>
+          <p:nvPr/>
+        </p:nvSpPr>
+        <p:spPr>
+          <a:xfrm>
+            <a:off x="3557702" y="4910328"/>
+            <a:ext cx="2268398" cy="219456"/>
+          </a:xfrm>
+          <a:prstGeom prst="rect">
+            <a:avLst/>
+          </a:prstGeom>
+          <a:noFill/>
+          <a:ln/>
+        </p:spPr>
+        <p:txBody>
+          <a:bodyPr wrap="square" lIns="0" tIns="0" rIns="0" bIns="0" rtlCol="0" anchor="t">
+            <a:normAutofit/>
+          </a:bodyPr>
+          <a:lstStyle/>
+          <a:p>
+            <a:pPr indent="0" marL="0">
+              <a:buNone/>
+            </a:pPr>
+            <a:r>
+              <a:rPr lang="en-US" sz="950" b="1" spc="100" kern="0" dirty="0">
+                <a:solidFill>
+                  <a:srgbClr val="9AA3B5"/>
+                </a:solidFill>
+                <a:latin typeface="Arial" pitchFamily="34" charset="0"/>
+                <a:ea typeface="Arial" pitchFamily="34" charset="-122"/>
+                <a:cs typeface="Arial" pitchFamily="34" charset="-120"/>
+              </a:rPr>
+              <a:t>GIBT FREI</a:t>
+            </a:r>
+            <a:endParaRPr lang="en-US" sz="950" dirty="0"/>
+          </a:p>
+        </p:txBody>
+      </p:sp>
+      <p:sp>
+        <p:nvSpPr>
+          <p:cNvPr id="22" name="Text 19"/>
+          <p:cNvSpPr txBox="1"/>
+          <p:nvPr/>
+        </p:nvSpPr>
+        <p:spPr>
+          <a:xfrm>
+            <a:off x="3557702" y="5148072"/>
+            <a:ext cx="2268398" cy="457200"/>
+          </a:xfrm>
+          <a:prstGeom prst="rect">
+            <a:avLst/>
+          </a:prstGeom>
+          <a:noFill/>
+          <a:ln/>
+        </p:spPr>
+        <p:txBody>
+          <a:bodyPr wrap="square" lIns="0" tIns="0" rIns="0" bIns="0" rtlCol="0" anchor="t">
+            <a:normAutofit/>
+          </a:bodyPr>
+          <a:lstStyle/>
+          <a:p>
+            <a:pPr indent="0" marL="0">
+              <a:buNone/>
+            </a:pPr>
+            <a:r>
+              <a:rPr lang="en-US" sz="1100" b="1" dirty="0">
+                <a:solidFill>
+                  <a:srgbClr val="2DFFB5"/>
+                </a:solidFill>
+                <a:latin typeface="Arial" pitchFamily="34" charset="0"/>
+                <a:ea typeface="Arial" pitchFamily="34" charset="-122"/>
+                <a:cs typeface="Arial" pitchFamily="34" charset="-120"/>
+              </a:rPr>
+              <a:t>Mobile-App/PWA-Release</a:t>
+            </a:r>
+            <a:endParaRPr lang="en-US" sz="1100" dirty="0"/>
+          </a:p>
+        </p:txBody>
+      </p:sp>
+      <p:sp>
+        <p:nvSpPr>
+          <p:cNvPr id="23" name="Shape 20"/>
+          <p:cNvSpPr/>
+          <p:nvPr/>
+        </p:nvSpPr>
+        <p:spPr>
+          <a:xfrm>
+            <a:off x="6255868" y="1444752"/>
+            <a:ext cx="2487854" cy="347472"/>
+          </a:xfrm>
+          <a:prstGeom prst="roundRect">
+            <a:avLst>
+              <a:gd name="adj" fmla="val 50000"/>
+            </a:avLst>
+          </a:prstGeom>
+          <a:solidFill>
+            <a:srgbClr val="1F2330"/>
+          </a:solidFill>
+          <a:ln w="12700">
+            <a:solidFill>
+              <a:srgbClr val="FFD166"/>
+            </a:solidFill>
+            <a:prstDash val="solid"/>
+          </a:ln>
+        </p:spPr>
+      </p:sp>
+      <p:sp>
+        <p:nvSpPr>
+          <p:cNvPr id="24" name="Text 21"/>
+          <p:cNvSpPr txBox="1"/>
+          <p:nvPr/>
+        </p:nvSpPr>
+        <p:spPr>
+          <a:xfrm>
+            <a:off x="6255868" y="1444752"/>
+            <a:ext cx="2487854" cy="347472"/>
+          </a:xfrm>
+          <a:prstGeom prst="rect">
+            <a:avLst/>
+          </a:prstGeom>
+          <a:noFill/>
+          <a:ln/>
+        </p:spPr>
+        <p:txBody>
+          <a:bodyPr wrap="square" lIns="0" tIns="0" rIns="0" bIns="0" rtlCol="0" anchor="ctr">
+            <a:normAutofit/>
+          </a:bodyPr>
+          <a:lstStyle/>
+          <a:p>
+            <a:pPr algn="ctr" indent="0" marL="0">
+              <a:buNone/>
+            </a:pPr>
+            <a:r>
+              <a:rPr lang="en-US" sz="1200" b="1" dirty="0">
+                <a:solidFill>
+                  <a:srgbClr val="FFD166"/>
+                </a:solidFill>
+                <a:latin typeface="Arial" pitchFamily="34" charset="0"/>
+                <a:ea typeface="Arial" pitchFamily="34" charset="-122"/>
+                <a:cs typeface="Arial" pitchFamily="34" charset="-120"/>
+              </a:rPr>
+              <a:t>G2a  ·  Monat 12</a:t>
+            </a:r>
+            <a:endParaRPr lang="en-US" sz="1200" dirty="0"/>
+          </a:p>
+        </p:txBody>
+      </p:sp>
+      <p:sp>
+        <p:nvSpPr>
+          <p:cNvPr id="25" name="Shape 22"/>
+          <p:cNvSpPr/>
+          <p:nvPr/>
+        </p:nvSpPr>
+        <p:spPr>
+          <a:xfrm>
+            <a:off x="6164428" y="1938528"/>
+            <a:ext cx="2670734" cy="3703320"/>
+          </a:xfrm>
+          <a:prstGeom prst="roundRect">
+            <a:avLst>
+              <a:gd name="adj" fmla="val 4109"/>
+            </a:avLst>
+          </a:prstGeom>
+          <a:solidFill>
+            <a:srgbClr val="181B23"/>
+          </a:solidFill>
+          <a:ln w="12700">
+            <a:solidFill>
+              <a:srgbClr val="181B23"/>
+            </a:solidFill>
+            <a:prstDash val="solid"/>
+          </a:ln>
+        </p:spPr>
+      </p:sp>
+      <p:sp>
+        <p:nvSpPr>
+          <p:cNvPr id="26" name="Text 23"/>
+          <p:cNvSpPr txBox="1"/>
+          <p:nvPr/>
+        </p:nvSpPr>
+        <p:spPr>
+          <a:xfrm>
+            <a:off x="6365596" y="2048256"/>
+            <a:ext cx="2268398" cy="365760"/>
+          </a:xfrm>
+          <a:prstGeom prst="rect">
+            <a:avLst/>
+          </a:prstGeom>
+          <a:noFill/>
+          <a:ln/>
+        </p:spPr>
+        <p:txBody>
+          <a:bodyPr wrap="square" lIns="0" tIns="0" rIns="0" bIns="0" rtlCol="0" anchor="t">
+            <a:normAutofit/>
+          </a:bodyPr>
+          <a:lstStyle/>
+          <a:p>
+            <a:pPr indent="0" marL="0">
+              <a:buNone/>
+            </a:pPr>
+            <a:r>
+              <a:rPr lang="en-US" sz="1500" b="1" dirty="0">
+                <a:solidFill>
+                  <a:srgbClr val="FFD166"/>
+                </a:solidFill>
+                <a:latin typeface="Arial" pitchFamily="34" charset="0"/>
+                <a:ea typeface="Arial" pitchFamily="34" charset="-122"/>
+                <a:cs typeface="Arial" pitchFamily="34" charset="-120"/>
+              </a:rPr>
+              <a:t>Traktion</a:t>
+            </a:r>
+            <a:endParaRPr lang="en-US" sz="1500" dirty="0"/>
+          </a:p>
+        </p:txBody>
+      </p:sp>
+      <p:sp>
+        <p:nvSpPr>
+          <p:cNvPr id="27" name="Text 24"/>
+          <p:cNvSpPr txBox="1"/>
+          <p:nvPr/>
+        </p:nvSpPr>
+        <p:spPr>
+          <a:xfrm>
+            <a:off x="6365596" y="2468880"/>
+            <a:ext cx="2268398" cy="2286000"/>
+          </a:xfrm>
+          <a:prstGeom prst="rect">
+            <a:avLst/>
+          </a:prstGeom>
+          <a:noFill/>
+          <a:ln/>
+        </p:spPr>
+        <p:txBody>
+          <a:bodyPr wrap="square" lIns="0" tIns="0" rIns="0" bIns="0" rtlCol="0" anchor="t">
+            <a:normAutofit/>
+          </a:bodyPr>
+          <a:lstStyle/>
+          <a:p>
+            <a:pPr marL="203200" indent="-203200">
+              <a:spcAft>
+                <a:spcPts val="500"/>
+              </a:spcAft>
+              <a:buSzPct val="100000"/>
+              <a:buChar char="•"/>
+            </a:pPr>
+            <a:r>
+              <a:rPr lang="en-US" sz="1150" dirty="0">
+                <a:solidFill>
+                  <a:srgbClr val="FFFFFF"/>
+                </a:solidFill>
+                <a:latin typeface="Arial" pitchFamily="34" charset="0"/>
+                <a:ea typeface="Arial" pitchFamily="34" charset="-122"/>
+                <a:cs typeface="Arial" pitchFamily="34" charset="-120"/>
+              </a:rPr>
+              <a:t>20.000 Nutzer (Schwelle 8.000)</a:t>
+            </a:r>
+            <a:endParaRPr lang="en-US" sz="1150" dirty="0"/>
+          </a:p>
+          <a:p>
+            <a:pPr marL="203200" indent="-203200">
+              <a:spcAft>
+                <a:spcPts val="500"/>
+              </a:spcAft>
+              <a:buSzPct val="100000"/>
+              <a:buChar char="•"/>
+            </a:pPr>
+            <a:r>
+              <a:rPr lang="en-US" sz="1150" dirty="0">
+                <a:solidFill>
+                  <a:srgbClr val="FFFFFF"/>
+                </a:solidFill>
+                <a:latin typeface="Arial" pitchFamily="34" charset="0"/>
+                <a:ea typeface="Arial" pitchFamily="34" charset="-122"/>
+                <a:cs typeface="Arial" pitchFamily="34" charset="-120"/>
+              </a:rPr>
+              <a:t>800 zahlende Pro (Schwelle 240)</a:t>
+            </a:r>
+            <a:endParaRPr lang="en-US" sz="1150" dirty="0"/>
+          </a:p>
+          <a:p>
+            <a:pPr marL="203200" indent="-203200">
+              <a:spcAft>
+                <a:spcPts val="500"/>
+              </a:spcAft>
+              <a:buSzPct val="100000"/>
+              <a:buChar char="•"/>
+            </a:pPr>
+            <a:r>
+              <a:rPr lang="en-US" sz="1150" dirty="0">
+                <a:solidFill>
+                  <a:srgbClr val="FFFFFF"/>
+                </a:solidFill>
+                <a:latin typeface="Arial" pitchFamily="34" charset="0"/>
+                <a:ea typeface="Arial" pitchFamily="34" charset="-122"/>
+                <a:cs typeface="Arial" pitchFamily="34" charset="-120"/>
+              </a:rPr>
+              <a:t>MRR 8.073 € (Schwelle 2.500 €)</a:t>
+            </a:r>
+            <a:endParaRPr lang="en-US" sz="1150" dirty="0"/>
+          </a:p>
+          <a:p>
+            <a:pPr marL="203200" indent="-203200">
+              <a:spcAft>
+                <a:spcPts val="500"/>
+              </a:spcAft>
+              <a:buSzPct val="100000"/>
+              <a:buChar char="•"/>
+            </a:pPr>
+            <a:r>
+              <a:rPr lang="en-US" sz="1150" dirty="0">
+                <a:solidFill>
+                  <a:srgbClr val="FFFFFF"/>
+                </a:solidFill>
+                <a:latin typeface="Arial" pitchFamily="34" charset="0"/>
+                <a:ea typeface="Arial" pitchFamily="34" charset="-122"/>
+                <a:cs typeface="Arial" pitchFamily="34" charset="-120"/>
+              </a:rPr>
+              <a:t>1 Plattform- oder Bildungspilot; WortBild in ≥ 3 Kursen/Klassen</a:t>
+            </a:r>
+            <a:endParaRPr lang="en-US" sz="1150" dirty="0"/>
+          </a:p>
+        </p:txBody>
+      </p:sp>
+      <p:sp>
+        <p:nvSpPr>
+          <p:cNvPr id="28" name="Shape 25"/>
+          <p:cNvSpPr/>
+          <p:nvPr/>
+        </p:nvSpPr>
+        <p:spPr>
+          <a:xfrm>
+            <a:off x="6365596" y="4846320"/>
+            <a:ext cx="2268398" cy="0"/>
+          </a:xfrm>
+          <a:prstGeom prst="line">
+            <a:avLst/>
+          </a:prstGeom>
+          <a:noFill/>
+          <a:ln w="12700">
+            <a:solidFill>
+              <a:srgbClr val="2A2F3C"/>
+            </a:solidFill>
+            <a:prstDash val="solid"/>
+          </a:ln>
+        </p:spPr>
+      </p:sp>
+      <p:sp>
+        <p:nvSpPr>
+          <p:cNvPr id="29" name="Text 26"/>
+          <p:cNvSpPr txBox="1"/>
+          <p:nvPr/>
+        </p:nvSpPr>
+        <p:spPr>
+          <a:xfrm>
+            <a:off x="6365596" y="4910328"/>
+            <a:ext cx="2268398" cy="219456"/>
+          </a:xfrm>
+          <a:prstGeom prst="rect">
+            <a:avLst/>
+          </a:prstGeom>
+          <a:noFill/>
+          <a:ln/>
+        </p:spPr>
+        <p:txBody>
+          <a:bodyPr wrap="square" lIns="0" tIns="0" rIns="0" bIns="0" rtlCol="0" anchor="t">
+            <a:normAutofit/>
+          </a:bodyPr>
+          <a:lstStyle/>
+          <a:p>
+            <a:pPr indent="0" marL="0">
+              <a:buNone/>
+            </a:pPr>
+            <a:r>
+              <a:rPr lang="en-US" sz="950" b="1" spc="100" kern="0" dirty="0">
+                <a:solidFill>
+                  <a:srgbClr val="9AA3B5"/>
+                </a:solidFill>
+                <a:latin typeface="Arial" pitchFamily="34" charset="0"/>
+                <a:ea typeface="Arial" pitchFamily="34" charset="-122"/>
+                <a:cs typeface="Arial" pitchFamily="34" charset="-120"/>
+              </a:rPr>
+              <a:t>GIBT FREI</a:t>
+            </a:r>
+            <a:endParaRPr lang="en-US" sz="950" dirty="0"/>
+          </a:p>
+        </p:txBody>
+      </p:sp>
+      <p:sp>
+        <p:nvSpPr>
+          <p:cNvPr id="30" name="Text 27"/>
+          <p:cNvSpPr txBox="1"/>
+          <p:nvPr/>
+        </p:nvSpPr>
+        <p:spPr>
+          <a:xfrm>
+            <a:off x="6365596" y="5148072"/>
+            <a:ext cx="2268398" cy="457200"/>
+          </a:xfrm>
+          <a:prstGeom prst="rect">
+            <a:avLst/>
+          </a:prstGeom>
+          <a:noFill/>
+          <a:ln/>
+        </p:spPr>
+        <p:txBody>
+          <a:bodyPr wrap="square" lIns="0" tIns="0" rIns="0" bIns="0" rtlCol="0" anchor="t">
+            <a:normAutofit/>
+          </a:bodyPr>
+          <a:lstStyle/>
+          <a:p>
+            <a:pPr indent="0" marL="0">
+              <a:buNone/>
+            </a:pPr>
+            <a:r>
+              <a:rPr lang="en-US" sz="1100" b="1" dirty="0">
+                <a:solidFill>
+                  <a:srgbClr val="FFD166"/>
+                </a:solidFill>
+                <a:latin typeface="Arial" pitchFamily="34" charset="0"/>
+                <a:ea typeface="Arial" pitchFamily="34" charset="-122"/>
+                <a:cs typeface="Arial" pitchFamily="34" charset="-120"/>
+              </a:rPr>
+              <a:t>DE/EN-Ausbau, Plattform-Gespräche</a:t>
+            </a:r>
+            <a:endParaRPr lang="en-US" sz="1100" dirty="0"/>
+          </a:p>
+        </p:txBody>
+      </p:sp>
+      <p:sp>
+        <p:nvSpPr>
+          <p:cNvPr id="31" name="Shape 28"/>
+          <p:cNvSpPr/>
+          <p:nvPr/>
+        </p:nvSpPr>
+        <p:spPr>
+          <a:xfrm>
+            <a:off x="9063761" y="1444752"/>
+            <a:ext cx="2487854" cy="347472"/>
+          </a:xfrm>
+          <a:prstGeom prst="roundRect">
+            <a:avLst>
+              <a:gd name="adj" fmla="val 50000"/>
+            </a:avLst>
+          </a:prstGeom>
+          <a:solidFill>
+            <a:srgbClr val="1F2330"/>
+          </a:solidFill>
+          <a:ln w="12700">
+            <a:solidFill>
+              <a:srgbClr val="5AD1FF"/>
+            </a:solidFill>
+            <a:prstDash val="solid"/>
+          </a:ln>
+        </p:spPr>
+      </p:sp>
+      <p:sp>
+        <p:nvSpPr>
+          <p:cNvPr id="32" name="Text 29"/>
+          <p:cNvSpPr txBox="1"/>
+          <p:nvPr/>
+        </p:nvSpPr>
+        <p:spPr>
+          <a:xfrm>
+            <a:off x="9063761" y="1444752"/>
+            <a:ext cx="2487854" cy="347472"/>
+          </a:xfrm>
+          <a:prstGeom prst="rect">
+            <a:avLst/>
+          </a:prstGeom>
+          <a:noFill/>
+          <a:ln/>
+        </p:spPr>
+        <p:txBody>
+          <a:bodyPr wrap="square" lIns="0" tIns="0" rIns="0" bIns="0" rtlCol="0" anchor="ctr">
+            <a:normAutofit/>
+          </a:bodyPr>
+          <a:lstStyle/>
+          <a:p>
+            <a:pPr algn="ctr" indent="0" marL="0">
+              <a:buNone/>
+            </a:pPr>
+            <a:r>
+              <a:rPr lang="en-US" sz="1200" b="1" dirty="0">
+                <a:solidFill>
+                  <a:srgbClr val="5AD1FF"/>
+                </a:solidFill>
+                <a:latin typeface="Arial" pitchFamily="34" charset="0"/>
+                <a:ea typeface="Arial" pitchFamily="34" charset="-122"/>
+                <a:cs typeface="Arial" pitchFamily="34" charset="-120"/>
+              </a:rPr>
+              <a:t>G2  ·  Monat 18</a:t>
+            </a:r>
+            <a:endParaRPr lang="en-US" sz="1200" dirty="0"/>
+          </a:p>
+        </p:txBody>
+      </p:sp>
+      <p:sp>
+        <p:nvSpPr>
+          <p:cNvPr id="33" name="Shape 30"/>
+          <p:cNvSpPr/>
+          <p:nvPr/>
+        </p:nvSpPr>
+        <p:spPr>
+          <a:xfrm>
+            <a:off x="8972321" y="1938528"/>
+            <a:ext cx="2670734" cy="3703320"/>
+          </a:xfrm>
+          <a:prstGeom prst="roundRect">
+            <a:avLst>
+              <a:gd name="adj" fmla="val 4109"/>
+            </a:avLst>
+          </a:prstGeom>
+          <a:solidFill>
+            <a:srgbClr val="181B23"/>
+          </a:solidFill>
+          <a:ln w="12700">
+            <a:solidFill>
+              <a:srgbClr val="181B23"/>
+            </a:solidFill>
+            <a:prstDash val="solid"/>
+          </a:ln>
+        </p:spPr>
+      </p:sp>
+      <p:sp>
+        <p:nvSpPr>
+          <p:cNvPr id="34" name="Text 31"/>
+          <p:cNvSpPr txBox="1"/>
+          <p:nvPr/>
+        </p:nvSpPr>
+        <p:spPr>
+          <a:xfrm>
+            <a:off x="9173489" y="2048256"/>
+            <a:ext cx="2268398" cy="365760"/>
+          </a:xfrm>
+          <a:prstGeom prst="rect">
+            <a:avLst/>
+          </a:prstGeom>
+          <a:noFill/>
+          <a:ln/>
+        </p:spPr>
+        <p:txBody>
+          <a:bodyPr wrap="square" lIns="0" tIns="0" rIns="0" bIns="0" rtlCol="0" anchor="t">
+            <a:normAutofit/>
+          </a:bodyPr>
+          <a:lstStyle/>
+          <a:p>
+            <a:pPr indent="0" marL="0">
+              <a:buNone/>
+            </a:pPr>
+            <a:r>
+              <a:rPr lang="en-US" sz="1500" b="1" dirty="0">
+                <a:solidFill>
+                  <a:srgbClr val="5AD1FF"/>
+                </a:solidFill>
+                <a:latin typeface="Arial" pitchFamily="34" charset="0"/>
+                <a:ea typeface="Arial" pitchFamily="34" charset="-122"/>
+                <a:cs typeface="Arial" pitchFamily="34" charset="-120"/>
+              </a:rPr>
+              <a:t>Folgerunde</a:t>
+            </a:r>
+            <a:endParaRPr lang="en-US" sz="1500" dirty="0"/>
+          </a:p>
+        </p:txBody>
+      </p:sp>
+      <p:sp>
+        <p:nvSpPr>
+          <p:cNvPr id="35" name="Text 32"/>
+          <p:cNvSpPr txBox="1"/>
+          <p:nvPr/>
+        </p:nvSpPr>
+        <p:spPr>
+          <a:xfrm>
+            <a:off x="9173489" y="2468880"/>
+            <a:ext cx="2268398" cy="2286000"/>
+          </a:xfrm>
+          <a:prstGeom prst="rect">
+            <a:avLst/>
+          </a:prstGeom>
+          <a:noFill/>
+          <a:ln/>
+        </p:spPr>
+        <p:txBody>
+          <a:bodyPr wrap="square" lIns="0" tIns="0" rIns="0" bIns="0" rtlCol="0" anchor="t">
+            <a:normAutofit/>
+          </a:bodyPr>
+          <a:lstStyle/>
+          <a:p>
+            <a:pPr marL="203200" indent="-203200">
+              <a:spcAft>
+                <a:spcPts val="500"/>
+              </a:spcAft>
+              <a:buSzPct val="100000"/>
+              <a:buChar char="•"/>
+            </a:pPr>
+            <a:r>
+              <a:rPr lang="en-US" sz="1150" dirty="0">
+                <a:solidFill>
+                  <a:srgbClr val="FFFFFF"/>
+                </a:solidFill>
+                <a:latin typeface="Arial" pitchFamily="34" charset="0"/>
+                <a:ea typeface="Arial" pitchFamily="34" charset="-122"/>
+                <a:cs typeface="Arial" pitchFamily="34" charset="-120"/>
+              </a:rPr>
+              <a:t>50.000 Nutzer (Schwelle 19.000)</a:t>
+            </a:r>
+            <a:endParaRPr lang="en-US" sz="1150" dirty="0"/>
+          </a:p>
+          <a:p>
+            <a:pPr marL="203200" indent="-203200">
+              <a:spcAft>
+                <a:spcPts val="500"/>
+              </a:spcAft>
+              <a:buSzPct val="100000"/>
+              <a:buChar char="•"/>
+            </a:pPr>
+            <a:r>
+              <a:rPr lang="en-US" sz="1150" dirty="0">
+                <a:solidFill>
+                  <a:srgbClr val="FFFFFF"/>
+                </a:solidFill>
+                <a:latin typeface="Arial" pitchFamily="34" charset="0"/>
+                <a:ea typeface="Arial" pitchFamily="34" charset="-122"/>
+                <a:cs typeface="Arial" pitchFamily="34" charset="-120"/>
+              </a:rPr>
+              <a:t>2.000 zahlende Pro (Schwelle 570)</a:t>
+            </a:r>
+            <a:endParaRPr lang="en-US" sz="1150" dirty="0"/>
+          </a:p>
+          <a:p>
+            <a:pPr marL="203200" indent="-203200">
+              <a:spcAft>
+                <a:spcPts val="500"/>
+              </a:spcAft>
+              <a:buSzPct val="100000"/>
+              <a:buChar char="•"/>
+            </a:pPr>
+            <a:r>
+              <a:rPr lang="en-US" sz="1150" dirty="0">
+                <a:solidFill>
+                  <a:srgbClr val="FFFFFF"/>
+                </a:solidFill>
+                <a:latin typeface="Arial" pitchFamily="34" charset="0"/>
+                <a:ea typeface="Arial" pitchFamily="34" charset="-122"/>
+                <a:cs typeface="Arial" pitchFamily="34" charset="-120"/>
+              </a:rPr>
+              <a:t>MRR 22.586 € (Schwelle 6.495 €)</a:t>
+            </a:r>
+            <a:endParaRPr lang="en-US" sz="1150" dirty="0"/>
+          </a:p>
+          <a:p>
+            <a:pPr marL="203200" indent="-203200">
+              <a:spcAft>
+                <a:spcPts val="500"/>
+              </a:spcAft>
+              <a:buSzPct val="100000"/>
+              <a:buChar char="•"/>
+            </a:pPr>
+            <a:r>
+              <a:rPr lang="en-US" sz="1150" dirty="0">
+                <a:solidFill>
+                  <a:srgbClr val="FFFFFF"/>
+                </a:solidFill>
+                <a:latin typeface="Arial" pitchFamily="34" charset="0"/>
+                <a:ea typeface="Arial" pitchFamily="34" charset="-122"/>
+                <a:cs typeface="Arial" pitchFamily="34" charset="-120"/>
+              </a:rPr>
+              <a:t>Monat-3-Retention Pro ≥ 75 %; Conversion ≥ 3 % / 4 %</a:t>
+            </a:r>
+            <a:endParaRPr lang="en-US" sz="1150" dirty="0"/>
+          </a:p>
+          <a:p>
+            <a:pPr marL="203200" indent="-203200">
+              <a:spcAft>
+                <a:spcPts val="500"/>
+              </a:spcAft>
+              <a:buSzPct val="100000"/>
+              <a:buChar char="•"/>
+            </a:pPr>
+            <a:r>
+              <a:rPr lang="en-US" sz="1150" dirty="0">
+                <a:solidFill>
+                  <a:srgbClr val="FFFFFF"/>
+                </a:solidFill>
+                <a:latin typeface="Arial" pitchFamily="34" charset="0"/>
+                <a:ea typeface="Arial" pitchFamily="34" charset="-122"/>
+                <a:cs typeface="Arial" pitchFamily="34" charset="-120"/>
+              </a:rPr>
+              <a:t>≥ 5 zahlende Schulen oder Kurse</a:t>
+            </a:r>
+            <a:endParaRPr lang="en-US" sz="1150" dirty="0"/>
+          </a:p>
+        </p:txBody>
+      </p:sp>
+      <p:sp>
+        <p:nvSpPr>
+          <p:cNvPr id="36" name="Shape 33"/>
+          <p:cNvSpPr/>
+          <p:nvPr/>
+        </p:nvSpPr>
+        <p:spPr>
+          <a:xfrm>
+            <a:off x="9173489" y="4846320"/>
+            <a:ext cx="2268398" cy="0"/>
+          </a:xfrm>
+          <a:prstGeom prst="line">
+            <a:avLst/>
+          </a:prstGeom>
+          <a:noFill/>
+          <a:ln w="12700">
+            <a:solidFill>
+              <a:srgbClr val="2A2F3C"/>
+            </a:solidFill>
+            <a:prstDash val="solid"/>
+          </a:ln>
+        </p:spPr>
+      </p:sp>
+      <p:sp>
+        <p:nvSpPr>
+          <p:cNvPr id="37" name="Text 34"/>
+          <p:cNvSpPr txBox="1"/>
+          <p:nvPr/>
+        </p:nvSpPr>
+        <p:spPr>
+          <a:xfrm>
+            <a:off x="9173489" y="4910328"/>
+            <a:ext cx="2268398" cy="219456"/>
+          </a:xfrm>
+          <a:prstGeom prst="rect">
+            <a:avLst/>
+          </a:prstGeom>
+          <a:noFill/>
+          <a:ln/>
+        </p:spPr>
+        <p:txBody>
+          <a:bodyPr wrap="square" lIns="0" tIns="0" rIns="0" bIns="0" rtlCol="0" anchor="t">
+            <a:normAutofit/>
+          </a:bodyPr>
+          <a:lstStyle/>
+          <a:p>
+            <a:pPr indent="0" marL="0">
+              <a:buNone/>
+            </a:pPr>
+            <a:r>
+              <a:rPr lang="en-US" sz="950" b="1" spc="100" kern="0" dirty="0">
+                <a:solidFill>
+                  <a:srgbClr val="9AA3B5"/>
+                </a:solidFill>
+                <a:latin typeface="Arial" pitchFamily="34" charset="0"/>
+                <a:ea typeface="Arial" pitchFamily="34" charset="-122"/>
+                <a:cs typeface="Arial" pitchFamily="34" charset="-120"/>
+              </a:rPr>
+              <a:t>GIBT FREI</a:t>
+            </a:r>
+            <a:endParaRPr lang="en-US" sz="950" dirty="0"/>
+          </a:p>
+        </p:txBody>
+      </p:sp>
+      <p:sp>
+        <p:nvSpPr>
+          <p:cNvPr id="38" name="Text 35"/>
+          <p:cNvSpPr txBox="1"/>
+          <p:nvPr/>
+        </p:nvSpPr>
+        <p:spPr>
+          <a:xfrm>
+            <a:off x="9173489" y="5148072"/>
+            <a:ext cx="2268398" cy="457200"/>
+          </a:xfrm>
+          <a:prstGeom prst="rect">
+            <a:avLst/>
+          </a:prstGeom>
+          <a:noFill/>
+          <a:ln/>
+        </p:spPr>
+        <p:txBody>
+          <a:bodyPr wrap="square" lIns="0" tIns="0" rIns="0" bIns="0" rtlCol="0" anchor="t">
+            <a:normAutofit/>
+          </a:bodyPr>
+          <a:lstStyle/>
+          <a:p>
+            <a:pPr indent="0" marL="0">
+              <a:buNone/>
+            </a:pPr>
+            <a:r>
+              <a:rPr lang="en-US" sz="1100" b="1" dirty="0">
+                <a:solidFill>
+                  <a:srgbClr val="5AD1FF"/>
+                </a:solidFill>
+                <a:latin typeface="Arial" pitchFamily="34" charset="0"/>
+                <a:ea typeface="Arial" pitchFamily="34" charset="-122"/>
+                <a:cs typeface="Arial" pitchFamily="34" charset="-120"/>
+              </a:rPr>
+              <a:t>Seed-Runde, Ausbau-Team ab Monat 19, Story-Engine/Studio</a:t>
+            </a:r>
+            <a:endParaRPr lang="en-US" sz="1100" dirty="0"/>
+          </a:p>
+        </p:txBody>
+      </p:sp>
+      <p:sp>
+        <p:nvSpPr>
+          <p:cNvPr id="39" name="Text 36"/>
+          <p:cNvSpPr txBox="1"/>
+          <p:nvPr/>
+        </p:nvSpPr>
+        <p:spPr>
+          <a:xfrm>
+            <a:off x="548640" y="5806440"/>
+            <a:ext cx="9997135" cy="457200"/>
+          </a:xfrm>
+          <a:prstGeom prst="rect">
+            <a:avLst/>
+          </a:prstGeom>
+          <a:noFill/>
+          <a:ln/>
+        </p:spPr>
+        <p:txBody>
+          <a:bodyPr wrap="square" lIns="0" tIns="0" rIns="0" bIns="0" rtlCol="0" anchor="t">
+            <a:normAutofit/>
+          </a:bodyPr>
+          <a:lstStyle/>
+          <a:p>
+            <a:pPr indent="0" marL="0">
+              <a:buNone/>
+            </a:pPr>
+            <a:r>
+              <a:rPr lang="en-US" sz="1100" i="1" dirty="0">
+                <a:solidFill>
+                  <a:srgbClr val="9AA3B5"/>
+                </a:solidFill>
+                <a:latin typeface="Arial" pitchFamily="34" charset="0"/>
+                <a:ea typeface="Arial" pitchFamily="34" charset="-122"/>
+                <a:cs typeface="Arial" pitchFamily="34" charset="-120"/>
+              </a:rPr>
+              <a:t>Alle Werte sind Ziele (nicht erreicht): Ziel = Basis-Szenario, Schwelle = konservatives Szenario. Ein Gate gilt als erfüllt, wenn die Schwelle erreicht ist. Vorschlag – mit Investor:innen abstimmen.</a:t>
+            </a:r>
+            <a:endParaRPr lang="en-US" sz="1100" dirty="0"/>
+          </a:p>
+        </p:txBody>
+      </p:sp>
+    </p:spTree>
+  </p:cSld>
+  <p:clrMapOvr>
+    <a:masterClrMapping/>
+  </p:clrMapOvr>
+</p:sld>
+</file>
+
+<file path=ppt/slides/slide19.xml><?xml version="1.0" encoding="utf-8"?>
+<p:sld xmlns:a="http://schemas.openxmlformats.org/drawingml/2006/main" xmlns:r="http://schemas.openxmlformats.org/officeDocument/2006/relationships" xmlns:p="http://schemas.openxmlformats.org/presentationml/2006/main">
+  <p:cSld name="Slide 19">
+    <p:bg>
+      <p:bgPr>
+        <a:solidFill>
+          <a:srgbClr val="0F1115"/>
+        </a:solidFill>
+      </p:bgPr>
+    </p:bg>
+    <p:spTree>
+      <p:nvGrpSpPr>
+        <p:cNvPr id="1" name=""/>
+        <p:cNvGrpSpPr/>
+        <p:nvPr/>
+      </p:nvGrpSpPr>
+      <p:grpSpPr>
+        <a:xfrm>
+          <a:off x="0" y="0"/>
+          <a:ext cx="0" cy="0"/>
+          <a:chOff x="0" y="0"/>
+          <a:chExt cx="0" cy="0"/>
+        </a:xfrm>
+      </p:grpSpPr>
       <p:pic>
         <p:nvPicPr>
           <p:cNvPr id="2" name="Image 0" descr="/home/user/Notion/live-fx/business/landing-assets/overlay-neon.jpg">    </p:cNvPr>
@@ -16367,7 +21551,7 @@
                 <a:ea typeface="Arial" pitchFamily="34" charset="-122"/>
                 <a:cs typeface="Arial" pitchFamily="34" charset="-120"/>
               </a:rPr>
-              <a:t>Pre-Seed: 500.000 €</a:t>
+              <a:t>Pre-Seed: 250.000 €</a:t>
             </a:r>
             <a:endParaRPr lang="en-US" sz="1600" dirty="0"/>
           </a:p>
@@ -16408,7 +21592,7 @@
                 <a:ea typeface="Arial" pitchFamily="34" charset="-122"/>
                 <a:cs typeface="Arial" pitchFamily="34" charset="-120"/>
               </a:rPr>
-              <a:t>Für LiveFX 2.0 und die Vision-Linien A–D (zuerst WortBild und Story-Engine), 24 Monate. Parallel offen für Übernahme-Gespräche (Technologie + Team).</a:t>
+              <a:t>Für 10 % (Pre-Money 2,25 Mio. €, Post 2,5 Mio. €) oder SAFE mit 2,25 Mio. € Cap. 18 Monate, schlank: Pro-Abo, Mobile-App/PWA, TR → DE/EN-Launch, WortBild.</a:t>
             </a:r>
             <a:endParaRPr lang="en-US" sz="1250" dirty="0"/>
           </a:p>
@@ -16476,7 +21660,7 @@
                 <a:ea typeface="Arial" pitchFamily="34" charset="-122"/>
                 <a:cs typeface="Arial" pitchFamily="34" charset="-120"/>
               </a:rPr>
-              <a:t>500.000 € Pre-Seed · 24 Monate · Mittelverwendung – Vorschlag – bitte bestätigen</a:t>
+              <a:t>250.000 € Pre-Seed · 18 Monate · Mittelverwendung – Vorschlag – mit Steuer-/Rechtsberater prüfen</a:t>
             </a:r>
             <a:endParaRPr lang="en-US" sz="1200" dirty="0"/>
           </a:p>
@@ -16667,7 +21851,7 @@
                 <a:ea typeface="Arial" pitchFamily="34" charset="-122"/>
                 <a:cs typeface="Arial" pitchFamily="34" charset="-120"/>
               </a:rPr>
-              <a:t>Produkt &amp; Engineering</a:t>
+              <a:t>Team &amp; Produkt</a:t>
             </a:r>
             <a:endParaRPr lang="en-US" sz="1000" dirty="0"/>
           </a:p>
@@ -16708,7 +21892,7 @@
                 <a:ea typeface="Arial" pitchFamily="34" charset="-122"/>
                 <a:cs typeface="Arial" pitchFamily="34" charset="-120"/>
               </a:rPr>
-              <a:t>250 T€ · 50 %</a:t>
+              <a:t>125 T€ · 50 %</a:t>
             </a:r>
             <a:endParaRPr lang="en-US" sz="1000" dirty="0"/>
           </a:p>
@@ -16774,7 +21958,7 @@
                 <a:ea typeface="Arial" pitchFamily="34" charset="-122"/>
                 <a:cs typeface="Arial" pitchFamily="34" charset="-120"/>
               </a:rPr>
-              <a:t>Vision-Linien A–D</a:t>
+              <a:t>Markteintritt &amp; Piloten</a:t>
             </a:r>
             <a:endParaRPr lang="en-US" sz="1000" dirty="0"/>
           </a:p>
@@ -16815,7 +21999,7 @@
                 <a:ea typeface="Arial" pitchFamily="34" charset="-122"/>
                 <a:cs typeface="Arial" pitchFamily="34" charset="-120"/>
               </a:rPr>
-              <a:t>100 T€ · 20 %</a:t>
+              <a:t>50 T€ · 20 %</a:t>
             </a:r>
             <a:endParaRPr lang="en-US" sz="1000" dirty="0"/>
           </a:p>
@@ -16881,7 +22065,7 @@
                 <a:ea typeface="Arial" pitchFamily="34" charset="-122"/>
                 <a:cs typeface="Arial" pitchFamily="34" charset="-120"/>
               </a:rPr>
-              <a:t>Go-to-Market &amp; Piloten</a:t>
+              <a:t>WortBild (Linie B)</a:t>
             </a:r>
             <a:endParaRPr lang="en-US" sz="1000" dirty="0"/>
           </a:p>
@@ -16922,7 +22106,7 @@
                 <a:ea typeface="Arial" pitchFamily="34" charset="-122"/>
                 <a:cs typeface="Arial" pitchFamily="34" charset="-120"/>
               </a:rPr>
-              <a:t>75 T€ · 15 %</a:t>
+              <a:t>37,5 T€ · 15 %</a:t>
             </a:r>
             <a:endParaRPr lang="en-US" sz="1000" dirty="0"/>
           </a:p>
@@ -17029,7 +22213,7 @@
                 <a:ea typeface="Arial" pitchFamily="34" charset="-122"/>
                 <a:cs typeface="Arial" pitchFamily="34" charset="-120"/>
               </a:rPr>
-              <a:t>50 T€ · 10 %</a:t>
+              <a:t>25 T€ · 10 %</a:t>
             </a:r>
             <a:endParaRPr lang="en-US" sz="1000" dirty="0"/>
           </a:p>
@@ -17136,7 +22320,7 @@
                 <a:ea typeface="Arial" pitchFamily="34" charset="-122"/>
                 <a:cs typeface="Arial" pitchFamily="34" charset="-120"/>
               </a:rPr>
-              <a:t>25 T€ · 5 %</a:t>
+              <a:t>12,5 T€ · 5 %</a:t>
             </a:r>
             <a:endParaRPr lang="en-US" sz="1000" dirty="0"/>
           </a:p>
@@ -17284,7 +22468,7 @@
                 <a:ea typeface="Arial" pitchFamily="34" charset="-122"/>
                 <a:cs typeface="Arial" pitchFamily="34" charset="-120"/>
               </a:rPr>
-              <a:t>Vertraulich · Oktober 2026  ·  LiveFX  ·  17</a:t>
+              <a:t>Vertraulich · Oktober 2026  ·  LiveFX  ·  19</a:t>
             </a:r>
             <a:endParaRPr lang="en-US" sz="900" dirty="0"/>
           </a:p>
@@ -20268,7 +25452,7 @@
                 <a:ea typeface="Arial" pitchFamily="34" charset="-122"/>
                 <a:cs typeface="Arial" pitchFamily="34" charset="-120"/>
               </a:rPr>
-              <a:t>Produkt heute – Version 2.0</a:t>
+              <a:t>Produkt heute – Version 2.1</a:t>
             </a:r>
             <a:endParaRPr lang="en-US" sz="3200" dirty="0"/>
           </a:p>
@@ -20521,7 +25705,7 @@
                 <a:ea typeface="Arial" pitchFamily="34" charset="-122"/>
                 <a:cs typeface="Arial" pitchFamily="34" charset="-120"/>
               </a:rPr>
-              <a:t>✨</a:t>
+              <a:t>⚡</a:t>
             </a:r>
             <a:endParaRPr lang="en-US" sz="2000" dirty="0"/>
           </a:p>
@@ -20562,7 +25746,7 @@
                 <a:ea typeface="Arial" pitchFamily="34" charset="-122"/>
                 <a:cs typeface="Arial" pitchFamily="34" charset="-120"/>
               </a:rPr>
-              <a:t>Effekt-Engine v2</a:t>
+              <a:t>Effekte &amp; Leistung</a:t>
             </a:r>
             <a:endParaRPr lang="en-US" sz="1400" dirty="0"/>
           </a:p>
@@ -20603,7 +25787,7 @@
                 <a:ea typeface="Arial" pitchFamily="34" charset="-122"/>
                 <a:cs typeface="Arial" pitchFamily="34" charset="-120"/>
               </a:rPr>
-              <a:t>Canvas-Partikel mit Physik (60 fps), Neon/Glitch-Text, Bauchbinden, Kombis, 4 Themes</a:t>
+              <a:t>Canvas-Partikel (60 fps), Neon/Glitch/Sticker-Text, Bauchbinden, Kombis, 4 Themes; Leistungsmodus: Bildzeit −63 bis −69 %</a:t>
             </a:r>
             <a:endParaRPr lang="en-US" sz="1100" dirty="0"/>
           </a:p>
@@ -20899,7 +26083,7 @@
                 <a:ea typeface="Arial" pitchFamily="34" charset="-122"/>
                 <a:cs typeface="Arial" pitchFamily="34" charset="-120"/>
               </a:rPr>
-              <a:t>Türkçe 85 · Deutsch 49 · English 50 · Familie &amp; Kinder 27 · Gaming 27 – plus GIF-Suche</a:t>
+              <a:t>Türkçe 85 · Deutsch 49 · English 50 · Familie &amp; Kinder 27 · Gaming 27 – plus Text-Sticker-Pakete TR/DE/EN</a:t>
             </a:r>
             <a:endParaRPr lang="en-US" sz="1100" dirty="0"/>
           </a:p>
@@ -20965,7 +26149,7 @@
                 <a:ea typeface="Arial" pitchFamily="34" charset="-122"/>
                 <a:cs typeface="Arial" pitchFamily="34" charset="-120"/>
               </a:rPr>
-              <a:t>🔊</a:t>
+              <a:t>✨</a:t>
             </a:r>
             <a:endParaRPr lang="en-US" sz="2000" dirty="0"/>
           </a:p>
@@ -21006,7 +26190,7 @@
                 <a:ea typeface="Arial" pitchFamily="34" charset="-122"/>
                 <a:cs typeface="Arial" pitchFamily="34" charset="-120"/>
               </a:rPr>
-              <a:t>Sound-Engine</a:t>
+              <a:t>Sticker &amp; GIFs</a:t>
             </a:r>
             <a:endParaRPr lang="en-US" sz="1400" dirty="0"/>
           </a:p>
@@ -21047,7 +26231,7 @@
                 <a:ea typeface="Arial" pitchFamily="34" charset="-122"/>
                 <a:cs typeface="Arial" pitchFamily="34" charset="-120"/>
               </a:rPr>
-              <a:t>38 synthetische Sounds (keine Lizenzkosten), Mixer mit Limiter, Ducking, Stereo, Hall</a:t>
+              <a:t>143 kostenlose Sticker (MIT-Lizenz, 119 animiert) · sichere GIF-Suche KLIPY/GIPHY mit Inhaltsfilter, GIFs verlinkt statt gespeichert</a:t>
             </a:r>
             <a:endParaRPr lang="en-US" sz="1100" dirty="0"/>
           </a:p>
@@ -21113,7 +26297,7 @@
                 <a:ea typeface="Arial" pitchFamily="34" charset="-122"/>
                 <a:cs typeface="Arial" pitchFamily="34" charset="-120"/>
               </a:rPr>
-              <a:t>💬</a:t>
+              <a:t>🔊</a:t>
             </a:r>
             <a:endParaRPr lang="en-US" sz="2000" dirty="0"/>
           </a:p>
@@ -21154,7 +26338,7 @@
                 <a:ea typeface="Arial" pitchFamily="34" charset="-122"/>
                 <a:cs typeface="Arial" pitchFamily="34" charset="-120"/>
               </a:rPr>
-              <a:t>Zuschauer-Trigger</a:t>
+              <a:t>Sound-Engine</a:t>
             </a:r>
             <a:endParaRPr lang="en-US" sz="1400" dirty="0"/>
           </a:p>
@@ -21195,7 +26379,7 @@
                 <a:ea typeface="Arial" pitchFamily="34" charset="-122"/>
                 <a:cs typeface="Arial" pitchFamily="34" charset="-120"/>
               </a:rPr>
-              <a:t>Twitch-Chat, YouTube-Chat, Geschenke-Webhook (TikTok via TikFinity / Streamer.bot)</a:t>
+              <a:t>38 synthetische Sounds (keine Lizenzkosten), Mixer mit Limiter, Ducking, Stereo, Hall</a:t>
             </a:r>
             <a:endParaRPr lang="en-US" sz="1100" dirty="0"/>
           </a:p>
@@ -21450,7 +26634,7 @@
                 <a:ea typeface="Arial" pitchFamily="34" charset="-122"/>
                 <a:cs typeface="Arial" pitchFamily="34" charset="-120"/>
               </a:rPr>
-              <a:t>Offene API</a:t>
+              <a:t>Zuschauer &amp; offene API</a:t>
             </a:r>
             <a:endParaRPr lang="en-US" sz="1400" dirty="0"/>
           </a:p>
@@ -21491,7 +26675,7 @@
                 <a:ea typeface="Arial" pitchFamily="34" charset="-122"/>
                 <a:cs typeface="Arial" pitchFamily="34" charset="-120"/>
               </a:rPr>
-              <a:t>HTTP-API mit Token (Stream Deck, Chat-Bots, externe ASR), 240+ automatisierte Tests</a:t>
+              <a:t>Twitch-/YouTube-Chat, Geschenke-Webhook (TikFinity / Streamer.bot), HTTP-API mit Token, 575+ automatisierte Tests</a:t>
             </a:r>
             <a:endParaRPr lang="en-US" sz="1100" dirty="0"/>
           </a:p>
@@ -24659,7 +29843,7 @@
                 <a:ea typeface="Arial" pitchFamily="34" charset="-122"/>
                 <a:cs typeface="Arial" pitchFamily="34" charset="-120"/>
               </a:rPr>
-              <a:t>2.0</a:t>
+              <a:t>2.1</a:t>
             </a:r>
             <a:endParaRPr lang="en-US" sz="3800" dirty="0"/>
           </a:p>
@@ -24700,7 +29884,7 @@
                 <a:ea typeface="Arial" pitchFamily="34" charset="-122"/>
                 <a:cs typeface="Arial" pitchFamily="34" charset="-120"/>
               </a:rPr>
-              <a:t>aktuelle Version (Releases 0.1 → 2.0), 240+ automatisierte Tests, Anleitungen DE/TR</a:t>
+              <a:t>aktuelle Version (Releases 0.1 → 2.1), 575+ automatisierte Tests, Anleitungen DE/TR</a:t>
             </a:r>
             <a:endParaRPr lang="en-US" sz="1200" dirty="0"/>
           </a:p>
@@ -24782,7 +29966,7 @@
                 <a:ea typeface="Arial" pitchFamily="34" charset="-122"/>
                 <a:cs typeface="Arial" pitchFamily="34" charset="-120"/>
               </a:rPr>
-              <a:t>Trigger in 5 Paketen, 3 Story-Pakete, 38 Sounds, 13 Szenen – in 3 Sprachen</a:t>
+              <a:t>Trigger in 5 Paketen + 143 freie Sticker, 38 Sounds, 13 Szenen – in 3 Sprachen</a:t>
             </a:r>
             <a:endParaRPr lang="en-US" sz="1200" dirty="0"/>
           </a:p>

--- a/live-fx/business/LiveFX_Pitch.pptx
+++ b/live-fx/business/LiveFX_Pitch.pptx
@@ -125,7 +125,7 @@
   <p:extLst>
     <p:ext uri="{521415D9-36F7-43E2-AB2F-B90AF26B5E84}">
       <p14:sectionLst xmlns:p14="http://schemas.microsoft.com/office/powerpoint/2010/main">
-        <p14:section name="Heute: LiveFX 2.1" id="{f1613e5f-53a5-6353-1122-f7dc61b0abbd}">
+        <p14:section name="Heute: LiveFX 2.1" id="{6c83759f-4bf6-04f8-9990-41d100ceda1c}">
           <p14:sldIdLst>
             <p14:sldId id="256"/>
             <p14:sldId id="257"/>
@@ -140,7 +140,7 @@
             <p14:sldId id="266"/>
           </p14:sldIdLst>
         </p14:section>
-        <p14:section name="Vision 2027–2029" id="{7fa908a5-2b7a-2e04-7c8a-963e9d4c976d}">
+        <p14:section name="Vision 2027–2029" id="{d691f47b-67f7-c1e9-31e8-09aeb43193e9}">
           <p14:sldIdLst>
             <p14:sldId id="267"/>
             <p14:sldId id="268"/>
@@ -148,7 +148,7 @@
             <p14:sldId id="270"/>
           </p14:sldIdLst>
         </p14:section>
-        <p14:section name="Team und Ask" id="{f7b1e52c-d0ae-9a81-acc4-95620f33f16c}">
+        <p14:section name="Team und Ask" id="{56375c3a-fcd5-b1e1-534a-f531db1d4e1b}">
           <p14:sldIdLst>
             <p14:sldId id="271"/>
             <p14:sldId id="272"/>
@@ -19255,7 +19255,7 @@
                 <a:ea typeface="Arial" pitchFamily="34" charset="-122"/>
                 <a:cs typeface="Arial" pitchFamily="34" charset="-120"/>
               </a:rPr>
-              <a:t>Pre-Money · 250 T€ für 10,0 % · Post-Money 2,5 Mio. €</a:t>
+              <a:t>Pre-Money · 250 T€ für 10,0 % · Post-Money 2,5 Mio. €</a:t>
             </a:r>
             <a:endParaRPr lang="en-US" sz="1200" dirty="0"/>
           </a:p>
@@ -21592,7 +21592,7 @@
                 <a:ea typeface="Arial" pitchFamily="34" charset="-122"/>
                 <a:cs typeface="Arial" pitchFamily="34" charset="-120"/>
               </a:rPr>
-              <a:t>Für 10 % (Pre-Money 2,25 Mio. €, Post 2,5 Mio. €) oder SAFE mit 2,25 Mio. € Cap. 18 Monate, schlank: Pro-Abo, Mobile-App/PWA, TR → DE/EN-Launch, WortBild.</a:t>
+              <a:t>Für 10 % (Pre-Money 2,25 Mio. €, Post 2,5 Mio. €) oder SAFE mit 2,25 Mio. € Cap. 18 Monate, schlank: Pro-Abo, Mobile-App/PWA, TR → DE/EN-Launch, WortBild.</a:t>
             </a:r>
             <a:endParaRPr lang="en-US" sz="1250" dirty="0"/>
           </a:p>
